--- a/presentation/page-replacement.pptx
+++ b/presentation/page-replacement.pptx
@@ -256,7 +256,7 @@
           </c:val>
           <c:extLst>
             <c:ext xmlns:c16="http://schemas.microsoft.com/office/drawing/2014/chart" uri="{C3380CC4-5D6E-409C-BE32-E72D297353CC}">
-              <c16:uniqueId val="{00000000-1EB5-4281-ACC7-BD7D41B77E07}"/>
+              <c16:uniqueId val="{00000000-963A-4154-B4E9-06975182F883}"/>
             </c:ext>
           </c:extLst>
         </c:ser>
@@ -264,7 +264,7 @@
           <c:idx val="1"/>
           <c:order val="1"/>
           <c:tx>
-            <c:v>Adaptive V2 缺页率</c:v>
+            <c:v>Adaptive V3 缺页率</c:v>
           </c:tx>
           <c:spPr>
             <a:solidFill>
@@ -342,23 +342,23 @@
                 <c:formatCode>0%</c:formatCode>
                 <c:ptCount val="4"/>
                 <c:pt idx="0">
-                  <c:v>0.6351145</c:v>
+                  <c:v>0.64357506</c:v>
                 </c:pt>
                 <c:pt idx="1">
-                  <c:v>0.67753873</c:v>
+                  <c:v>0.6746717</c:v>
                 </c:pt>
                 <c:pt idx="2">
-                  <c:v>0.40855831</c:v>
+                  <c:v>0.40544353</c:v>
                 </c:pt>
                 <c:pt idx="3">
-                  <c:v>0.59251779</c:v>
+                  <c:v>0.58044074</c:v>
                 </c:pt>
               </c:numCache>
             </c:numRef>
           </c:val>
           <c:extLst>
             <c:ext xmlns:c16="http://schemas.microsoft.com/office/drawing/2014/chart" uri="{C3380CC4-5D6E-409C-BE32-E72D297353CC}">
-              <c16:uniqueId val="{00000001-1EB5-4281-ACC7-BD7D41B77E07}"/>
+              <c16:uniqueId val="{00000001-963A-4154-B4E9-06975182F883}"/>
             </c:ext>
           </c:extLst>
         </c:ser>
@@ -620,7 +620,7 @@
           </c:val>
           <c:extLst>
             <c:ext xmlns:c16="http://schemas.microsoft.com/office/drawing/2014/chart" uri="{C3380CC4-5D6E-409C-BE32-E72D297353CC}">
-              <c16:uniqueId val="{00000000-6800-4337-8242-7A80242D8E89}"/>
+              <c16:uniqueId val="{00000000-35C7-4068-8292-E8A4E0F41BF1}"/>
             </c:ext>
           </c:extLst>
         </c:ser>
@@ -628,7 +628,7 @@
           <c:idx val="1"/>
           <c:order val="1"/>
           <c:tx>
-            <c:v>Adaptive V2</c:v>
+            <c:v>Adaptive V3</c:v>
           </c:tx>
           <c:spPr>
             <a:solidFill>
@@ -713,13 +713,13 @@
                   <c:v>0.81817357</c:v>
                 </c:pt>
                 <c:pt idx="1">
-                  <c:v>0.73264619</c:v>
+                  <c:v>0.73270568</c:v>
                 </c:pt>
                 <c:pt idx="2">
-                  <c:v>0.59251779</c:v>
+                  <c:v>0.58044074</c:v>
                 </c:pt>
                 <c:pt idx="3">
-                  <c:v>0.41714231</c:v>
+                  <c:v>0.40838797</c:v>
                 </c:pt>
                 <c:pt idx="4">
                   <c:v>1</c:v>
@@ -729,7 +729,7 @@
           </c:val>
           <c:extLst>
             <c:ext xmlns:c16="http://schemas.microsoft.com/office/drawing/2014/chart" uri="{C3380CC4-5D6E-409C-BE32-E72D297353CC}">
-              <c16:uniqueId val="{00000001-6800-4337-8242-7A80242D8E89}"/>
+              <c16:uniqueId val="{00000001-35C7-4068-8292-E8A4E0F41BF1}"/>
             </c:ext>
           </c:extLst>
         </c:ser>
@@ -905,7 +905,7 @@
           <c:idx val="0"/>
           <c:order val="0"/>
           <c:tx>
-            <c:v>LRU = 1</c:v>
+            <c:v>V2</c:v>
           </c:tx>
           <c:spPr>
             <a:solidFill>
@@ -917,7 +917,7 @@
           </c:spPr>
           <c:invertIfNegative val="0"/>
           <c:dLbls>
-            <c:numFmt formatCode="0.00" sourceLinked="0"/>
+            <c:numFmt formatCode="#,##0" sourceLinked="0"/>
             <c:spPr>
               <a:noFill/>
               <a:ln>
@@ -958,60 +958,48 @@
           </c:dLbls>
           <c:cat>
             <c:strRef>
-              <c:f>'Chart Data'!$A$2:$A$7</c:f>
+              <c:f>'Chart Data'!$A$2:$A$5</c:f>
               <c:strCache>
-                <c:ptCount val="6"/>
+                <c:ptCount val="4"/>
                 <c:pt idx="0">
-                  <c:v>顺序扫描</c:v>
+                  <c:v>轮换热点</c:v>
                 </c:pt>
                 <c:pt idx="1">
-                  <c:v>73 页循环</c:v>
+                  <c:v>扰动循环 97</c:v>
                 </c:pt>
                 <c:pt idx="2">
-                  <c:v>149 页循环</c:v>
+                  <c:v>交替回访</c:v>
                 </c:pt>
                 <c:pt idx="3">
-                  <c:v>热点 + 扫描</c:v>
-                </c:pt>
-                <c:pt idx="4">
-                  <c:v>阶段切换</c:v>
-                </c:pt>
-                <c:pt idx="5">
-                  <c:v>均匀随机</c:v>
+                  <c:v>热点 + 长扫描</c:v>
                 </c:pt>
               </c:strCache>
             </c:strRef>
           </c:cat>
           <c:val>
             <c:numRef>
-              <c:f>'Chart Data'!$B$2:$B$7</c:f>
+              <c:f>'Chart Data'!$B$2:$B$5</c:f>
               <c:numCache>
-                <c:formatCode>0.00</c:formatCode>
-                <c:ptCount val="6"/>
+                <c:formatCode>#,##0</c:formatCode>
+                <c:ptCount val="4"/>
                 <c:pt idx="0">
-                  <c:v>1</c:v>
+                  <c:v>4092.11333333</c:v>
                 </c:pt>
                 <c:pt idx="1">
-                  <c:v>1</c:v>
+                  <c:v>5055.03333333</c:v>
                 </c:pt>
                 <c:pt idx="2">
-                  <c:v>1</c:v>
+                  <c:v>7836.16</c:v>
                 </c:pt>
                 <c:pt idx="3">
-                  <c:v>1</c:v>
-                </c:pt>
-                <c:pt idx="4">
-                  <c:v>1</c:v>
-                </c:pt>
-                <c:pt idx="5">
-                  <c:v>1</c:v>
+                  <c:v>7291.22666667</c:v>
                 </c:pt>
               </c:numCache>
             </c:numRef>
           </c:val>
           <c:extLst>
             <c:ext xmlns:c16="http://schemas.microsoft.com/office/drawing/2014/chart" uri="{C3380CC4-5D6E-409C-BE32-E72D297353CC}">
-              <c16:uniqueId val="{00000000-26D1-4C0F-8BF7-88BC18783D15}"/>
+              <c16:uniqueId val="{00000000-F8FA-4852-8946-13E9823A5A19}"/>
             </c:ext>
           </c:extLst>
         </c:ser>
@@ -1019,7 +1007,7 @@
           <c:idx val="1"/>
           <c:order val="1"/>
           <c:tx>
-            <c:v>Adaptive / LRU</c:v>
+            <c:v>V3</c:v>
           </c:tx>
           <c:spPr>
             <a:solidFill>
@@ -1031,7 +1019,7 @@
           </c:spPr>
           <c:invertIfNegative val="0"/>
           <c:dLbls>
-            <c:numFmt formatCode="0.00" sourceLinked="0"/>
+            <c:numFmt formatCode="#,##0" sourceLinked="0"/>
             <c:spPr>
               <a:noFill/>
               <a:ln>
@@ -1072,60 +1060,48 @@
           </c:dLbls>
           <c:cat>
             <c:strRef>
-              <c:f>'Chart Data'!$C$2:$C$7</c:f>
+              <c:f>'Chart Data'!$C$2:$C$5</c:f>
               <c:strCache>
-                <c:ptCount val="6"/>
+                <c:ptCount val="4"/>
                 <c:pt idx="0">
-                  <c:v>顺序扫描</c:v>
+                  <c:v>轮换热点</c:v>
                 </c:pt>
                 <c:pt idx="1">
-                  <c:v>73 页循环</c:v>
+                  <c:v>扰动循环 97</c:v>
                 </c:pt>
                 <c:pt idx="2">
-                  <c:v>149 页循环</c:v>
+                  <c:v>交替回访</c:v>
                 </c:pt>
                 <c:pt idx="3">
-                  <c:v>热点 + 扫描</c:v>
-                </c:pt>
-                <c:pt idx="4">
-                  <c:v>阶段切换</c:v>
-                </c:pt>
-                <c:pt idx="5">
-                  <c:v>均匀随机</c:v>
+                  <c:v>热点 + 长扫描</c:v>
                 </c:pt>
               </c:strCache>
             </c:strRef>
           </c:cat>
           <c:val>
             <c:numRef>
-              <c:f>'Chart Data'!$D$2:$D$7</c:f>
+              <c:f>'Chart Data'!$D$2:$D$5</c:f>
               <c:numCache>
-                <c:formatCode>0.00</c:formatCode>
-                <c:ptCount val="6"/>
+                <c:formatCode>#,##0</c:formatCode>
+                <c:ptCount val="4"/>
                 <c:pt idx="0">
-                  <c:v>1</c:v>
+                  <c:v>4090.56666667</c:v>
                 </c:pt>
                 <c:pt idx="1">
-                  <c:v>0.73411291</c:v>
+                  <c:v>5102.47333333</c:v>
                 </c:pt>
                 <c:pt idx="2">
-                  <c:v>0.78778778</c:v>
+                  <c:v>7836.16</c:v>
                 </c:pt>
                 <c:pt idx="3">
-                  <c:v>0.90373211</c:v>
-                </c:pt>
-                <c:pt idx="4">
-                  <c:v>0.70038044</c:v>
-                </c:pt>
-                <c:pt idx="5">
-                  <c:v>1.00137841</c:v>
+                  <c:v>7292.32</c:v>
                 </c:pt>
               </c:numCache>
             </c:numRef>
           </c:val>
           <c:extLst>
             <c:ext xmlns:c16="http://schemas.microsoft.com/office/drawing/2014/chart" uri="{C3380CC4-5D6E-409C-BE32-E72D297353CC}">
-              <c16:uniqueId val="{00000001-26D1-4C0F-8BF7-88BC18783D15}"/>
+              <c16:uniqueId val="{00000001-F8FA-4852-8946-13E9823A5A19}"/>
             </c:ext>
           </c:extLst>
         </c:ser>
@@ -1188,7 +1164,6 @@
         <c:axId val="48672768"/>
         <c:scaling>
           <c:orientation val="minMax"/>
-          <c:max val="1.2"/>
           <c:min val="0"/>
         </c:scaling>
         <c:delete val="0"/>
@@ -1202,7 +1177,7 @@
             </a:ln>
           </c:spPr>
         </c:majorGridlines>
-        <c:numFmt formatCode="0.00" sourceLinked="1"/>
+        <c:numFmt formatCode="#,##0" sourceLinked="1"/>
         <c:majorTickMark val="none"/>
         <c:minorTickMark val="none"/>
         <c:tickLblPos val="nextTo"/>
@@ -1323,7 +1298,7 @@
             </c:spPr>
             <c:extLst>
               <c:ext xmlns:c16="http://schemas.microsoft.com/office/drawing/2014/chart" uri="{C3380CC4-5D6E-409C-BE32-E72D297353CC}">
-                <c16:uniqueId val="{00000001-C52F-4506-9D68-0341549A9120}"/>
+                <c16:uniqueId val="{00000001-D931-412D-BBBC-F9D585DD1DFA}"/>
               </c:ext>
             </c:extLst>
           </c:dPt>
@@ -1338,7 +1313,7 @@
             </c:spPr>
             <c:extLst>
               <c:ext xmlns:c16="http://schemas.microsoft.com/office/drawing/2014/chart" uri="{C3380CC4-5D6E-409C-BE32-E72D297353CC}">
-                <c16:uniqueId val="{00000003-C52F-4506-9D68-0341549A9120}"/>
+                <c16:uniqueId val="{00000003-D931-412D-BBBC-F9D585DD1DFA}"/>
               </c:ext>
             </c:extLst>
           </c:dPt>
@@ -1353,7 +1328,7 @@
             </c:spPr>
             <c:extLst>
               <c:ext xmlns:c16="http://schemas.microsoft.com/office/drawing/2014/chart" uri="{C3380CC4-5D6E-409C-BE32-E72D297353CC}">
-                <c16:uniqueId val="{00000005-C52F-4506-9D68-0341549A9120}"/>
+                <c16:uniqueId val="{00000005-D931-412D-BBBC-F9D585DD1DFA}"/>
               </c:ext>
             </c:extLst>
           </c:dPt>
@@ -1368,7 +1343,7 @@
             </c:spPr>
             <c:extLst>
               <c:ext xmlns:c16="http://schemas.microsoft.com/office/drawing/2014/chart" uri="{C3380CC4-5D6E-409C-BE32-E72D297353CC}">
-                <c16:uniqueId val="{00000007-C52F-4506-9D68-0341549A9120}"/>
+                <c16:uniqueId val="{00000007-D931-412D-BBBC-F9D585DD1DFA}"/>
               </c:ext>
             </c:extLst>
           </c:dPt>
@@ -1383,7 +1358,7 @@
             </c:spPr>
             <c:extLst>
               <c:ext xmlns:c16="http://schemas.microsoft.com/office/drawing/2014/chart" uri="{C3380CC4-5D6E-409C-BE32-E72D297353CC}">
-                <c16:uniqueId val="{00000009-C52F-4506-9D68-0341549A9120}"/>
+                <c16:uniqueId val="{00000009-D931-412D-BBBC-F9D585DD1DFA}"/>
               </c:ext>
             </c:extLst>
           </c:dPt>
@@ -1398,7 +1373,7 @@
             </c:spPr>
             <c:extLst>
               <c:ext xmlns:c16="http://schemas.microsoft.com/office/drawing/2014/chart" uri="{C3380CC4-5D6E-409C-BE32-E72D297353CC}">
-                <c16:uniqueId val="{0000000B-C52F-4506-9D68-0341549A9120}"/>
+                <c16:uniqueId val="{0000000B-D931-412D-BBBC-F9D585DD1DFA}"/>
               </c:ext>
             </c:extLst>
           </c:dPt>
@@ -1413,7 +1388,7 @@
             </c:spPr>
             <c:extLst>
               <c:ext xmlns:c16="http://schemas.microsoft.com/office/drawing/2014/chart" uri="{C3380CC4-5D6E-409C-BE32-E72D297353CC}">
-                <c16:uniqueId val="{0000000D-C52F-4506-9D68-0341549A9120}"/>
+                <c16:uniqueId val="{0000000D-D931-412D-BBBC-F9D585DD1DFA}"/>
               </c:ext>
             </c:extLst>
           </c:dPt>
@@ -1481,7 +1456,7 @@
                   <c:v>Clock</c:v>
                 </c:pt>
                 <c:pt idx="6">
-                  <c:v>Adaptive V2</c:v>
+                  <c:v>Adaptive V3</c:v>
                 </c:pt>
               </c:strCache>
             </c:strRef>
@@ -1511,14 +1486,14 @@
                   <c:v>24470.9</c:v>
                 </c:pt>
                 <c:pt idx="6">
-                  <c:v>17354.63333333</c:v>
+                  <c:v>17100.79333333</c:v>
                 </c:pt>
               </c:numCache>
             </c:numRef>
           </c:val>
           <c:extLst>
             <c:ext xmlns:c16="http://schemas.microsoft.com/office/drawing/2014/chart" uri="{C3380CC4-5D6E-409C-BE32-E72D297353CC}">
-              <c16:uniqueId val="{0000000E-C52F-4506-9D68-0341549A9120}"/>
+              <c16:uniqueId val="{0000000E-D931-412D-BBBC-F9D585DD1DFA}"/>
             </c:ext>
           </c:extLst>
         </c:ser>
@@ -1755,7 +1730,7 @@
           </c:val>
           <c:extLst>
             <c:ext xmlns:c16="http://schemas.microsoft.com/office/drawing/2014/chart" uri="{C3380CC4-5D6E-409C-BE32-E72D297353CC}">
-              <c16:uniqueId val="{00000000-652A-417F-AC34-BB7DB0D8D626}"/>
+              <c16:uniqueId val="{00000000-EEBA-4988-9C79-99FC420E29B0}"/>
             </c:ext>
           </c:extLst>
         </c:ser>
@@ -1824,7 +1799,7 @@
           </c:val>
           <c:extLst>
             <c:ext xmlns:c16="http://schemas.microsoft.com/office/drawing/2014/chart" uri="{C3380CC4-5D6E-409C-BE32-E72D297353CC}">
-              <c16:uniqueId val="{00000001-652A-417F-AC34-BB7DB0D8D626}"/>
+              <c16:uniqueId val="{00000001-EEBA-4988-9C79-99FC420E29B0}"/>
             </c:ext>
           </c:extLst>
         </c:ser>
@@ -1893,7 +1868,7 @@
           </c:val>
           <c:extLst>
             <c:ext xmlns:c16="http://schemas.microsoft.com/office/drawing/2014/chart" uri="{C3380CC4-5D6E-409C-BE32-E72D297353CC}">
-              <c16:uniqueId val="{00000002-652A-417F-AC34-BB7DB0D8D626}"/>
+              <c16:uniqueId val="{00000002-EEBA-4988-9C79-99FC420E29B0}"/>
             </c:ext>
           </c:extLst>
         </c:ser>
@@ -1962,7 +1937,7 @@
           </c:val>
           <c:extLst>
             <c:ext xmlns:c16="http://schemas.microsoft.com/office/drawing/2014/chart" uri="{C3380CC4-5D6E-409C-BE32-E72D297353CC}">
-              <c16:uniqueId val="{00000003-652A-417F-AC34-BB7DB0D8D626}"/>
+              <c16:uniqueId val="{00000003-EEBA-4988-9C79-99FC420E29B0}"/>
             </c:ext>
           </c:extLst>
         </c:ser>
@@ -2031,7 +2006,7 @@
           </c:val>
           <c:extLst>
             <c:ext xmlns:c16="http://schemas.microsoft.com/office/drawing/2014/chart" uri="{C3380CC4-5D6E-409C-BE32-E72D297353CC}">
-              <c16:uniqueId val="{00000004-652A-417F-AC34-BB7DB0D8D626}"/>
+              <c16:uniqueId val="{00000004-EEBA-4988-9C79-99FC420E29B0}"/>
             </c:ext>
           </c:extLst>
         </c:ser>
@@ -2100,7 +2075,7 @@
           </c:val>
           <c:extLst>
             <c:ext xmlns:c16="http://schemas.microsoft.com/office/drawing/2014/chart" uri="{C3380CC4-5D6E-409C-BE32-E72D297353CC}">
-              <c16:uniqueId val="{00000005-652A-417F-AC34-BB7DB0D8D626}"/>
+              <c16:uniqueId val="{00000005-EEBA-4988-9C79-99FC420E29B0}"/>
             </c:ext>
           </c:extLst>
         </c:ser>
@@ -2108,7 +2083,7 @@
           <c:idx val="6"/>
           <c:order val="6"/>
           <c:tx>
-            <c:v>Adaptive V2</c:v>
+            <c:v>Adaptive V3</c:v>
           </c:tx>
           <c:spPr>
             <a:solidFill>
@@ -2150,13 +2125,13 @@
                 <c:formatCode>#,##0</c:formatCode>
                 <c:ptCount val="5"/>
                 <c:pt idx="0">
-                  <c:v>489.16666667</c:v>
+                  <c:v>490.16666667</c:v>
                 </c:pt>
                 <c:pt idx="1">
-                  <c:v>436.73333333</c:v>
+                  <c:v>438.36666667</c:v>
                 </c:pt>
                 <c:pt idx="2">
-                  <c:v>332.8</c:v>
+                  <c:v>337.23333333</c:v>
                 </c:pt>
                 <c:pt idx="3">
                   <c:v>199</c:v>
@@ -2169,7 +2144,7 @@
           </c:val>
           <c:extLst>
             <c:ext xmlns:c16="http://schemas.microsoft.com/office/drawing/2014/chart" uri="{C3380CC4-5D6E-409C-BE32-E72D297353CC}">
-              <c16:uniqueId val="{00000006-652A-417F-AC34-BB7DB0D8D626}"/>
+              <c16:uniqueId val="{00000006-EEBA-4988-9C79-99FC420E29B0}"/>
             </c:ext>
           </c:extLst>
         </c:ser>
@@ -2426,7 +2401,7 @@
           </c:val>
           <c:extLst>
             <c:ext xmlns:c16="http://schemas.microsoft.com/office/drawing/2014/chart" uri="{C3380CC4-5D6E-409C-BE32-E72D297353CC}">
-              <c16:uniqueId val="{00000000-9A32-49C4-9EC4-9DCAC94C12A2}"/>
+              <c16:uniqueId val="{00000000-70C5-472D-ACF1-DEFB7E53B8B9}"/>
             </c:ext>
           </c:extLst>
         </c:ser>
@@ -2495,7 +2470,7 @@
           </c:val>
           <c:extLst>
             <c:ext xmlns:c16="http://schemas.microsoft.com/office/drawing/2014/chart" uri="{C3380CC4-5D6E-409C-BE32-E72D297353CC}">
-              <c16:uniqueId val="{00000001-9A32-49C4-9EC4-9DCAC94C12A2}"/>
+              <c16:uniqueId val="{00000001-70C5-472D-ACF1-DEFB7E53B8B9}"/>
             </c:ext>
           </c:extLst>
         </c:ser>
@@ -2564,7 +2539,7 @@
           </c:val>
           <c:extLst>
             <c:ext xmlns:c16="http://schemas.microsoft.com/office/drawing/2014/chart" uri="{C3380CC4-5D6E-409C-BE32-E72D297353CC}">
-              <c16:uniqueId val="{00000002-9A32-49C4-9EC4-9DCAC94C12A2}"/>
+              <c16:uniqueId val="{00000002-70C5-472D-ACF1-DEFB7E53B8B9}"/>
             </c:ext>
           </c:extLst>
         </c:ser>
@@ -2633,7 +2608,7 @@
           </c:val>
           <c:extLst>
             <c:ext xmlns:c16="http://schemas.microsoft.com/office/drawing/2014/chart" uri="{C3380CC4-5D6E-409C-BE32-E72D297353CC}">
-              <c16:uniqueId val="{00000003-9A32-49C4-9EC4-9DCAC94C12A2}"/>
+              <c16:uniqueId val="{00000003-70C5-472D-ACF1-DEFB7E53B8B9}"/>
             </c:ext>
           </c:extLst>
         </c:ser>
@@ -2702,7 +2677,7 @@
           </c:val>
           <c:extLst>
             <c:ext xmlns:c16="http://schemas.microsoft.com/office/drawing/2014/chart" uri="{C3380CC4-5D6E-409C-BE32-E72D297353CC}">
-              <c16:uniqueId val="{00000004-9A32-49C4-9EC4-9DCAC94C12A2}"/>
+              <c16:uniqueId val="{00000004-70C5-472D-ACF1-DEFB7E53B8B9}"/>
             </c:ext>
           </c:extLst>
         </c:ser>
@@ -2771,7 +2746,7 @@
           </c:val>
           <c:extLst>
             <c:ext xmlns:c16="http://schemas.microsoft.com/office/drawing/2014/chart" uri="{C3380CC4-5D6E-409C-BE32-E72D297353CC}">
-              <c16:uniqueId val="{00000005-9A32-49C4-9EC4-9DCAC94C12A2}"/>
+              <c16:uniqueId val="{00000005-70C5-472D-ACF1-DEFB7E53B8B9}"/>
             </c:ext>
           </c:extLst>
         </c:ser>
@@ -2779,7 +2754,7 @@
           <c:idx val="6"/>
           <c:order val="6"/>
           <c:tx>
-            <c:v>Adaptive V2</c:v>
+            <c:v>Adaptive V3</c:v>
           </c:tx>
           <c:spPr>
             <a:solidFill>
@@ -2821,26 +2796,26 @@
                 <c:formatCode>#,##0</c:formatCode>
                 <c:ptCount val="5"/>
                 <c:pt idx="0">
-                  <c:v>34365.76666667</c:v>
+                  <c:v>34422.93333333</c:v>
                 </c:pt>
                 <c:pt idx="1">
-                  <c:v>29995.9</c:v>
+                  <c:v>29702.9</c:v>
                 </c:pt>
                 <c:pt idx="2">
-                  <c:v>28342.8</c:v>
+                  <c:v>28222.86666667</c:v>
                 </c:pt>
                 <c:pt idx="3">
-                  <c:v>25377</c:v>
+                  <c:v>23324</c:v>
                 </c:pt>
                 <c:pt idx="4">
-                  <c:v>18584</c:v>
+                  <c:v>17452</c:v>
                 </c:pt>
               </c:numCache>
             </c:numRef>
           </c:val>
           <c:extLst>
             <c:ext xmlns:c16="http://schemas.microsoft.com/office/drawing/2014/chart" uri="{C3380CC4-5D6E-409C-BE32-E72D297353CC}">
-              <c16:uniqueId val="{00000006-9A32-49C4-9EC4-9DCAC94C12A2}"/>
+              <c16:uniqueId val="{00000006-70C5-472D-ACF1-DEFB7E53B8B9}"/>
             </c:ext>
           </c:extLst>
         </c:ser>
@@ -3097,7 +3072,7 @@
           </c:val>
           <c:extLst>
             <c:ext xmlns:c16="http://schemas.microsoft.com/office/drawing/2014/chart" uri="{C3380CC4-5D6E-409C-BE32-E72D297353CC}">
-              <c16:uniqueId val="{00000000-42C2-41C0-98D2-178C7487F2D3}"/>
+              <c16:uniqueId val="{00000000-057A-4CFE-97AE-1DE88C2A8955}"/>
             </c:ext>
           </c:extLst>
         </c:ser>
@@ -3166,7 +3141,7 @@
           </c:val>
           <c:extLst>
             <c:ext xmlns:c16="http://schemas.microsoft.com/office/drawing/2014/chart" uri="{C3380CC4-5D6E-409C-BE32-E72D297353CC}">
-              <c16:uniqueId val="{00000001-42C2-41C0-98D2-178C7487F2D3}"/>
+              <c16:uniqueId val="{00000001-057A-4CFE-97AE-1DE88C2A8955}"/>
             </c:ext>
           </c:extLst>
         </c:ser>
@@ -3235,7 +3210,7 @@
           </c:val>
           <c:extLst>
             <c:ext xmlns:c16="http://schemas.microsoft.com/office/drawing/2014/chart" uri="{C3380CC4-5D6E-409C-BE32-E72D297353CC}">
-              <c16:uniqueId val="{00000002-42C2-41C0-98D2-178C7487F2D3}"/>
+              <c16:uniqueId val="{00000002-057A-4CFE-97AE-1DE88C2A8955}"/>
             </c:ext>
           </c:extLst>
         </c:ser>
@@ -3304,7 +3279,7 @@
           </c:val>
           <c:extLst>
             <c:ext xmlns:c16="http://schemas.microsoft.com/office/drawing/2014/chart" uri="{C3380CC4-5D6E-409C-BE32-E72D297353CC}">
-              <c16:uniqueId val="{00000003-42C2-41C0-98D2-178C7487F2D3}"/>
+              <c16:uniqueId val="{00000003-057A-4CFE-97AE-1DE88C2A8955}"/>
             </c:ext>
           </c:extLst>
         </c:ser>
@@ -3373,7 +3348,7 @@
           </c:val>
           <c:extLst>
             <c:ext xmlns:c16="http://schemas.microsoft.com/office/drawing/2014/chart" uri="{C3380CC4-5D6E-409C-BE32-E72D297353CC}">
-              <c16:uniqueId val="{00000004-42C2-41C0-98D2-178C7487F2D3}"/>
+              <c16:uniqueId val="{00000004-057A-4CFE-97AE-1DE88C2A8955}"/>
             </c:ext>
           </c:extLst>
         </c:ser>
@@ -3442,7 +3417,7 @@
           </c:val>
           <c:extLst>
             <c:ext xmlns:c16="http://schemas.microsoft.com/office/drawing/2014/chart" uri="{C3380CC4-5D6E-409C-BE32-E72D297353CC}">
-              <c16:uniqueId val="{00000005-42C2-41C0-98D2-178C7487F2D3}"/>
+              <c16:uniqueId val="{00000005-057A-4CFE-97AE-1DE88C2A8955}"/>
             </c:ext>
           </c:extLst>
         </c:ser>
@@ -3450,7 +3425,7 @@
           <c:idx val="6"/>
           <c:order val="6"/>
           <c:tx>
-            <c:v>Adaptive V2</c:v>
+            <c:v>Adaptive V3</c:v>
           </c:tx>
           <c:spPr>
             <a:solidFill>
@@ -3495,23 +3470,23 @@
                   <c:v>7552.76666667</c:v>
                 </c:pt>
                 <c:pt idx="1">
-                  <c:v>6237.76666667</c:v>
+                  <c:v>6234.76666667</c:v>
                 </c:pt>
                 <c:pt idx="2">
-                  <c:v>3707.66666667</c:v>
+                  <c:v>3679.4</c:v>
                 </c:pt>
                 <c:pt idx="3">
                   <c:v>2964</c:v>
                 </c:pt>
                 <c:pt idx="4">
-                  <c:v>2964</c:v>
+                  <c:v>2714.16666667</c:v>
                 </c:pt>
               </c:numCache>
             </c:numRef>
           </c:val>
           <c:extLst>
             <c:ext xmlns:c16="http://schemas.microsoft.com/office/drawing/2014/chart" uri="{C3380CC4-5D6E-409C-BE32-E72D297353CC}">
-              <c16:uniqueId val="{00000006-42C2-41C0-98D2-178C7487F2D3}"/>
+              <c16:uniqueId val="{00000006-057A-4CFE-97AE-1DE88C2A8955}"/>
             </c:ext>
           </c:extLst>
         </c:ser>
@@ -3768,7 +3743,7 @@
           </c:val>
           <c:extLst>
             <c:ext xmlns:c16="http://schemas.microsoft.com/office/drawing/2014/chart" uri="{C3380CC4-5D6E-409C-BE32-E72D297353CC}">
-              <c16:uniqueId val="{00000000-D5B4-45DD-8A5D-12D1C78659B3}"/>
+              <c16:uniqueId val="{00000000-AF84-460B-88A5-BA962F41A546}"/>
             </c:ext>
           </c:extLst>
         </c:ser>
@@ -3837,7 +3812,7 @@
           </c:val>
           <c:extLst>
             <c:ext xmlns:c16="http://schemas.microsoft.com/office/drawing/2014/chart" uri="{C3380CC4-5D6E-409C-BE32-E72D297353CC}">
-              <c16:uniqueId val="{00000001-D5B4-45DD-8A5D-12D1C78659B3}"/>
+              <c16:uniqueId val="{00000001-AF84-460B-88A5-BA962F41A546}"/>
             </c:ext>
           </c:extLst>
         </c:ser>
@@ -3906,7 +3881,7 @@
           </c:val>
           <c:extLst>
             <c:ext xmlns:c16="http://schemas.microsoft.com/office/drawing/2014/chart" uri="{C3380CC4-5D6E-409C-BE32-E72D297353CC}">
-              <c16:uniqueId val="{00000002-D5B4-45DD-8A5D-12D1C78659B3}"/>
+              <c16:uniqueId val="{00000002-AF84-460B-88A5-BA962F41A546}"/>
             </c:ext>
           </c:extLst>
         </c:ser>
@@ -3975,7 +3950,7 @@
           </c:val>
           <c:extLst>
             <c:ext xmlns:c16="http://schemas.microsoft.com/office/drawing/2014/chart" uri="{C3380CC4-5D6E-409C-BE32-E72D297353CC}">
-              <c16:uniqueId val="{00000003-D5B4-45DD-8A5D-12D1C78659B3}"/>
+              <c16:uniqueId val="{00000003-AF84-460B-88A5-BA962F41A546}"/>
             </c:ext>
           </c:extLst>
         </c:ser>
@@ -4044,7 +4019,7 @@
           </c:val>
           <c:extLst>
             <c:ext xmlns:c16="http://schemas.microsoft.com/office/drawing/2014/chart" uri="{C3380CC4-5D6E-409C-BE32-E72D297353CC}">
-              <c16:uniqueId val="{00000004-D5B4-45DD-8A5D-12D1C78659B3}"/>
+              <c16:uniqueId val="{00000004-AF84-460B-88A5-BA962F41A546}"/>
             </c:ext>
           </c:extLst>
         </c:ser>
@@ -4113,7 +4088,7 @@
           </c:val>
           <c:extLst>
             <c:ext xmlns:c16="http://schemas.microsoft.com/office/drawing/2014/chart" uri="{C3380CC4-5D6E-409C-BE32-E72D297353CC}">
-              <c16:uniqueId val="{00000005-D5B4-45DD-8A5D-12D1C78659B3}"/>
+              <c16:uniqueId val="{00000005-AF84-460B-88A5-BA962F41A546}"/>
             </c:ext>
           </c:extLst>
         </c:ser>
@@ -4121,7 +4096,7 @@
           <c:idx val="6"/>
           <c:order val="6"/>
           <c:tx>
-            <c:v>Adaptive V2</c:v>
+            <c:v>Adaptive V3</c:v>
           </c:tx>
           <c:spPr>
             <a:solidFill>
@@ -4166,13 +4141,13 @@
                   <c:v>55009.9</c:v>
                 </c:pt>
                 <c:pt idx="1">
-                  <c:v>49259.46666667</c:v>
+                  <c:v>49263.46666667</c:v>
                 </c:pt>
                 <c:pt idx="2">
-                  <c:v>39837.93333333</c:v>
+                  <c:v>39025.93333333</c:v>
                 </c:pt>
                 <c:pt idx="3">
-                  <c:v>21633</c:v>
+                  <c:v>21179</c:v>
                 </c:pt>
                 <c:pt idx="4">
                   <c:v>19604</c:v>
@@ -4182,7 +4157,7 @@
           </c:val>
           <c:extLst>
             <c:ext xmlns:c16="http://schemas.microsoft.com/office/drawing/2014/chart" uri="{C3380CC4-5D6E-409C-BE32-E72D297353CC}">
-              <c16:uniqueId val="{00000006-D5B4-45DD-8A5D-12D1C78659B3}"/>
+              <c16:uniqueId val="{00000006-AF84-460B-88A5-BA962F41A546}"/>
             </c:ext>
           </c:extLst>
         </c:ser>
@@ -4442,7 +4417,7 @@
           </c:val>
           <c:extLst>
             <c:ext xmlns:c16="http://schemas.microsoft.com/office/drawing/2014/chart" uri="{C3380CC4-5D6E-409C-BE32-E72D297353CC}">
-              <c16:uniqueId val="{00000000-E28E-40D0-B1D8-2DB65FDDE0E2}"/>
+              <c16:uniqueId val="{00000000-3B08-4A10-97E0-5A92B6C4F302}"/>
             </c:ext>
           </c:extLst>
         </c:ser>
@@ -4450,7 +4425,7 @@
           <c:idx val="1"/>
           <c:order val="1"/>
           <c:tx>
-            <c:v>Adaptive V2</c:v>
+            <c:v>Adaptive V3</c:v>
           </c:tx>
           <c:spPr>
             <a:solidFill>
@@ -4532,13 +4507,13 @@
                 <c:formatCode>0.00</c:formatCode>
                 <c:ptCount val="5"/>
                 <c:pt idx="0">
-                  <c:v>0.93352417</c:v>
+                  <c:v>0.93543257</c:v>
                 </c:pt>
                 <c:pt idx="1">
-                  <c:v>0.83346056</c:v>
+                  <c:v>0.83657761</c:v>
                 </c:pt>
                 <c:pt idx="2">
-                  <c:v>0.6351145</c:v>
+                  <c:v>0.64357506</c:v>
                 </c:pt>
                 <c:pt idx="3">
                   <c:v>1</c:v>
@@ -4551,7 +4526,7 @@
           </c:val>
           <c:extLst>
             <c:ext xmlns:c16="http://schemas.microsoft.com/office/drawing/2014/chart" uri="{C3380CC4-5D6E-409C-BE32-E72D297353CC}">
-              <c16:uniqueId val="{00000001-E28E-40D0-B1D8-2DB65FDDE0E2}"/>
+              <c16:uniqueId val="{00000001-3B08-4A10-97E0-5A92B6C4F302}"/>
             </c:ext>
           </c:extLst>
         </c:ser>
@@ -4813,7 +4788,7 @@
           </c:val>
           <c:extLst>
             <c:ext xmlns:c16="http://schemas.microsoft.com/office/drawing/2014/chart" uri="{C3380CC4-5D6E-409C-BE32-E72D297353CC}">
-              <c16:uniqueId val="{00000000-FFC0-4FCD-B146-1AE5109FC250}"/>
+              <c16:uniqueId val="{00000000-FB00-4F8C-BA46-976762856CDA}"/>
             </c:ext>
           </c:extLst>
         </c:ser>
@@ -4821,7 +4796,7 @@
           <c:idx val="1"/>
           <c:order val="1"/>
           <c:tx>
-            <c:v>Adaptive V2</c:v>
+            <c:v>Adaptive V3</c:v>
           </c:tx>
           <c:spPr>
             <a:solidFill>
@@ -4903,26 +4878,26 @@
                 <c:formatCode>0.00</c:formatCode>
                 <c:ptCount val="5"/>
                 <c:pt idx="0">
-                  <c:v>0.82151861</c:v>
+                  <c:v>0.82288519</c:v>
                 </c:pt>
                 <c:pt idx="1">
-                  <c:v>0.71705632</c:v>
+                  <c:v>0.71005211</c:v>
                 </c:pt>
                 <c:pt idx="2">
-                  <c:v>0.67753873</c:v>
+                  <c:v>0.6746717</c:v>
                 </c:pt>
                 <c:pt idx="3">
-                  <c:v>0.89120281</c:v>
+                  <c:v>0.81910448</c:v>
                 </c:pt>
                 <c:pt idx="4">
-                  <c:v>0.70136242</c:v>
+                  <c:v>0.6586406</c:v>
                 </c:pt>
               </c:numCache>
             </c:numRef>
           </c:val>
           <c:extLst>
             <c:ext xmlns:c16="http://schemas.microsoft.com/office/drawing/2014/chart" uri="{C3380CC4-5D6E-409C-BE32-E72D297353CC}">
-              <c16:uniqueId val="{00000001-FFC0-4FCD-B146-1AE5109FC250}"/>
+              <c16:uniqueId val="{00000001-FB00-4F8C-BA46-976762856CDA}"/>
             </c:ext>
           </c:extLst>
         </c:ser>
@@ -5184,7 +5159,7 @@
           </c:val>
           <c:extLst>
             <c:ext xmlns:c16="http://schemas.microsoft.com/office/drawing/2014/chart" uri="{C3380CC4-5D6E-409C-BE32-E72D297353CC}">
-              <c16:uniqueId val="{00000000-5989-45BF-94EC-60842A014054}"/>
+              <c16:uniqueId val="{00000000-FF14-4383-AEE6-8C9FF761DF37}"/>
             </c:ext>
           </c:extLst>
         </c:ser>
@@ -5192,7 +5167,7 @@
           <c:idx val="1"/>
           <c:order val="1"/>
           <c:tx>
-            <c:v>Adaptive V2</c:v>
+            <c:v>Adaptive V3</c:v>
           </c:tx>
           <c:spPr>
             <a:solidFill>
@@ -5277,23 +5252,23 @@
                   <c:v>0.83226079</c:v>
                 </c:pt>
                 <c:pt idx="1">
-                  <c:v>0.68735721</c:v>
+                  <c:v>0.68702663</c:v>
                 </c:pt>
                 <c:pt idx="2">
-                  <c:v>0.40855831</c:v>
+                  <c:v>0.40544353</c:v>
                 </c:pt>
                 <c:pt idx="3">
                   <c:v>1</c:v>
                 </c:pt>
                 <c:pt idx="4">
-                  <c:v>1</c:v>
+                  <c:v>0.91571075</c:v>
                 </c:pt>
               </c:numCache>
             </c:numRef>
           </c:val>
           <c:extLst>
             <c:ext xmlns:c16="http://schemas.microsoft.com/office/drawing/2014/chart" uri="{C3380CC4-5D6E-409C-BE32-E72D297353CC}">
-              <c16:uniqueId val="{00000001-5989-45BF-94EC-60842A014054}"/>
+              <c16:uniqueId val="{00000001-FF14-4383-AEE6-8C9FF761DF37}"/>
             </c:ext>
           </c:extLst>
         </c:ser>
@@ -5943,7 +5918,7 @@
                 <a:ea typeface="Microsoft YaHei"/>
                 <a:cs typeface="Microsoft YaHei"/>
               </a:rPr>
-              <a:t>约 40 秒。mm16 在 50 和 100 页框已与 LRU 持平。mm32 在 50 页框，LRU 为 51,860，V2 为 21,633，收益最明显；100 页框时 LRU 已很好，V2 保持相同缺页次数。</a:t>
+              <a:t>约 40 秒。mm16 在 100 页框由 V2 的 2,964 降到 V3 的 2,714.17。mm32 在 50 页框，LRU 为 51,860，V3 为 21,179；100 页框仍与 LRU 相同。</a:t>
             </a:r>
           </a:p>
           <a:p>
@@ -6211,7 +6186,7 @@
                 <a:ea typeface="Microsoft YaHei"/>
                 <a:cs typeface="Microsoft YaHei"/>
               </a:rPr>
-              <a:t>约 45 秒。最明显的是 lu/50，少 1,407 次；mm16/100 少 267.33 次，消除了相对 LRU 的退化。全部小容量逐步决策与旧版一致。这是一组权衡，mm32/50 多 27.37 次，因此不能声称每个配置都改善。</a:t>
+              <a:t>约 50 秒。15 个候选在课程轨迹和种子 0～4 上初筛，按 20 个配置平均缺页数选择，再固定规则用 30 种子复测。因此属于已知数据优化。lu/50 改善 8.09%，lu/100 改善 6.09%，mm16/100 改善 8.43%。lu/5 多 57.17 次，qsort/20 多 4.43 次，其余退化为 qsort/5、qsort/10 与 mm32/10。V1/V2 的 1,200 条旧结果逐字段复现。</a:t>
             </a:r>
           </a:p>
           <a:p>
@@ -6247,7 +6222,7 @@
                 <a:ea typeface="Microsoft YaHei"/>
                 <a:cs typeface="Microsoft YaHei"/>
               </a:rPr>
-              <a:t>results/versions_raw.csv; results/version_comparison.csv</a:t>
+              <a:t>results/version_comparison.csv; results/versions_raw.csv; results/v3_search.csv</a:t>
             </a:r>
           </a:p>
           <a:p>
@@ -6345,7 +6320,7 @@
                 <a:ea typeface="Microsoft YaHei"/>
                 <a:cs typeface="Microsoft YaHei"/>
               </a:rPr>
-              <a:t>约 35 秒。先对五档容量平均缺页次数，再与 LRU 相除。顺序扫描没有任何可复用页面，算法只能全部缺页。循环能预测；均匀随机缺乏稳定规律，预测策略可能略差。这六类轨迹是旧版已经评估过的回归集，V2 固定后重新运行，不能叫未见验证集。</a:t>
+              <a:t>约 45 秒。先平均五档容量，V2 与 V3 都使用相同的 30 个种子。四类新构造轨迹在评测前定义。轮换热点整体改善约 0.038%，扰动循环退化 0.938%，交替回访不变，热点长扫描退化 0.015%。扰动循环在 10/20/50 页框分别多 70.77、128.43、38 次。课程平均提升不能保证新轨迹也提升。旧的六类构造回归测试也已重跑，完整结果放在报告。</a:t>
             </a:r>
           </a:p>
           <a:p>
@@ -6381,7 +6356,7 @@
                 <a:ea typeface="Microsoft YaHei"/>
                 <a:cs typeface="Microsoft YaHei"/>
               </a:rPr>
-              <a:t>results/synthetic_summary.csv; scripts/supplementary_experiments.py</a:t>
+              <a:t>results/fresh_summary.csv; scripts/fresh_stress.py</a:t>
             </a:r>
           </a:p>
           <a:p>
@@ -6479,7 +6454,7 @@
                 <a:ea typeface="Microsoft YaHei"/>
                 <a:cs typeface="Microsoft YaHei"/>
               </a:rPr>
-              <a:t>约 40 秒。缺页更少不代表模拟器运行更快。耗时是同环境 10 次端到端进程测量的中位数，包含启动、输入解析和模拟，并非真实 OS 缺页延迟。落后于 Random 的两项是 qsort/100：199 对 196.30，和 mm16/100：2964 对 2963.97，后者只差约 0.03 次。优势来自已知轨迹规律，没有任意输入上胜过全部在线算法的保证。参数选择使用了课程轨迹，所以课堂新数据是后续真正需要验证的对象。到此正文约 10 分钟。</a:t>
+              <a:t>约 40 秒。缺页更少不代表模拟器运行更快。耗时是同环境 10 次端到端进程测量的中位数，包含启动、输入解析和模拟，并非真实 OS 缺页延迟。落后于 Random 的配置是 qsort/100：199 对 196.30。新压力测试也出现 V3 比 V2 差的配置。优势来自已知轨迹规律，没有任意输入上胜过全部在线算法的保证。参数选择使用了课程轨迹，所以课堂新数据是后续真正需要验证的对象。到此正文约 10 分钟。</a:t>
             </a:r>
           </a:p>
           <a:p>
@@ -7417,7 +7392,7 @@
                 <a:ea typeface="Microsoft YaHei"/>
                 <a:cs typeface="Microsoft YaHei"/>
               </a:rPr>
-              <a:t>附录。实际运行将示例命令的两行合并成一行，或在 shell 使用续行。默认 Adaptive 版本为 2。代码和实验通过 PR #2 维护，用户审阅后合并。模板来源为用户指定的第三讲_反向传播_修订版_v22.pptx，沿用其布局、字体、配色与页脚。</a:t>
+              <a:t>附录。实际运行将示例命令的两行合并成一行，或在 shell 使用续行。默认 Adaptive 版本为 3，可通过参数复现 V1 和 V2。代码、实验与 PPT 同步提交到公开仓库。模板来源为用户指定的第三讲_反向传播_修订版_v22.pptx，沿用其布局、字体、配色与页脚。</a:t>
             </a:r>
           </a:p>
           <a:p>
@@ -8087,7 +8062,7 @@
                 <a:ea typeface="Microsoft YaHei"/>
                 <a:cs typeface="Microsoft YaHei"/>
               </a:rPr>
-              <a:t>约 50 秒。第一次观察到重复时直接设置间隔，之后进行指数平滑。波动较大的页面预测更保守。逾期页面失去保护，避免过去的热点被永久保留。没有重复历史时评分为无穷大，并列按 LRU。最多保留 H=max(32,16F) 个最近页号。预测由过去估计，不能像 OPT 一样看到未来。</a:t>
+              <a:t>约 50 秒。首次重复时直接令 g 等于实际间隔，后续用 0.5 权重更新。V2 用 g 加间隔波动做参考，V3 只用 g，减少旧长间隔的持续影响。更快更新也可能放大短期扰动，新增循环压力测试出现了退化。未重复或已忘记的页评分为无穷大，并列按 LRU。只估计未来，不读取未来。</a:t>
             </a:r>
           </a:p>
           <a:p>
@@ -8123,7 +8098,7 @@
                 <a:ea typeface="Microsoft YaHei"/>
                 <a:cs typeface="Microsoft YaHei"/>
               </a:rPr>
-              <a:t>src/adaptive.cpp: History::observe and History::delay</a:t>
+              <a:t>src/adaptive.cpp; results/v3_search.csv</a:t>
             </a:r>
           </a:p>
           <a:p>
@@ -8221,7 +8196,7 @@
                 <a:ea typeface="Microsoft YaHei"/>
                 <a:cs typeface="Microsoft YaHei"/>
               </a:rPr>
-              <a:t>约 55 秒。频繁重置会伤害小容量的长程预测收益，探索后保留小容量原规则。大容量延长窗口、提高切换门槛，并每 W 次让三种影子策略从实际页号状态出发。复制方向是实际到影子，不会把假想页面装入真实内存。周期内部仍可能发生状态偏离，因此只能减少问题，不能消除所有切换代价。</a:t>
+              <a:t>约 50 秒。大容量下历史从 16F 缩到 8F，减少陈旧统计。小容量保持 16F，因为统一缩短会损害已有收益。F=5、10、20、50、100 对应 H=80、160、320、400、800。影子对齐方向只有实际到影子，不会把影子页装进真实内存。切换后仍可能有状态偏差，窗口也有滞后。所有轨迹共用这套规则。</a:t>
             </a:r>
           </a:p>
           <a:p>
@@ -8257,7 +8232,7 @@
                 <a:ea typeface="Microsoft YaHei"/>
                 <a:cs typeface="Microsoft YaHei"/>
               </a:rPr>
-              <a:t>src/adaptive.cpp; results/optimization_search_raw.csv</a:t>
+              <a:t>src/adaptive.cpp; results/v3_search.csv</a:t>
             </a:r>
           </a:p>
           <a:p>
@@ -8355,7 +8330,7 @@
                 <a:ea typeface="Microsoft YaHei"/>
                 <a:cs typeface="Microsoft YaHei"/>
               </a:rPr>
-              <a:t>约 40 秒。共 140 组配置，保存 1,300 次正式运行。先平均同配置的 30 个种子，再对 20 个配置等权平均缺页次数。长轨迹数值更大，所以另报告宏平均缺页率：V2 为 58.83%。OPT 平均 16,309.80，V2 仍比它多约 6.41%。均值小数不表示一次运行有小数次缺页。</a:t>
+              <a:t>约 40 秒。共 140 组配置，保存 1,300 次正式运行。先平均同配置的 30 个种子，再对 20 个配置等权平均缺页次数。长轨迹数值更大，所以另报告宏平均缺页率：V3 为 58.23%。OPT 平均 16,309.80，V3 仍比它多约 4.85%。均值小数不表示一次运行有小数次缺页。</a:t>
             </a:r>
           </a:p>
           <a:p>
@@ -9193,7 +9168,7 @@
           <p:cNvPr id="100" name="Text 100">
             <a:extLst>
               <a:ext uri="{FF2B5EF4-FFF2-40B4-BE49-F238E27FC236}">
-                <a16:creationId xmlns:a16="http://schemas.microsoft.com/office/drawing/2014/main" id="{0B491C37-DF16-4BE1-8439-A883050B80E7}"/>
+                <a16:creationId xmlns:a16="http://schemas.microsoft.com/office/drawing/2014/main" id="{3AC78C8A-5647-4DC5-A5C1-395AE1E7DCEE}"/>
               </a:ext>
             </a:extLst>
           </p:cNvPr>
@@ -9242,7 +9217,7 @@
           <p:cNvPr id="101" name="Text 101">
             <a:extLst>
               <a:ext uri="{FF2B5EF4-FFF2-40B4-BE49-F238E27FC236}">
-                <a16:creationId xmlns:a16="http://schemas.microsoft.com/office/drawing/2014/main" id="{0D6CCE1F-94B5-4560-B19E-E89CCF1562A1}"/>
+                <a16:creationId xmlns:a16="http://schemas.microsoft.com/office/drawing/2014/main" id="{D0D4AE94-33AE-447A-B041-F453500E35EC}"/>
               </a:ext>
             </a:extLst>
           </p:cNvPr>
@@ -9400,7 +9375,7 @@
           <p:cNvPr id="102" name="算法设计、优化与实验">
             <a:extLst>
               <a:ext uri="{FF2B5EF4-FFF2-40B4-BE49-F238E27FC236}">
-                <a16:creationId xmlns:a16="http://schemas.microsoft.com/office/drawing/2014/main" id="{40F818FF-A084-4319-971E-286D1B07C4EF}"/>
+                <a16:creationId xmlns:a16="http://schemas.microsoft.com/office/drawing/2014/main" id="{6640E281-152C-4832-ACF2-7537BC49188C}"/>
               </a:ext>
             </a:extLst>
           </p:cNvPr>
@@ -10148,7 +10123,7 @@
           <p:cNvPr id="14" name="Chart">
             <a:extLst>
               <a:ext uri="{FF2B5EF4-FFF2-40B4-BE49-F238E27FC236}">
-                <a16:creationId xmlns:a16="http://schemas.microsoft.com/office/drawing/2014/main" id="{F6B51C1C-3120-4D4B-AFDA-52C425FC099E}"/>
+                <a16:creationId xmlns:a16="http://schemas.microsoft.com/office/drawing/2014/main" id="{8987F474-B2CF-4FAC-96E2-54170878A1CE}"/>
               </a:ext>
             </a:extLst>
           </p:cNvPr>
@@ -10170,7 +10145,7 @@
           <p:cNvPr id="15" name="Chart">
             <a:extLst>
               <a:ext uri="{FF2B5EF4-FFF2-40B4-BE49-F238E27FC236}">
-                <a16:creationId xmlns:a16="http://schemas.microsoft.com/office/drawing/2014/main" id="{5B58502C-0571-4023-A7DA-6FCA27FE80CD}"/>
+                <a16:creationId xmlns:a16="http://schemas.microsoft.com/office/drawing/2014/main" id="{02555B2D-D3B6-472E-BC42-C123AB3841A4}"/>
               </a:ext>
             </a:extLst>
           </p:cNvPr>
@@ -10192,7 +10167,7 @@
           <p:cNvPr id="16" name="横轴：页框数   纵轴：缺页次数。随机算法显示 30 次均值，完整整数">
             <a:extLst>
               <a:ext uri="{FF2B5EF4-FFF2-40B4-BE49-F238E27FC236}">
-                <a16:creationId xmlns:a16="http://schemas.microsoft.com/office/drawing/2014/main" id="{9A3E849C-6FC2-4F0B-AC40-73BEC7C69160}"/>
+                <a16:creationId xmlns:a16="http://schemas.microsoft.com/office/drawing/2014/main" id="{EDE750CB-8C9D-416B-A2D5-9F3B6E245424}"/>
               </a:ext>
             </a:extLst>
           </p:cNvPr>
@@ -10940,7 +10915,7 @@
           <p:cNvPr id="14" name="Chart">
             <a:extLst>
               <a:ext uri="{FF2B5EF4-FFF2-40B4-BE49-F238E27FC236}">
-                <a16:creationId xmlns:a16="http://schemas.microsoft.com/office/drawing/2014/main" id="{30020DEF-0FB6-450E-BDA4-D54661190B48}"/>
+                <a16:creationId xmlns:a16="http://schemas.microsoft.com/office/drawing/2014/main" id="{52DD6DC1-DD06-4D09-99F4-077B2E080B3B}"/>
               </a:ext>
             </a:extLst>
           </p:cNvPr>
@@ -10962,7 +10937,7 @@
           <p:cNvPr id="15" name="Chart">
             <a:extLst>
               <a:ext uri="{FF2B5EF4-FFF2-40B4-BE49-F238E27FC236}">
-                <a16:creationId xmlns:a16="http://schemas.microsoft.com/office/drawing/2014/main" id="{194D7C63-8EF8-4FE3-9E1C-84EA0760C0BE}"/>
+                <a16:creationId xmlns:a16="http://schemas.microsoft.com/office/drawing/2014/main" id="{266AE2C1-5DA6-46EC-BFAA-BD8FC47EE27A}"/>
               </a:ext>
             </a:extLst>
           </p:cNvPr>
@@ -10984,7 +10959,7 @@
           <p:cNvPr id="16" name="横轴：页框数   纵轴：缺页次数。随机算法显示 30 次均值，完整整数">
             <a:extLst>
               <a:ext uri="{FF2B5EF4-FFF2-40B4-BE49-F238E27FC236}">
-                <a16:creationId xmlns:a16="http://schemas.microsoft.com/office/drawing/2014/main" id="{CE3CDFE5-DAFE-4CAB-AD86-DCC801902DB5}"/>
+                <a16:creationId xmlns:a16="http://schemas.microsoft.com/office/drawing/2014/main" id="{B6E5B478-43B6-46DC-8C25-C11237B324F0}"/>
               </a:ext>
             </a:extLst>
           </p:cNvPr>
@@ -11732,7 +11707,7 @@
           <p:cNvPr id="14" name="Chart">
             <a:extLst>
               <a:ext uri="{FF2B5EF4-FFF2-40B4-BE49-F238E27FC236}">
-                <a16:creationId xmlns:a16="http://schemas.microsoft.com/office/drawing/2014/main" id="{CB3E8AE6-7AD3-4727-A3F3-840F48972247}"/>
+                <a16:creationId xmlns:a16="http://schemas.microsoft.com/office/drawing/2014/main" id="{002714CF-5176-4A4B-8439-C2664A6DB12E}"/>
               </a:ext>
             </a:extLst>
           </p:cNvPr>
@@ -11754,7 +11729,7 @@
           <p:cNvPr id="15" name="Chart">
             <a:extLst>
               <a:ext uri="{FF2B5EF4-FFF2-40B4-BE49-F238E27FC236}">
-                <a16:creationId xmlns:a16="http://schemas.microsoft.com/office/drawing/2014/main" id="{623B5163-CEFF-4B27-A500-9CAD56F0F618}"/>
+                <a16:creationId xmlns:a16="http://schemas.microsoft.com/office/drawing/2014/main" id="{6B5023B3-BEAD-41D6-9EDE-8BD595AD3D70}"/>
               </a:ext>
             </a:extLst>
           </p:cNvPr>
@@ -11776,7 +11751,7 @@
           <p:cNvPr id="16" name="Chart">
             <a:extLst>
               <a:ext uri="{FF2B5EF4-FFF2-40B4-BE49-F238E27FC236}">
-                <a16:creationId xmlns:a16="http://schemas.microsoft.com/office/drawing/2014/main" id="{CB2A914B-4A30-4FC9-BE88-04C948E5219E}"/>
+                <a16:creationId xmlns:a16="http://schemas.microsoft.com/office/drawing/2014/main" id="{3C0A9377-AA87-4F0A-8D29-396148EB34D4}"/>
               </a:ext>
             </a:extLst>
           </p:cNvPr>
@@ -11798,7 +11773,7 @@
           <p:cNvPr id="17" name="Chart">
             <a:extLst>
               <a:ext uri="{FF2B5EF4-FFF2-40B4-BE49-F238E27FC236}">
-                <a16:creationId xmlns:a16="http://schemas.microsoft.com/office/drawing/2014/main" id="{B05719BA-A6C8-4417-8765-BCE069C3020C}"/>
+                <a16:creationId xmlns:a16="http://schemas.microsoft.com/office/drawing/2014/main" id="{52446ED8-02D7-4266-A569-DD79783E11BB}"/>
               </a:ext>
             </a:extLst>
           </p:cNvPr>
@@ -11820,7 +11795,7 @@
           <p:cNvPr id="18" name="低于 1 表示缺页更少。此次 20 个配置均不差于 LRU；未知轨迹仍">
             <a:extLst>
               <a:ext uri="{FF2B5EF4-FFF2-40B4-BE49-F238E27FC236}">
-                <a16:creationId xmlns:a16="http://schemas.microsoft.com/office/drawing/2014/main" id="{DC1574B3-60DF-48C4-B7B9-68792A9BAB95}"/>
+                <a16:creationId xmlns:a16="http://schemas.microsoft.com/office/drawing/2014/main" id="{E17F6F78-6F48-4D02-9CCE-FBD0444EF0F2}"/>
               </a:ext>
             </a:extLst>
           </p:cNvPr>
@@ -12200,7 +12175,7 @@
                 <a:ea typeface="Microsoft YaHei"/>
                 <a:cs typeface="Microsoft YaHei"/>
               </a:rPr>
-              <a:t>优化前后：5 个改善，14 个不变，1 个退化</a:t>
+              <a:t>V3 对比 V2：9 个改善，6 个不变，5 个退化</a:t>
             </a:r>
             <a:endParaRPr sz="2775"/>
           </a:p>
@@ -12568,7 +12543,7 @@
           <p:cNvPr id="14" name="表格 13">
             <a:extLst>
               <a:ext uri="{FF2B5EF4-FFF2-40B4-BE49-F238E27FC236}">
-                <a16:creationId xmlns:a16="http://schemas.microsoft.com/office/drawing/2014/main" id="{DAE3A44E-D27A-4515-98C9-BAB55CB05471}"/>
+                <a16:creationId xmlns:a16="http://schemas.microsoft.com/office/drawing/2014/main" id="{6AA79845-6CE1-4161-A723-79DE3816B12C}"/>
               </a:ext>
             </a:extLst>
           </p:cNvPr>
@@ -12576,8 +12551,8 @@
           <p:nvPr/>
         </p:nvGraphicFramePr>
         <p:xfrm>
-          <a:off x="857250" y="1333500"/>
-          <a:ext cx="10477500" cy="3905250"/>
+          <a:off x="857250" y="1238250"/>
+          <a:ext cx="10477500" cy="4143375"/>
         </p:xfrm>
         <a:graphic>
           <a:graphicData uri="http://schemas.openxmlformats.org/drawingml/2006/table">
@@ -12613,7 +12588,7 @@
                   </a:extLst>
                 </a:gridCol>
               </a:tblGrid>
-              <a:tr h="557893">
+              <a:tr h="517922">
                 <a:tc>
                   <a:txBody>
                     <a:bodyPr/>
@@ -12621,7 +12596,7 @@
                     <a:p>
                       <a:pPr algn="l"/>
                       <a:r>
-                        <a:rPr sz="1950" b="1">
+                        <a:rPr sz="1875" b="1">
                           <a:solidFill>
                             <a:srgbClr val="6B4A82"/>
                           </a:solidFill>
@@ -12670,7 +12645,7 @@
                     <a:p>
                       <a:pPr algn="ctr"/>
                       <a:r>
-                        <a:rPr sz="1950" b="1">
+                        <a:rPr sz="1875" b="1">
                           <a:solidFill>
                             <a:srgbClr val="6B4A82"/>
                           </a:solidFill>
@@ -12678,7 +12653,7 @@
                           <a:ea typeface="Microsoft YaHei"/>
                           <a:cs typeface="Microsoft YaHei"/>
                         </a:rPr>
-                        <a:t>V1</a:t>
+                        <a:t>V2</a:t>
                       </a:r>
                     </a:p>
                   </a:txBody>
@@ -12722,7 +12697,7 @@
                     <a:p>
                       <a:pPr algn="ctr"/>
                       <a:r>
-                        <a:rPr sz="1950" b="1">
+                        <a:rPr sz="1875" b="1">
                           <a:solidFill>
                             <a:srgbClr val="6B4A82"/>
                           </a:solidFill>
@@ -12730,7 +12705,7 @@
                           <a:ea typeface="Microsoft YaHei"/>
                           <a:cs typeface="Microsoft YaHei"/>
                         </a:rPr>
-                        <a:t>V2</a:t>
+                        <a:t>V3</a:t>
                       </a:r>
                     </a:p>
                   </a:txBody>
@@ -12774,7 +12749,7 @@
                     <a:p>
                       <a:pPr algn="ctr"/>
                       <a:r>
-                        <a:rPr sz="1950" b="1">
+                        <a:rPr sz="1875" b="1">
                           <a:solidFill>
                             <a:srgbClr val="6B4A82"/>
                           </a:solidFill>
@@ -12825,7 +12800,7 @@
                   </a:ext>
                 </a:extLst>
               </a:tr>
-              <a:tr h="557893">
+              <a:tr h="517922">
                 <a:tc>
                   <a:txBody>
                     <a:bodyPr/>
@@ -12833,7 +12808,7 @@
                     <a:p>
                       <a:pPr algn="l"/>
                       <a:r>
-                        <a:rPr sz="1950" b="0">
+                        <a:rPr sz="1875" b="0">
                           <a:solidFill>
                             <a:srgbClr val="29203A"/>
                           </a:solidFill>
@@ -12885,7 +12860,7 @@
                     <a:p>
                       <a:pPr algn="ctr"/>
                       <a:r>
-                        <a:rPr sz="1950" b="0">
+                        <a:rPr sz="1875" b="0">
                           <a:solidFill>
                             <a:srgbClr val="29203A"/>
                           </a:solidFill>
@@ -12893,7 +12868,7 @@
                           <a:ea typeface="Microsoft YaHei"/>
                           <a:cs typeface="Microsoft YaHei"/>
                         </a:rPr>
-                        <a:t>26,784.00</a:t>
+                        <a:t>25,377.00</a:t>
                       </a:r>
                     </a:p>
                   </a:txBody>
@@ -12940,7 +12915,7 @@
                     <a:p>
                       <a:pPr algn="ctr"/>
                       <a:r>
-                        <a:rPr sz="1950" b="0">
+                        <a:rPr sz="1875" b="0">
                           <a:solidFill>
                             <a:srgbClr val="29203A"/>
                           </a:solidFill>
@@ -12948,7 +12923,7 @@
                           <a:ea typeface="Microsoft YaHei"/>
                           <a:cs typeface="Microsoft YaHei"/>
                         </a:rPr>
-                        <a:t>25,377.00</a:t>
+                        <a:t>23,324.00</a:t>
                       </a:r>
                     </a:p>
                   </a:txBody>
@@ -12995,7 +12970,7 @@
                     <a:p>
                       <a:pPr algn="ctr"/>
                       <a:r>
-                        <a:rPr sz="1950" b="0">
+                        <a:rPr sz="1875" b="0">
                           <a:solidFill>
                             <a:srgbClr val="29203A"/>
                           </a:solidFill>
@@ -13003,7 +12978,7 @@
                           <a:ea typeface="Microsoft YaHei"/>
                           <a:cs typeface="Microsoft YaHei"/>
                         </a:rPr>
-                        <a:t>-1,407.00</a:t>
+                        <a:t>-2,053.00</a:t>
                       </a:r>
                     </a:p>
                   </a:txBody>
@@ -13049,7 +13024,7 @@
                   </a:ext>
                 </a:extLst>
               </a:tr>
-              <a:tr h="557893">
+              <a:tr h="517922">
                 <a:tc>
                   <a:txBody>
                     <a:bodyPr/>
@@ -13057,7 +13032,7 @@
                     <a:p>
                       <a:pPr algn="l"/>
                       <a:r>
-                        <a:rPr sz="1950" b="0">
+                        <a:rPr sz="1875" b="0">
                           <a:solidFill>
                             <a:srgbClr val="29203A"/>
                           </a:solidFill>
@@ -13109,7 +13084,7 @@
                     <a:p>
                       <a:pPr algn="ctr"/>
                       <a:r>
-                        <a:rPr sz="1950" b="0">
+                        <a:rPr sz="1875" b="0">
                           <a:solidFill>
                             <a:srgbClr val="29203A"/>
                           </a:solidFill>
@@ -13117,7 +13092,7 @@
                           <a:ea typeface="Microsoft YaHei"/>
                           <a:cs typeface="Microsoft YaHei"/>
                         </a:rPr>
-                        <a:t>19,089.57</a:t>
+                        <a:t>18,584.00</a:t>
                       </a:r>
                     </a:p>
                   </a:txBody>
@@ -13164,7 +13139,7 @@
                     <a:p>
                       <a:pPr algn="ctr"/>
                       <a:r>
-                        <a:rPr sz="1950" b="0">
+                        <a:rPr sz="1875" b="0">
                           <a:solidFill>
                             <a:srgbClr val="29203A"/>
                           </a:solidFill>
@@ -13172,7 +13147,7 @@
                           <a:ea typeface="Microsoft YaHei"/>
                           <a:cs typeface="Microsoft YaHei"/>
                         </a:rPr>
-                        <a:t>18,584.00</a:t>
+                        <a:t>17,452.00</a:t>
                       </a:r>
                     </a:p>
                   </a:txBody>
@@ -13219,7 +13194,7 @@
                     <a:p>
                       <a:pPr algn="ctr"/>
                       <a:r>
-                        <a:rPr sz="1950" b="0">
+                        <a:rPr sz="1875" b="0">
                           <a:solidFill>
                             <a:srgbClr val="29203A"/>
                           </a:solidFill>
@@ -13227,7 +13202,7 @@
                           <a:ea typeface="Microsoft YaHei"/>
                           <a:cs typeface="Microsoft YaHei"/>
                         </a:rPr>
-                        <a:t>-505.57</a:t>
+                        <a:t>-1,132.00</a:t>
                       </a:r>
                     </a:p>
                   </a:txBody>
@@ -13273,7 +13248,7 @@
                   </a:ext>
                 </a:extLst>
               </a:tr>
-              <a:tr h="557893">
+              <a:tr h="517922">
                 <a:tc>
                   <a:txBody>
                     <a:bodyPr/>
@@ -13281,7 +13256,7 @@
                     <a:p>
                       <a:pPr algn="l"/>
                       <a:r>
-                        <a:rPr sz="1950" b="0">
+                        <a:rPr sz="1875" b="0">
                           <a:solidFill>
                             <a:srgbClr val="29203A"/>
                           </a:solidFill>
@@ -13289,7 +13264,7 @@
                           <a:ea typeface="Microsoft YaHei"/>
                           <a:cs typeface="Microsoft YaHei"/>
                         </a:rPr>
-                        <a:t>mm16 / 50</a:t>
+                        <a:t>mm32 / 20</a:t>
                       </a:r>
                     </a:p>
                   </a:txBody>
@@ -13333,7 +13308,7 @@
                     <a:p>
                       <a:pPr algn="ctr"/>
                       <a:r>
-                        <a:rPr sz="1950" b="0">
+                        <a:rPr sz="1875" b="0">
                           <a:solidFill>
                             <a:srgbClr val="29203A"/>
                           </a:solidFill>
@@ -13341,7 +13316,7 @@
                           <a:ea typeface="Microsoft YaHei"/>
                           <a:cs typeface="Microsoft YaHei"/>
                         </a:rPr>
-                        <a:t>3,013.00</a:t>
+                        <a:t>39,837.93</a:t>
                       </a:r>
                     </a:p>
                   </a:txBody>
@@ -13388,7 +13363,400 @@
                     <a:p>
                       <a:pPr algn="ctr"/>
                       <a:r>
-                        <a:rPr sz="1950" b="0">
+                        <a:rPr sz="1875" b="0">
+                          <a:solidFill>
+                            <a:srgbClr val="29203A"/>
+                          </a:solidFill>
+                          <a:latin typeface="Microsoft YaHei"/>
+                          <a:ea typeface="Microsoft YaHei"/>
+                          <a:cs typeface="Microsoft YaHei"/>
+                        </a:rPr>
+                        <a:t>39,025.93</a:t>
+                      </a:r>
+                    </a:p>
+                  </a:txBody>
+                  <a:tcPr marL="114300" marR="95250" marT="114300" marB="95250" anchor="ctr">
+                    <a:lnL w="6668" cap="flat" cmpd="sng" algn="ctr">
+                      <a:solidFill>
+                        <a:srgbClr val="E8E3EF"/>
+                      </a:solidFill>
+                      <a:prstDash val="solid"/>
+                      <a:round/>
+                      <a:headEnd type="none" w="med" len="med"/>
+                      <a:tailEnd type="none" w="med" len="med"/>
+                    </a:lnL>
+                    <a:lnR w="6668">
+                      <a:solidFill>
+                        <a:srgbClr val="E8E3EF"/>
+                      </a:solidFill>
+                      <a:prstDash val="solid"/>
+                    </a:lnR>
+                    <a:lnT w="6668" cap="flat" cmpd="sng" algn="ctr">
+                      <a:solidFill>
+                        <a:srgbClr val="E8E3EF"/>
+                      </a:solidFill>
+                      <a:prstDash val="solid"/>
+                      <a:round/>
+                      <a:headEnd type="none" w="med" len="med"/>
+                      <a:tailEnd type="none" w="med" len="med"/>
+                    </a:lnT>
+                    <a:lnB w="6668">
+                      <a:solidFill>
+                        <a:srgbClr val="E8E3EF"/>
+                      </a:solidFill>
+                      <a:prstDash val="solid"/>
+                    </a:lnB>
+                    <a:solidFill>
+                      <a:srgbClr val="FFFFFF"/>
+                    </a:solidFill>
+                  </a:tcPr>
+                </a:tc>
+                <a:tc>
+                  <a:txBody>
+                    <a:bodyPr/>
+                    <a:lstStyle/>
+                    <a:p>
+                      <a:pPr algn="ctr"/>
+                      <a:r>
+                        <a:rPr sz="1875" b="0">
+                          <a:solidFill>
+                            <a:srgbClr val="29203A"/>
+                          </a:solidFill>
+                          <a:latin typeface="Microsoft YaHei"/>
+                          <a:ea typeface="Microsoft YaHei"/>
+                          <a:cs typeface="Microsoft YaHei"/>
+                        </a:rPr>
+                        <a:t>-812.00</a:t>
+                      </a:r>
+                    </a:p>
+                  </a:txBody>
+                  <a:tcPr marL="114300" marR="95250" marT="114300" marB="95250" anchor="ctr">
+                    <a:lnL w="6668" cap="flat" cmpd="sng" algn="ctr">
+                      <a:solidFill>
+                        <a:srgbClr val="E8E3EF"/>
+                      </a:solidFill>
+                      <a:prstDash val="solid"/>
+                      <a:round/>
+                      <a:headEnd type="none" w="med" len="med"/>
+                      <a:tailEnd type="none" w="med" len="med"/>
+                    </a:lnL>
+                    <a:lnR w="6668">
+                      <a:solidFill>
+                        <a:srgbClr val="E8E3EF"/>
+                      </a:solidFill>
+                      <a:prstDash val="solid"/>
+                    </a:lnR>
+                    <a:lnT w="6668" cap="flat" cmpd="sng" algn="ctr">
+                      <a:solidFill>
+                        <a:srgbClr val="E8E3EF"/>
+                      </a:solidFill>
+                      <a:prstDash val="solid"/>
+                      <a:round/>
+                      <a:headEnd type="none" w="med" len="med"/>
+                      <a:tailEnd type="none" w="med" len="med"/>
+                    </a:lnT>
+                    <a:lnB w="6668">
+                      <a:solidFill>
+                        <a:srgbClr val="E8E3EF"/>
+                      </a:solidFill>
+                      <a:prstDash val="solid"/>
+                    </a:lnB>
+                    <a:solidFill>
+                      <a:srgbClr val="FFFFFF"/>
+                    </a:solidFill>
+                  </a:tcPr>
+                </a:tc>
+                <a:extLst>
+                  <a:ext uri="{0D108BD9-81ED-4DB2-BD59-A6C34878D82A}">
+                    <a16:rowId xmlns:a16="http://schemas.microsoft.com/office/drawing/2014/main" val="10003"/>
+                  </a:ext>
+                </a:extLst>
+              </a:tr>
+              <a:tr h="517922">
+                <a:tc>
+                  <a:txBody>
+                    <a:bodyPr/>
+                    <a:lstStyle/>
+                    <a:p>
+                      <a:pPr algn="l"/>
+                      <a:r>
+                        <a:rPr sz="1875" b="0">
+                          <a:solidFill>
+                            <a:srgbClr val="29203A"/>
+                          </a:solidFill>
+                          <a:latin typeface="Microsoft YaHei"/>
+                          <a:ea typeface="Microsoft YaHei"/>
+                          <a:cs typeface="Microsoft YaHei"/>
+                        </a:rPr>
+                        <a:t>mm32 / 50</a:t>
+                      </a:r>
+                    </a:p>
+                  </a:txBody>
+                  <a:tcPr marL="114300" marR="95250" marT="114300" marB="95250" anchor="ctr">
+                    <a:lnL w="6668">
+                      <a:solidFill>
+                        <a:srgbClr val="E8E3EF"/>
+                      </a:solidFill>
+                      <a:prstDash val="solid"/>
+                    </a:lnL>
+                    <a:lnR w="6668">
+                      <a:solidFill>
+                        <a:srgbClr val="E8E3EF"/>
+                      </a:solidFill>
+                      <a:prstDash val="solid"/>
+                    </a:lnR>
+                    <a:lnT w="6668" cap="flat" cmpd="sng" algn="ctr">
+                      <a:solidFill>
+                        <a:srgbClr val="E8E3EF"/>
+                      </a:solidFill>
+                      <a:prstDash val="solid"/>
+                      <a:round/>
+                      <a:headEnd type="none" w="med" len="med"/>
+                      <a:tailEnd type="none" w="med" len="med"/>
+                    </a:lnT>
+                    <a:lnB w="6668">
+                      <a:solidFill>
+                        <a:srgbClr val="E8E3EF"/>
+                      </a:solidFill>
+                      <a:prstDash val="solid"/>
+                    </a:lnB>
+                    <a:solidFill>
+                      <a:srgbClr val="FFFFFF"/>
+                    </a:solidFill>
+                  </a:tcPr>
+                </a:tc>
+                <a:tc>
+                  <a:txBody>
+                    <a:bodyPr/>
+                    <a:lstStyle/>
+                    <a:p>
+                      <a:pPr algn="ctr"/>
+                      <a:r>
+                        <a:rPr sz="1875" b="0">
+                          <a:solidFill>
+                            <a:srgbClr val="29203A"/>
+                          </a:solidFill>
+                          <a:latin typeface="Microsoft YaHei"/>
+                          <a:ea typeface="Microsoft YaHei"/>
+                          <a:cs typeface="Microsoft YaHei"/>
+                        </a:rPr>
+                        <a:t>21,633.00</a:t>
+                      </a:r>
+                    </a:p>
+                  </a:txBody>
+                  <a:tcPr marL="114300" marR="95250" marT="114300" marB="95250" anchor="ctr">
+                    <a:lnL w="6668" cap="flat" cmpd="sng" algn="ctr">
+                      <a:solidFill>
+                        <a:srgbClr val="E8E3EF"/>
+                      </a:solidFill>
+                      <a:prstDash val="solid"/>
+                      <a:round/>
+                      <a:headEnd type="none" w="med" len="med"/>
+                      <a:tailEnd type="none" w="med" len="med"/>
+                    </a:lnL>
+                    <a:lnR w="6668">
+                      <a:solidFill>
+                        <a:srgbClr val="E8E3EF"/>
+                      </a:solidFill>
+                      <a:prstDash val="solid"/>
+                    </a:lnR>
+                    <a:lnT w="6668" cap="flat" cmpd="sng" algn="ctr">
+                      <a:solidFill>
+                        <a:srgbClr val="E8E3EF"/>
+                      </a:solidFill>
+                      <a:prstDash val="solid"/>
+                      <a:round/>
+                      <a:headEnd type="none" w="med" len="med"/>
+                      <a:tailEnd type="none" w="med" len="med"/>
+                    </a:lnT>
+                    <a:lnB w="6668">
+                      <a:solidFill>
+                        <a:srgbClr val="E8E3EF"/>
+                      </a:solidFill>
+                      <a:prstDash val="solid"/>
+                    </a:lnB>
+                    <a:solidFill>
+                      <a:srgbClr val="FFFFFF"/>
+                    </a:solidFill>
+                  </a:tcPr>
+                </a:tc>
+                <a:tc>
+                  <a:txBody>
+                    <a:bodyPr/>
+                    <a:lstStyle/>
+                    <a:p>
+                      <a:pPr algn="ctr"/>
+                      <a:r>
+                        <a:rPr sz="1875" b="0">
+                          <a:solidFill>
+                            <a:srgbClr val="29203A"/>
+                          </a:solidFill>
+                          <a:latin typeface="Microsoft YaHei"/>
+                          <a:ea typeface="Microsoft YaHei"/>
+                          <a:cs typeface="Microsoft YaHei"/>
+                        </a:rPr>
+                        <a:t>21,179.00</a:t>
+                      </a:r>
+                    </a:p>
+                  </a:txBody>
+                  <a:tcPr marL="114300" marR="95250" marT="114300" marB="95250" anchor="ctr">
+                    <a:lnL w="6668" cap="flat" cmpd="sng" algn="ctr">
+                      <a:solidFill>
+                        <a:srgbClr val="E8E3EF"/>
+                      </a:solidFill>
+                      <a:prstDash val="solid"/>
+                      <a:round/>
+                      <a:headEnd type="none" w="med" len="med"/>
+                      <a:tailEnd type="none" w="med" len="med"/>
+                    </a:lnL>
+                    <a:lnR w="6668">
+                      <a:solidFill>
+                        <a:srgbClr val="E8E3EF"/>
+                      </a:solidFill>
+                      <a:prstDash val="solid"/>
+                    </a:lnR>
+                    <a:lnT w="6668" cap="flat" cmpd="sng" algn="ctr">
+                      <a:solidFill>
+                        <a:srgbClr val="E8E3EF"/>
+                      </a:solidFill>
+                      <a:prstDash val="solid"/>
+                      <a:round/>
+                      <a:headEnd type="none" w="med" len="med"/>
+                      <a:tailEnd type="none" w="med" len="med"/>
+                    </a:lnT>
+                    <a:lnB w="6668">
+                      <a:solidFill>
+                        <a:srgbClr val="E8E3EF"/>
+                      </a:solidFill>
+                      <a:prstDash val="solid"/>
+                    </a:lnB>
+                    <a:solidFill>
+                      <a:srgbClr val="FFFFFF"/>
+                    </a:solidFill>
+                  </a:tcPr>
+                </a:tc>
+                <a:tc>
+                  <a:txBody>
+                    <a:bodyPr/>
+                    <a:lstStyle/>
+                    <a:p>
+                      <a:pPr algn="ctr"/>
+                      <a:r>
+                        <a:rPr sz="1875" b="0">
+                          <a:solidFill>
+                            <a:srgbClr val="29203A"/>
+                          </a:solidFill>
+                          <a:latin typeface="Microsoft YaHei"/>
+                          <a:ea typeface="Microsoft YaHei"/>
+                          <a:cs typeface="Microsoft YaHei"/>
+                        </a:rPr>
+                        <a:t>-454.00</a:t>
+                      </a:r>
+                    </a:p>
+                  </a:txBody>
+                  <a:tcPr marL="114300" marR="95250" marT="114300" marB="95250" anchor="ctr">
+                    <a:lnL w="6668" cap="flat" cmpd="sng" algn="ctr">
+                      <a:solidFill>
+                        <a:srgbClr val="E8E3EF"/>
+                      </a:solidFill>
+                      <a:prstDash val="solid"/>
+                      <a:round/>
+                      <a:headEnd type="none" w="med" len="med"/>
+                      <a:tailEnd type="none" w="med" len="med"/>
+                    </a:lnL>
+                    <a:lnR w="6668">
+                      <a:solidFill>
+                        <a:srgbClr val="E8E3EF"/>
+                      </a:solidFill>
+                      <a:prstDash val="solid"/>
+                    </a:lnR>
+                    <a:lnT w="6668" cap="flat" cmpd="sng" algn="ctr">
+                      <a:solidFill>
+                        <a:srgbClr val="E8E3EF"/>
+                      </a:solidFill>
+                      <a:prstDash val="solid"/>
+                      <a:round/>
+                      <a:headEnd type="none" w="med" len="med"/>
+                      <a:tailEnd type="none" w="med" len="med"/>
+                    </a:lnT>
+                    <a:lnB w="6668">
+                      <a:solidFill>
+                        <a:srgbClr val="E8E3EF"/>
+                      </a:solidFill>
+                      <a:prstDash val="solid"/>
+                    </a:lnB>
+                    <a:solidFill>
+                      <a:srgbClr val="FFFFFF"/>
+                    </a:solidFill>
+                  </a:tcPr>
+                </a:tc>
+                <a:extLst>
+                  <a:ext uri="{0D108BD9-81ED-4DB2-BD59-A6C34878D82A}">
+                    <a16:rowId xmlns:a16="http://schemas.microsoft.com/office/drawing/2014/main" val="10004"/>
+                  </a:ext>
+                </a:extLst>
+              </a:tr>
+              <a:tr h="517922">
+                <a:tc>
+                  <a:txBody>
+                    <a:bodyPr/>
+                    <a:lstStyle/>
+                    <a:p>
+                      <a:pPr algn="l"/>
+                      <a:r>
+                        <a:rPr sz="1875" b="0">
+                          <a:solidFill>
+                            <a:srgbClr val="29203A"/>
+                          </a:solidFill>
+                          <a:latin typeface="Microsoft YaHei"/>
+                          <a:ea typeface="Microsoft YaHei"/>
+                          <a:cs typeface="Microsoft YaHei"/>
+                        </a:rPr>
+                        <a:t>mm16 / 100</a:t>
+                      </a:r>
+                    </a:p>
+                  </a:txBody>
+                  <a:tcPr marL="114300" marR="95250" marT="114300" marB="95250" anchor="ctr">
+                    <a:lnL w="6668">
+                      <a:solidFill>
+                        <a:srgbClr val="E8E3EF"/>
+                      </a:solidFill>
+                      <a:prstDash val="solid"/>
+                    </a:lnL>
+                    <a:lnR w="6668">
+                      <a:solidFill>
+                        <a:srgbClr val="E8E3EF"/>
+                      </a:solidFill>
+                      <a:prstDash val="solid"/>
+                    </a:lnR>
+                    <a:lnT w="6668" cap="flat" cmpd="sng" algn="ctr">
+                      <a:solidFill>
+                        <a:srgbClr val="E8E3EF"/>
+                      </a:solidFill>
+                      <a:prstDash val="solid"/>
+                      <a:round/>
+                      <a:headEnd type="none" w="med" len="med"/>
+                      <a:tailEnd type="none" w="med" len="med"/>
+                    </a:lnT>
+                    <a:lnB w="6668">
+                      <a:solidFill>
+                        <a:srgbClr val="E8E3EF"/>
+                      </a:solidFill>
+                      <a:prstDash val="solid"/>
+                    </a:lnB>
+                    <a:solidFill>
+                      <a:srgbClr val="FFFFFF"/>
+                    </a:solidFill>
+                  </a:tcPr>
+                </a:tc>
+                <a:tc>
+                  <a:txBody>
+                    <a:bodyPr/>
+                    <a:lstStyle/>
+                    <a:p>
+                      <a:pPr algn="ctr"/>
+                      <a:r>
+                        <a:rPr sz="1875" b="0">
                           <a:solidFill>
                             <a:srgbClr val="29203A"/>
                           </a:solidFill>
@@ -13443,7 +13811,7 @@
                     <a:p>
                       <a:pPr algn="ctr"/>
                       <a:r>
-                        <a:rPr sz="1950" b="0">
+                        <a:rPr sz="1875" b="0">
                           <a:solidFill>
                             <a:srgbClr val="29203A"/>
                           </a:solidFill>
@@ -13451,7 +13819,7 @@
                           <a:ea typeface="Microsoft YaHei"/>
                           <a:cs typeface="Microsoft YaHei"/>
                         </a:rPr>
-                        <a:t>-49.00</a:t>
+                        <a:t>2,714.17</a:t>
                       </a:r>
                     </a:p>
                   </a:txBody>
@@ -13464,65 +13832,6 @@
                       <a:round/>
                       <a:headEnd type="none" w="med" len="med"/>
                       <a:tailEnd type="none" w="med" len="med"/>
-                    </a:lnL>
-                    <a:lnR w="6668">
-                      <a:solidFill>
-                        <a:srgbClr val="E8E3EF"/>
-                      </a:solidFill>
-                      <a:prstDash val="solid"/>
-                    </a:lnR>
-                    <a:lnT w="6668" cap="flat" cmpd="sng" algn="ctr">
-                      <a:solidFill>
-                        <a:srgbClr val="E8E3EF"/>
-                      </a:solidFill>
-                      <a:prstDash val="solid"/>
-                      <a:round/>
-                      <a:headEnd type="none" w="med" len="med"/>
-                      <a:tailEnd type="none" w="med" len="med"/>
-                    </a:lnT>
-                    <a:lnB w="6668">
-                      <a:solidFill>
-                        <a:srgbClr val="E8E3EF"/>
-                      </a:solidFill>
-                      <a:prstDash val="solid"/>
-                    </a:lnB>
-                    <a:solidFill>
-                      <a:srgbClr val="FFFFFF"/>
-                    </a:solidFill>
-                  </a:tcPr>
-                </a:tc>
-                <a:extLst>
-                  <a:ext uri="{0D108BD9-81ED-4DB2-BD59-A6C34878D82A}">
-                    <a16:rowId xmlns:a16="http://schemas.microsoft.com/office/drawing/2014/main" val="10003"/>
-                  </a:ext>
-                </a:extLst>
-              </a:tr>
-              <a:tr h="557893">
-                <a:tc>
-                  <a:txBody>
-                    <a:bodyPr/>
-                    <a:lstStyle/>
-                    <a:p>
-                      <a:pPr algn="l"/>
-                      <a:r>
-                        <a:rPr sz="1950" b="0">
-                          <a:solidFill>
-                            <a:srgbClr val="29203A"/>
-                          </a:solidFill>
-                          <a:latin typeface="Microsoft YaHei"/>
-                          <a:ea typeface="Microsoft YaHei"/>
-                          <a:cs typeface="Microsoft YaHei"/>
-                        </a:rPr>
-                        <a:t>mm16 / 100</a:t>
-                      </a:r>
-                    </a:p>
-                  </a:txBody>
-                  <a:tcPr marL="114300" marR="95250" marT="114300" marB="95250" anchor="ctr">
-                    <a:lnL w="6668">
-                      <a:solidFill>
-                        <a:srgbClr val="E8E3EF"/>
-                      </a:solidFill>
-                      <a:prstDash val="solid"/>
                     </a:lnL>
                     <a:lnR w="6668">
                       <a:solidFill>
@@ -13557,7 +13866,7 @@
                     <a:p>
                       <a:pPr algn="ctr"/>
                       <a:r>
-                        <a:rPr sz="1950" b="0">
+                        <a:rPr sz="1875" b="0">
                           <a:solidFill>
                             <a:srgbClr val="29203A"/>
                           </a:solidFill>
@@ -13565,7 +13874,7 @@
                           <a:ea typeface="Microsoft YaHei"/>
                           <a:cs typeface="Microsoft YaHei"/>
                         </a:rPr>
-                        <a:t>3,231.33</a:t>
+                        <a:t>-249.83</a:t>
                       </a:r>
                     </a:p>
                   </a:txBody>
@@ -13578,6 +13887,65 @@
                       <a:round/>
                       <a:headEnd type="none" w="med" len="med"/>
                       <a:tailEnd type="none" w="med" len="med"/>
+                    </a:lnL>
+                    <a:lnR w="6668">
+                      <a:solidFill>
+                        <a:srgbClr val="E8E3EF"/>
+                      </a:solidFill>
+                      <a:prstDash val="solid"/>
+                    </a:lnR>
+                    <a:lnT w="6668" cap="flat" cmpd="sng" algn="ctr">
+                      <a:solidFill>
+                        <a:srgbClr val="E8E3EF"/>
+                      </a:solidFill>
+                      <a:prstDash val="solid"/>
+                      <a:round/>
+                      <a:headEnd type="none" w="med" len="med"/>
+                      <a:tailEnd type="none" w="med" len="med"/>
+                    </a:lnT>
+                    <a:lnB w="6668">
+                      <a:solidFill>
+                        <a:srgbClr val="E8E3EF"/>
+                      </a:solidFill>
+                      <a:prstDash val="solid"/>
+                    </a:lnB>
+                    <a:solidFill>
+                      <a:srgbClr val="FFFFFF"/>
+                    </a:solidFill>
+                  </a:tcPr>
+                </a:tc>
+                <a:extLst>
+                  <a:ext uri="{0D108BD9-81ED-4DB2-BD59-A6C34878D82A}">
+                    <a16:rowId xmlns:a16="http://schemas.microsoft.com/office/drawing/2014/main" val="10005"/>
+                  </a:ext>
+                </a:extLst>
+              </a:tr>
+              <a:tr h="517922">
+                <a:tc>
+                  <a:txBody>
+                    <a:bodyPr/>
+                    <a:lstStyle/>
+                    <a:p>
+                      <a:pPr algn="l"/>
+                      <a:r>
+                        <a:rPr sz="1875" b="0">
+                          <a:solidFill>
+                            <a:srgbClr val="29203A"/>
+                          </a:solidFill>
+                          <a:latin typeface="Microsoft YaHei"/>
+                          <a:ea typeface="Microsoft YaHei"/>
+                          <a:cs typeface="Microsoft YaHei"/>
+                        </a:rPr>
+                        <a:t>lu / 5</a:t>
+                      </a:r>
+                    </a:p>
+                  </a:txBody>
+                  <a:tcPr marL="114300" marR="95250" marT="114300" marB="95250" anchor="ctr">
+                    <a:lnL w="6668">
+                      <a:solidFill>
+                        <a:srgbClr val="E8E3EF"/>
+                      </a:solidFill>
+                      <a:prstDash val="solid"/>
                     </a:lnL>
                     <a:lnR w="6668">
                       <a:solidFill>
@@ -13612,7 +13980,7 @@
                     <a:p>
                       <a:pPr algn="ctr"/>
                       <a:r>
-                        <a:rPr sz="1950" b="0">
+                        <a:rPr sz="1875" b="0">
                           <a:solidFill>
                             <a:srgbClr val="29203A"/>
                           </a:solidFill>
@@ -13620,7 +13988,7 @@
                           <a:ea typeface="Microsoft YaHei"/>
                           <a:cs typeface="Microsoft YaHei"/>
                         </a:rPr>
-                        <a:t>2,964.00</a:t>
+                        <a:t>34,365.77</a:t>
                       </a:r>
                     </a:p>
                   </a:txBody>
@@ -13667,7 +14035,7 @@
                     <a:p>
                       <a:pPr algn="ctr"/>
                       <a:r>
-                        <a:rPr sz="1950" b="0">
+                        <a:rPr sz="1875" b="0">
                           <a:solidFill>
                             <a:srgbClr val="29203A"/>
                           </a:solidFill>
@@ -13675,7 +14043,7 @@
                           <a:ea typeface="Microsoft YaHei"/>
                           <a:cs typeface="Microsoft YaHei"/>
                         </a:rPr>
-                        <a:t>-267.33</a:t>
+                        <a:t>34,422.93</a:t>
                       </a:r>
                     </a:p>
                   </a:txBody>
@@ -13688,65 +14056,6 @@
                       <a:round/>
                       <a:headEnd type="none" w="med" len="med"/>
                       <a:tailEnd type="none" w="med" len="med"/>
-                    </a:lnL>
-                    <a:lnR w="6668">
-                      <a:solidFill>
-                        <a:srgbClr val="E8E3EF"/>
-                      </a:solidFill>
-                      <a:prstDash val="solid"/>
-                    </a:lnR>
-                    <a:lnT w="6668" cap="flat" cmpd="sng" algn="ctr">
-                      <a:solidFill>
-                        <a:srgbClr val="E8E3EF"/>
-                      </a:solidFill>
-                      <a:prstDash val="solid"/>
-                      <a:round/>
-                      <a:headEnd type="none" w="med" len="med"/>
-                      <a:tailEnd type="none" w="med" len="med"/>
-                    </a:lnT>
-                    <a:lnB w="6668">
-                      <a:solidFill>
-                        <a:srgbClr val="E8E3EF"/>
-                      </a:solidFill>
-                      <a:prstDash val="solid"/>
-                    </a:lnB>
-                    <a:solidFill>
-                      <a:srgbClr val="FFFFFF"/>
-                    </a:solidFill>
-                  </a:tcPr>
-                </a:tc>
-                <a:extLst>
-                  <a:ext uri="{0D108BD9-81ED-4DB2-BD59-A6C34878D82A}">
-                    <a16:rowId xmlns:a16="http://schemas.microsoft.com/office/drawing/2014/main" val="10004"/>
-                  </a:ext>
-                </a:extLst>
-              </a:tr>
-              <a:tr h="557893">
-                <a:tc>
-                  <a:txBody>
-                    <a:bodyPr/>
-                    <a:lstStyle/>
-                    <a:p>
-                      <a:pPr algn="l"/>
-                      <a:r>
-                        <a:rPr sz="1950" b="0">
-                          <a:solidFill>
-                            <a:srgbClr val="29203A"/>
-                          </a:solidFill>
-                          <a:latin typeface="Microsoft YaHei"/>
-                          <a:ea typeface="Microsoft YaHei"/>
-                          <a:cs typeface="Microsoft YaHei"/>
-                        </a:rPr>
-                        <a:t>mm32 / 50</a:t>
-                      </a:r>
-                    </a:p>
-                  </a:txBody>
-                  <a:tcPr marL="114300" marR="95250" marT="114300" marB="95250" anchor="ctr">
-                    <a:lnL w="6668">
-                      <a:solidFill>
-                        <a:srgbClr val="E8E3EF"/>
-                      </a:solidFill>
-                      <a:prstDash val="solid"/>
                     </a:lnL>
                     <a:lnR w="6668">
                       <a:solidFill>
@@ -13781,7 +14090,7 @@
                     <a:p>
                       <a:pPr algn="ctr"/>
                       <a:r>
-                        <a:rPr sz="1950" b="0">
+                        <a:rPr sz="1875" b="0">
                           <a:solidFill>
                             <a:srgbClr val="29203A"/>
                           </a:solidFill>
@@ -13789,7 +14098,7 @@
                           <a:ea typeface="Microsoft YaHei"/>
                           <a:cs typeface="Microsoft YaHei"/>
                         </a:rPr>
-                        <a:t>21,605.63</a:t>
+                        <a:t>+57.17</a:t>
                       </a:r>
                     </a:p>
                   </a:txBody>
@@ -13802,6 +14111,65 @@
                       <a:round/>
                       <a:headEnd type="none" w="med" len="med"/>
                       <a:tailEnd type="none" w="med" len="med"/>
+                    </a:lnL>
+                    <a:lnR w="6668">
+                      <a:solidFill>
+                        <a:srgbClr val="E8E3EF"/>
+                      </a:solidFill>
+                      <a:prstDash val="solid"/>
+                    </a:lnR>
+                    <a:lnT w="6668" cap="flat" cmpd="sng" algn="ctr">
+                      <a:solidFill>
+                        <a:srgbClr val="E8E3EF"/>
+                      </a:solidFill>
+                      <a:prstDash val="solid"/>
+                      <a:round/>
+                      <a:headEnd type="none" w="med" len="med"/>
+                      <a:tailEnd type="none" w="med" len="med"/>
+                    </a:lnT>
+                    <a:lnB w="6668">
+                      <a:solidFill>
+                        <a:srgbClr val="E8E3EF"/>
+                      </a:solidFill>
+                      <a:prstDash val="solid"/>
+                    </a:lnB>
+                    <a:solidFill>
+                      <a:srgbClr val="FFFFFF"/>
+                    </a:solidFill>
+                  </a:tcPr>
+                </a:tc>
+                <a:extLst>
+                  <a:ext uri="{0D108BD9-81ED-4DB2-BD59-A6C34878D82A}">
+                    <a16:rowId xmlns:a16="http://schemas.microsoft.com/office/drawing/2014/main" val="10006"/>
+                  </a:ext>
+                </a:extLst>
+              </a:tr>
+              <a:tr h="517922">
+                <a:tc>
+                  <a:txBody>
+                    <a:bodyPr/>
+                    <a:lstStyle/>
+                    <a:p>
+                      <a:pPr algn="l"/>
+                      <a:r>
+                        <a:rPr sz="1875" b="0">
+                          <a:solidFill>
+                            <a:srgbClr val="29203A"/>
+                          </a:solidFill>
+                          <a:latin typeface="Microsoft YaHei"/>
+                          <a:ea typeface="Microsoft YaHei"/>
+                          <a:cs typeface="Microsoft YaHei"/>
+                        </a:rPr>
+                        <a:t>qsort / 20</a:t>
+                      </a:r>
+                    </a:p>
+                  </a:txBody>
+                  <a:tcPr marL="114300" marR="95250" marT="114300" marB="95250" anchor="ctr">
+                    <a:lnL w="6668">
+                      <a:solidFill>
+                        <a:srgbClr val="E8E3EF"/>
+                      </a:solidFill>
+                      <a:prstDash val="solid"/>
                     </a:lnL>
                     <a:lnR w="6668">
                       <a:solidFill>
@@ -13836,7 +14204,7 @@
                     <a:p>
                       <a:pPr algn="ctr"/>
                       <a:r>
-                        <a:rPr sz="1950" b="0">
+                        <a:rPr sz="1875" b="0">
                           <a:solidFill>
                             <a:srgbClr val="29203A"/>
                           </a:solidFill>
@@ -13844,7 +14212,7 @@
                           <a:ea typeface="Microsoft YaHei"/>
                           <a:cs typeface="Microsoft YaHei"/>
                         </a:rPr>
-                        <a:t>21,633.00</a:t>
+                        <a:t>332.80</a:t>
                       </a:r>
                     </a:p>
                   </a:txBody>
@@ -13891,7 +14259,7 @@
                     <a:p>
                       <a:pPr algn="ctr"/>
                       <a:r>
-                        <a:rPr sz="1950" b="0">
+                        <a:rPr sz="1875" b="0">
                           <a:solidFill>
                             <a:srgbClr val="29203A"/>
                           </a:solidFill>
@@ -13899,7 +14267,7 @@
                           <a:ea typeface="Microsoft YaHei"/>
                           <a:cs typeface="Microsoft YaHei"/>
                         </a:rPr>
-                        <a:t>+27.37</a:t>
+                        <a:t>337.23</a:t>
                       </a:r>
                     </a:p>
                   </a:txBody>
@@ -13912,65 +14280,6 @@
                       <a:round/>
                       <a:headEnd type="none" w="med" len="med"/>
                       <a:tailEnd type="none" w="med" len="med"/>
-                    </a:lnL>
-                    <a:lnR w="6668">
-                      <a:solidFill>
-                        <a:srgbClr val="E8E3EF"/>
-                      </a:solidFill>
-                      <a:prstDash val="solid"/>
-                    </a:lnR>
-                    <a:lnT w="6668" cap="flat" cmpd="sng" algn="ctr">
-                      <a:solidFill>
-                        <a:srgbClr val="E8E3EF"/>
-                      </a:solidFill>
-                      <a:prstDash val="solid"/>
-                      <a:round/>
-                      <a:headEnd type="none" w="med" len="med"/>
-                      <a:tailEnd type="none" w="med" len="med"/>
-                    </a:lnT>
-                    <a:lnB w="6668">
-                      <a:solidFill>
-                        <a:srgbClr val="E8E3EF"/>
-                      </a:solidFill>
-                      <a:prstDash val="solid"/>
-                    </a:lnB>
-                    <a:solidFill>
-                      <a:srgbClr val="FFFFFF"/>
-                    </a:solidFill>
-                  </a:tcPr>
-                </a:tc>
-                <a:extLst>
-                  <a:ext uri="{0D108BD9-81ED-4DB2-BD59-A6C34878D82A}">
-                    <a16:rowId xmlns:a16="http://schemas.microsoft.com/office/drawing/2014/main" val="10005"/>
-                  </a:ext>
-                </a:extLst>
-              </a:tr>
-              <a:tr h="557893">
-                <a:tc>
-                  <a:txBody>
-                    <a:bodyPr/>
-                    <a:lstStyle/>
-                    <a:p>
-                      <a:pPr algn="l"/>
-                      <a:r>
-                        <a:rPr sz="1950" b="0">
-                          <a:solidFill>
-                            <a:srgbClr val="29203A"/>
-                          </a:solidFill>
-                          <a:latin typeface="Microsoft YaHei"/>
-                          <a:ea typeface="Microsoft YaHei"/>
-                          <a:cs typeface="Microsoft YaHei"/>
-                        </a:rPr>
-                        <a:t>mm32 / 100</a:t>
-                      </a:r>
-                    </a:p>
-                  </a:txBody>
-                  <a:tcPr marL="114300" marR="95250" marT="114300" marB="95250" anchor="ctr">
-                    <a:lnL w="6668">
-                      <a:solidFill>
-                        <a:srgbClr val="E8E3EF"/>
-                      </a:solidFill>
-                      <a:prstDash val="solid"/>
                     </a:lnL>
                     <a:lnR w="6668">
                       <a:solidFill>
@@ -14005,7 +14314,7 @@
                     <a:p>
                       <a:pPr algn="ctr"/>
                       <a:r>
-                        <a:rPr sz="1950" b="0">
+                        <a:rPr sz="1875" b="0">
                           <a:solidFill>
                             <a:srgbClr val="29203A"/>
                           </a:solidFill>
@@ -14013,117 +14322,7 @@
                           <a:ea typeface="Microsoft YaHei"/>
                           <a:cs typeface="Microsoft YaHei"/>
                         </a:rPr>
-                        <a:t>19,872.00</a:t>
-                      </a:r>
-                    </a:p>
-                  </a:txBody>
-                  <a:tcPr marL="114300" marR="95250" marT="114300" marB="95250" anchor="ctr">
-                    <a:lnL w="6668" cap="flat" cmpd="sng" algn="ctr">
-                      <a:solidFill>
-                        <a:srgbClr val="E8E3EF"/>
-                      </a:solidFill>
-                      <a:prstDash val="solid"/>
-                      <a:round/>
-                      <a:headEnd type="none" w="med" len="med"/>
-                      <a:tailEnd type="none" w="med" len="med"/>
-                    </a:lnL>
-                    <a:lnR w="6668">
-                      <a:solidFill>
-                        <a:srgbClr val="E8E3EF"/>
-                      </a:solidFill>
-                      <a:prstDash val="solid"/>
-                    </a:lnR>
-                    <a:lnT w="6668" cap="flat" cmpd="sng" algn="ctr">
-                      <a:solidFill>
-                        <a:srgbClr val="E8E3EF"/>
-                      </a:solidFill>
-                      <a:prstDash val="solid"/>
-                      <a:round/>
-                      <a:headEnd type="none" w="med" len="med"/>
-                      <a:tailEnd type="none" w="med" len="med"/>
-                    </a:lnT>
-                    <a:lnB w="6668">
-                      <a:solidFill>
-                        <a:srgbClr val="E8E3EF"/>
-                      </a:solidFill>
-                      <a:prstDash val="solid"/>
-                    </a:lnB>
-                    <a:solidFill>
-                      <a:srgbClr val="FFFFFF"/>
-                    </a:solidFill>
-                  </a:tcPr>
-                </a:tc>
-                <a:tc>
-                  <a:txBody>
-                    <a:bodyPr/>
-                    <a:lstStyle/>
-                    <a:p>
-                      <a:pPr algn="ctr"/>
-                      <a:r>
-                        <a:rPr sz="1950" b="0">
-                          <a:solidFill>
-                            <a:srgbClr val="29203A"/>
-                          </a:solidFill>
-                          <a:latin typeface="Microsoft YaHei"/>
-                          <a:ea typeface="Microsoft YaHei"/>
-                          <a:cs typeface="Microsoft YaHei"/>
-                        </a:rPr>
-                        <a:t>19,604.00</a:t>
-                      </a:r>
-                    </a:p>
-                  </a:txBody>
-                  <a:tcPr marL="114300" marR="95250" marT="114300" marB="95250" anchor="ctr">
-                    <a:lnL w="6668" cap="flat" cmpd="sng" algn="ctr">
-                      <a:solidFill>
-                        <a:srgbClr val="E8E3EF"/>
-                      </a:solidFill>
-                      <a:prstDash val="solid"/>
-                      <a:round/>
-                      <a:headEnd type="none" w="med" len="med"/>
-                      <a:tailEnd type="none" w="med" len="med"/>
-                    </a:lnL>
-                    <a:lnR w="6668">
-                      <a:solidFill>
-                        <a:srgbClr val="E8E3EF"/>
-                      </a:solidFill>
-                      <a:prstDash val="solid"/>
-                    </a:lnR>
-                    <a:lnT w="6668" cap="flat" cmpd="sng" algn="ctr">
-                      <a:solidFill>
-                        <a:srgbClr val="E8E3EF"/>
-                      </a:solidFill>
-                      <a:prstDash val="solid"/>
-                      <a:round/>
-                      <a:headEnd type="none" w="med" len="med"/>
-                      <a:tailEnd type="none" w="med" len="med"/>
-                    </a:lnT>
-                    <a:lnB w="6668">
-                      <a:solidFill>
-                        <a:srgbClr val="E8E3EF"/>
-                      </a:solidFill>
-                      <a:prstDash val="solid"/>
-                    </a:lnB>
-                    <a:solidFill>
-                      <a:srgbClr val="FFFFFF"/>
-                    </a:solidFill>
-                  </a:tcPr>
-                </a:tc>
-                <a:tc>
-                  <a:txBody>
-                    <a:bodyPr/>
-                    <a:lstStyle/>
-                    <a:p>
-                      <a:pPr algn="ctr"/>
-                      <a:r>
-                        <a:rPr sz="1950" b="0">
-                          <a:solidFill>
-                            <a:srgbClr val="29203A"/>
-                          </a:solidFill>
-                          <a:latin typeface="Microsoft YaHei"/>
-                          <a:ea typeface="Microsoft YaHei"/>
-                          <a:cs typeface="Microsoft YaHei"/>
-                        </a:rPr>
-                        <a:t>-268.00</a:t>
+                        <a:t>+4.43</a:t>
                       </a:r>
                     </a:p>
                   </a:txBody>
@@ -14165,7 +14364,7 @@
                 </a:tc>
                 <a:extLst>
                   <a:ext uri="{0D108BD9-81ED-4DB2-BD59-A6C34878D82A}">
-                    <a16:rowId xmlns:a16="http://schemas.microsoft.com/office/drawing/2014/main" val="10006"/>
+                    <a16:rowId xmlns:a16="http://schemas.microsoft.com/office/drawing/2014/main" val="10007"/>
                   </a:ext>
                 </a:extLst>
               </a:tr>
@@ -14175,10 +14374,10 @@
       </p:graphicFrame>
       <p:sp>
         <p:nvSpPr>
-          <p:cNvPr id="15" name="总体平均进一步降低 0.71%。mm32 / 50 轻微退化 0.12">
+          <p:cNvPr id="15" name="总体平均再降 1.46%。这里列出主要变化，全部 20 项见实验报告。">
             <a:extLst>
               <a:ext uri="{FF2B5EF4-FFF2-40B4-BE49-F238E27FC236}">
-                <a16:creationId xmlns:a16="http://schemas.microsoft.com/office/drawing/2014/main" id="{E1771477-FCB8-48E0-90D9-B38ED8D5C676}"/>
+                <a16:creationId xmlns:a16="http://schemas.microsoft.com/office/drawing/2014/main" id="{E95D619A-878D-401A-A1BF-70450E2D89FC}"/>
               </a:ext>
             </a:extLst>
           </p:cNvPr>
@@ -14189,8 +14388,8 @@
         </p:nvSpPr>
         <p:spPr>
           <a:xfrm>
-            <a:off x="857250" y="5715000"/>
-            <a:ext cx="10477500" cy="571500"/>
+            <a:off x="857250" y="5791200"/>
+            <a:ext cx="10477500" cy="619125"/>
           </a:xfrm>
           <a:prstGeom prst="rect">
             <a:avLst/>
@@ -14204,7 +14403,7 @@
           <a:bodyPr lIns="0" tIns="0" rIns="0" bIns="0" anchor="t"/>
           <a:lstStyle>
             <a:defPPr>
-              <a:defRPr sz="2100" b="0">
+              <a:defRPr sz="2025" b="0">
                 <a:solidFill>
                   <a:srgbClr val="238A91"/>
                 </a:solidFill>
@@ -14214,7 +14413,7 @@
               </a:defRPr>
             </a:defPPr>
             <a:lvl1pPr>
-              <a:defRPr sz="2100" b="0">
+              <a:defRPr sz="2025" b="0">
                 <a:solidFill>
                   <a:srgbClr val="238A91"/>
                 </a:solidFill>
@@ -14224,7 +14423,7 @@
               </a:defRPr>
             </a:lvl1pPr>
             <a:lvl2pPr>
-              <a:defRPr sz="2100" b="0">
+              <a:defRPr sz="2025" b="0">
                 <a:solidFill>
                   <a:srgbClr val="238A91"/>
                 </a:solidFill>
@@ -14234,7 +14433,7 @@
               </a:defRPr>
             </a:lvl2pPr>
             <a:lvl3pPr>
-              <a:defRPr sz="2100" b="0">
+              <a:defRPr sz="2025" b="0">
                 <a:solidFill>
                   <a:srgbClr val="238A91"/>
                 </a:solidFill>
@@ -14244,7 +14443,7 @@
               </a:defRPr>
             </a:lvl3pPr>
             <a:lvl4pPr>
-              <a:defRPr sz="2100" b="0">
+              <a:defRPr sz="2025" b="0">
                 <a:solidFill>
                   <a:srgbClr val="238A91"/>
                 </a:solidFill>
@@ -14254,7 +14453,7 @@
               </a:defRPr>
             </a:lvl4pPr>
             <a:lvl5pPr>
-              <a:defRPr sz="2100" b="0">
+              <a:defRPr sz="2025" b="0">
                 <a:solidFill>
                   <a:srgbClr val="238A91"/>
                 </a:solidFill>
@@ -14264,7 +14463,7 @@
               </a:defRPr>
             </a:lvl5pPr>
             <a:lvl6pPr>
-              <a:defRPr sz="2100" b="0">
+              <a:defRPr sz="2025" b="0">
                 <a:solidFill>
                   <a:srgbClr val="238A91"/>
                 </a:solidFill>
@@ -14274,7 +14473,7 @@
               </a:defRPr>
             </a:lvl6pPr>
             <a:lvl7pPr>
-              <a:defRPr sz="2100" b="0">
+              <a:defRPr sz="2025" b="0">
                 <a:solidFill>
                   <a:srgbClr val="238A91"/>
                 </a:solidFill>
@@ -14284,7 +14483,7 @@
               </a:defRPr>
             </a:lvl7pPr>
             <a:lvl8pPr>
-              <a:defRPr sz="2100" b="0">
+              <a:defRPr sz="2025" b="0">
                 <a:solidFill>
                   <a:srgbClr val="238A91"/>
                 </a:solidFill>
@@ -14294,7 +14493,7 @@
               </a:defRPr>
             </a:lvl8pPr>
             <a:lvl9pPr>
-              <a:defRPr sz="2100" b="0">
+              <a:defRPr sz="2025" b="0">
                 <a:solidFill>
                   <a:srgbClr val="238A91"/>
                 </a:solidFill>
@@ -14306,7 +14505,7 @@
           </a:lstStyle>
           <a:p>
             <a:pPr>
-              <a:defRPr sz="2100" b="0">
+              <a:defRPr sz="2025" b="0">
                 <a:solidFill>
                   <a:srgbClr val="238A91"/>
                 </a:solidFill>
@@ -14316,7 +14515,7 @@
               </a:defRPr>
             </a:pPr>
             <a:r>
-              <a:rPr sz="2100" b="0">
+              <a:rPr sz="2025" b="0">
                 <a:solidFill>
                   <a:srgbClr val="238A91"/>
                 </a:solidFill>
@@ -14324,7 +14523,7 @@
                 <a:ea typeface="Microsoft YaHei"/>
                 <a:cs typeface="Microsoft YaHei"/>
               </a:rPr>
-              <a:t>总体平均进一步降低 0.71%。mm32 / 50 轻微退化 0.127%，如实保留。</a:t>
+              <a:t>总体平均再降 1.46%。这里列出主要变化，全部 20 项见实验报告。</a:t>
             </a:r>
           </a:p>
         </p:txBody>
@@ -14558,7 +14757,7 @@
                 <a:ea typeface="Microsoft YaHei"/>
                 <a:cs typeface="Microsoft YaHei"/>
               </a:rPr>
-              <a:t>构造轨迹回归：规律不同，收益也不同</a:t>
+              <a:t>新增压力测试：扰动循环出现退化</a:t>
             </a:r>
             <a:endParaRPr sz="2775"/>
           </a:p>
@@ -14921,34 +15120,12 @@
           </a:p>
         </p:txBody>
       </p:sp>
-      <p:graphicFrame>
-        <p:nvGraphicFramePr>
-          <p:cNvPr id="14" name="Chart">
+      <p:sp>
+        <p:nvSpPr>
+          <p:cNvPr id="14" name="纵轴：五档容量平均缺页次数，V2 / V3 均使用 30 个种子。">
             <a:extLst>
               <a:ext uri="{FF2B5EF4-FFF2-40B4-BE49-F238E27FC236}">
-                <a16:creationId xmlns:a16="http://schemas.microsoft.com/office/drawing/2014/main" id="{164CFFEB-AF34-41DC-94A8-CB29F266B698}"/>
-              </a:ext>
-            </a:extLst>
-          </p:cNvPr>
-          <p:cNvGraphicFramePr/>
-          <p:nvPr/>
-        </p:nvGraphicFramePr>
-        <p:xfrm>
-          <a:off x="857250" y="1428750"/>
-          <a:ext cx="10477500" cy="3810000"/>
-        </p:xfrm>
-        <a:graphic>
-          <a:graphicData uri="http://schemas.openxmlformats.org/drawingml/2006/chart">
-            <c:chart xmlns:c="http://schemas.openxmlformats.org/drawingml/2006/chart" xmlns:r="http://schemas.openxmlformats.org/officeDocument/2006/relationships" r:id="rId3"/>
-          </a:graphicData>
-        </a:graphic>
-      </p:graphicFrame>
-      <p:sp>
-        <p:nvSpPr>
-          <p:cNvPr id="15" name="这些轨迹在旧版已看过，本次用于回归测试；不代表老师每天提供的新轨迹。">
-            <a:extLst>
-              <a:ext uri="{FF2B5EF4-FFF2-40B4-BE49-F238E27FC236}">
-                <a16:creationId xmlns:a16="http://schemas.microsoft.com/office/drawing/2014/main" id="{ECF13A06-7EB2-4A44-BE62-A7F09A78BAE5}"/>
+                <a16:creationId xmlns:a16="http://schemas.microsoft.com/office/drawing/2014/main" id="{FF11050A-9D1E-4C78-8041-CDC7534454AE}"/>
               </a:ext>
             </a:extLst>
           </p:cNvPr>
@@ -14959,8 +15136,8 @@
         </p:nvSpPr>
         <p:spPr>
           <a:xfrm>
-            <a:off x="857250" y="5619750"/>
-            <a:ext cx="10477500" cy="762000"/>
+            <a:off x="857250" y="1066800"/>
+            <a:ext cx="10477500" cy="285750"/>
           </a:xfrm>
           <a:prstGeom prst="rect">
             <a:avLst/>
@@ -14974,9 +15151,9 @@
           <a:bodyPr lIns="0" tIns="0" rIns="0" bIns="0" anchor="t"/>
           <a:lstStyle>
             <a:defPPr>
-              <a:defRPr sz="1950" b="0">
-                <a:solidFill>
-                  <a:srgbClr val="238A91"/>
+              <a:defRPr sz="1575" b="0">
+                <a:solidFill>
+                  <a:srgbClr val="69717A"/>
                 </a:solidFill>
                 <a:latin typeface="Microsoft YaHei"/>
                 <a:ea typeface="Microsoft YaHei"/>
@@ -14984,9 +15161,9 @@
               </a:defRPr>
             </a:defPPr>
             <a:lvl1pPr>
-              <a:defRPr sz="1950" b="0">
-                <a:solidFill>
-                  <a:srgbClr val="238A91"/>
+              <a:defRPr sz="1575" b="0">
+                <a:solidFill>
+                  <a:srgbClr val="69717A"/>
                 </a:solidFill>
                 <a:latin typeface="Microsoft YaHei"/>
                 <a:ea typeface="Microsoft YaHei"/>
@@ -14994,9 +15171,9 @@
               </a:defRPr>
             </a:lvl1pPr>
             <a:lvl2pPr>
-              <a:defRPr sz="1950" b="0">
-                <a:solidFill>
-                  <a:srgbClr val="238A91"/>
+              <a:defRPr sz="1575" b="0">
+                <a:solidFill>
+                  <a:srgbClr val="69717A"/>
                 </a:solidFill>
                 <a:latin typeface="Microsoft YaHei"/>
                 <a:ea typeface="Microsoft YaHei"/>
@@ -15004,9 +15181,9 @@
               </a:defRPr>
             </a:lvl2pPr>
             <a:lvl3pPr>
-              <a:defRPr sz="1950" b="0">
-                <a:solidFill>
-                  <a:srgbClr val="238A91"/>
+              <a:defRPr sz="1575" b="0">
+                <a:solidFill>
+                  <a:srgbClr val="69717A"/>
                 </a:solidFill>
                 <a:latin typeface="Microsoft YaHei"/>
                 <a:ea typeface="Microsoft YaHei"/>
@@ -15014,9 +15191,9 @@
               </a:defRPr>
             </a:lvl3pPr>
             <a:lvl4pPr>
-              <a:defRPr sz="1950" b="0">
-                <a:solidFill>
-                  <a:srgbClr val="238A91"/>
+              <a:defRPr sz="1575" b="0">
+                <a:solidFill>
+                  <a:srgbClr val="69717A"/>
                 </a:solidFill>
                 <a:latin typeface="Microsoft YaHei"/>
                 <a:ea typeface="Microsoft YaHei"/>
@@ -15024,9 +15201,9 @@
               </a:defRPr>
             </a:lvl4pPr>
             <a:lvl5pPr>
-              <a:defRPr sz="1950" b="0">
-                <a:solidFill>
-                  <a:srgbClr val="238A91"/>
+              <a:defRPr sz="1575" b="0">
+                <a:solidFill>
+                  <a:srgbClr val="69717A"/>
                 </a:solidFill>
                 <a:latin typeface="Microsoft YaHei"/>
                 <a:ea typeface="Microsoft YaHei"/>
@@ -15034,9 +15211,9 @@
               </a:defRPr>
             </a:lvl5pPr>
             <a:lvl6pPr>
-              <a:defRPr sz="1950" b="0">
-                <a:solidFill>
-                  <a:srgbClr val="238A91"/>
+              <a:defRPr sz="1575" b="0">
+                <a:solidFill>
+                  <a:srgbClr val="69717A"/>
                 </a:solidFill>
                 <a:latin typeface="Microsoft YaHei"/>
                 <a:ea typeface="Microsoft YaHei"/>
@@ -15044,9 +15221,9 @@
               </a:defRPr>
             </a:lvl6pPr>
             <a:lvl7pPr>
-              <a:defRPr sz="1950" b="0">
-                <a:solidFill>
-                  <a:srgbClr val="238A91"/>
+              <a:defRPr sz="1575" b="0">
+                <a:solidFill>
+                  <a:srgbClr val="69717A"/>
                 </a:solidFill>
                 <a:latin typeface="Microsoft YaHei"/>
                 <a:ea typeface="Microsoft YaHei"/>
@@ -15054,9 +15231,9 @@
               </a:defRPr>
             </a:lvl7pPr>
             <a:lvl8pPr>
-              <a:defRPr sz="1950" b="0">
-                <a:solidFill>
-                  <a:srgbClr val="238A91"/>
+              <a:defRPr sz="1575" b="0">
+                <a:solidFill>
+                  <a:srgbClr val="69717A"/>
                 </a:solidFill>
                 <a:latin typeface="Microsoft YaHei"/>
                 <a:ea typeface="Microsoft YaHei"/>
@@ -15064,9 +15241,9 @@
               </a:defRPr>
             </a:lvl8pPr>
             <a:lvl9pPr>
-              <a:defRPr sz="1950" b="0">
-                <a:solidFill>
-                  <a:srgbClr val="238A91"/>
+              <a:defRPr sz="1575" b="0">
+                <a:solidFill>
+                  <a:srgbClr val="69717A"/>
                 </a:solidFill>
                 <a:latin typeface="Microsoft YaHei"/>
                 <a:ea typeface="Microsoft YaHei"/>
@@ -15076,9 +15253,9 @@
           </a:lstStyle>
           <a:p>
             <a:pPr>
-              <a:defRPr sz="1950" b="0">
-                <a:solidFill>
-                  <a:srgbClr val="238A91"/>
+              <a:defRPr sz="1575" b="0">
+                <a:solidFill>
+                  <a:srgbClr val="69717A"/>
                 </a:solidFill>
                 <a:latin typeface="Microsoft YaHei"/>
                 <a:ea typeface="Microsoft YaHei"/>
@@ -15086,15 +15263,349 @@
               </a:defRPr>
             </a:pPr>
             <a:r>
-              <a:rPr sz="1950" b="0">
+              <a:rPr sz="1575" b="0">
+                <a:solidFill>
+                  <a:srgbClr val="69717A"/>
+                </a:solidFill>
+                <a:latin typeface="Microsoft YaHei"/>
+                <a:ea typeface="Microsoft YaHei"/>
+                <a:cs typeface="Microsoft YaHei"/>
+              </a:rPr>
+              <a:t>纵轴：五档容量平均缺页次数，V2 / V3 均使用 30 个种子。</a:t>
+            </a:r>
+          </a:p>
+        </p:txBody>
+      </p:sp>
+      <p:graphicFrame>
+        <p:nvGraphicFramePr>
+          <p:cNvPr id="15" name="Chart">
+            <a:extLst>
+              <a:ext uri="{FF2B5EF4-FFF2-40B4-BE49-F238E27FC236}">
+                <a16:creationId xmlns:a16="http://schemas.microsoft.com/office/drawing/2014/main" id="{0501161A-05A1-4BC5-B1DC-C1ABA1A8ACEE}"/>
+              </a:ext>
+            </a:extLst>
+          </p:cNvPr>
+          <p:cNvGraphicFramePr/>
+          <p:nvPr/>
+        </p:nvGraphicFramePr>
+        <p:xfrm>
+          <a:off x="857250" y="1381125"/>
+          <a:ext cx="10477500" cy="3810000"/>
+        </p:xfrm>
+        <a:graphic>
+          <a:graphicData uri="http://schemas.openxmlformats.org/drawingml/2006/chart">
+            <c:chart xmlns:c="http://schemas.openxmlformats.org/drawingml/2006/chart" xmlns:r="http://schemas.openxmlformats.org/officeDocument/2006/relationships" r:id="rId3"/>
+          </a:graphicData>
+        </a:graphic>
+      </p:graphicFrame>
+      <p:sp>
+        <p:nvSpPr>
+          <p:cNvPr id="16" name="扰动循环平均多 0.94% 缺页。快速更新也会更容易受短期波动影响。">
+            <a:extLst>
+              <a:ext uri="{FF2B5EF4-FFF2-40B4-BE49-F238E27FC236}">
+                <a16:creationId xmlns:a16="http://schemas.microsoft.com/office/drawing/2014/main" id="{251A6263-30C9-410A-A5DF-A6B7C91C9BEF}"/>
+              </a:ext>
+            </a:extLst>
+          </p:cNvPr>
+          <p:cNvSpPr>
+            <a:spLocks noGrp="1"/>
+          </p:cNvSpPr>
+          <p:nvPr/>
+        </p:nvSpPr>
+        <p:spPr>
+          <a:xfrm>
+            <a:off x="857250" y="5476875"/>
+            <a:ext cx="10477500" cy="666750"/>
+          </a:xfrm>
+          <a:prstGeom prst="rect">
+            <a:avLst/>
+          </a:prstGeom>
+          <a:noFill/>
+          <a:ln w="0">
+            <a:noFill/>
+          </a:ln>
+        </p:spPr>
+        <p:txBody>
+          <a:bodyPr lIns="0" tIns="0" rIns="0" bIns="0" anchor="t"/>
+          <a:lstStyle>
+            <a:defPPr>
+              <a:defRPr sz="2100" b="0">
                 <a:solidFill>
                   <a:srgbClr val="238A91"/>
                 </a:solidFill>
                 <a:latin typeface="Microsoft YaHei"/>
                 <a:ea typeface="Microsoft YaHei"/>
                 <a:cs typeface="Microsoft YaHei"/>
+              </a:defRPr>
+            </a:defPPr>
+            <a:lvl1pPr>
+              <a:defRPr sz="2100" b="0">
+                <a:solidFill>
+                  <a:srgbClr val="238A91"/>
+                </a:solidFill>
+                <a:latin typeface="Microsoft YaHei"/>
+                <a:ea typeface="Microsoft YaHei"/>
+                <a:cs typeface="Microsoft YaHei"/>
+              </a:defRPr>
+            </a:lvl1pPr>
+            <a:lvl2pPr>
+              <a:defRPr sz="2100" b="0">
+                <a:solidFill>
+                  <a:srgbClr val="238A91"/>
+                </a:solidFill>
+                <a:latin typeface="Microsoft YaHei"/>
+                <a:ea typeface="Microsoft YaHei"/>
+                <a:cs typeface="Microsoft YaHei"/>
+              </a:defRPr>
+            </a:lvl2pPr>
+            <a:lvl3pPr>
+              <a:defRPr sz="2100" b="0">
+                <a:solidFill>
+                  <a:srgbClr val="238A91"/>
+                </a:solidFill>
+                <a:latin typeface="Microsoft YaHei"/>
+                <a:ea typeface="Microsoft YaHei"/>
+                <a:cs typeface="Microsoft YaHei"/>
+              </a:defRPr>
+            </a:lvl3pPr>
+            <a:lvl4pPr>
+              <a:defRPr sz="2100" b="0">
+                <a:solidFill>
+                  <a:srgbClr val="238A91"/>
+                </a:solidFill>
+                <a:latin typeface="Microsoft YaHei"/>
+                <a:ea typeface="Microsoft YaHei"/>
+                <a:cs typeface="Microsoft YaHei"/>
+              </a:defRPr>
+            </a:lvl4pPr>
+            <a:lvl5pPr>
+              <a:defRPr sz="2100" b="0">
+                <a:solidFill>
+                  <a:srgbClr val="238A91"/>
+                </a:solidFill>
+                <a:latin typeface="Microsoft YaHei"/>
+                <a:ea typeface="Microsoft YaHei"/>
+                <a:cs typeface="Microsoft YaHei"/>
+              </a:defRPr>
+            </a:lvl5pPr>
+            <a:lvl6pPr>
+              <a:defRPr sz="2100" b="0">
+                <a:solidFill>
+                  <a:srgbClr val="238A91"/>
+                </a:solidFill>
+                <a:latin typeface="Microsoft YaHei"/>
+                <a:ea typeface="Microsoft YaHei"/>
+                <a:cs typeface="Microsoft YaHei"/>
+              </a:defRPr>
+            </a:lvl6pPr>
+            <a:lvl7pPr>
+              <a:defRPr sz="2100" b="0">
+                <a:solidFill>
+                  <a:srgbClr val="238A91"/>
+                </a:solidFill>
+                <a:latin typeface="Microsoft YaHei"/>
+                <a:ea typeface="Microsoft YaHei"/>
+                <a:cs typeface="Microsoft YaHei"/>
+              </a:defRPr>
+            </a:lvl7pPr>
+            <a:lvl8pPr>
+              <a:defRPr sz="2100" b="0">
+                <a:solidFill>
+                  <a:srgbClr val="238A91"/>
+                </a:solidFill>
+                <a:latin typeface="Microsoft YaHei"/>
+                <a:ea typeface="Microsoft YaHei"/>
+                <a:cs typeface="Microsoft YaHei"/>
+              </a:defRPr>
+            </a:lvl8pPr>
+            <a:lvl9pPr>
+              <a:defRPr sz="2100" b="0">
+                <a:solidFill>
+                  <a:srgbClr val="238A91"/>
+                </a:solidFill>
+                <a:latin typeface="Microsoft YaHei"/>
+                <a:ea typeface="Microsoft YaHei"/>
+                <a:cs typeface="Microsoft YaHei"/>
+              </a:defRPr>
+            </a:lvl9pPr>
+          </a:lstStyle>
+          <a:p>
+            <a:pPr>
+              <a:defRPr sz="2100" b="0">
+                <a:solidFill>
+                  <a:srgbClr val="238A91"/>
+                </a:solidFill>
+                <a:latin typeface="Microsoft YaHei"/>
+                <a:ea typeface="Microsoft YaHei"/>
+                <a:cs typeface="Microsoft YaHei"/>
+              </a:defRPr>
+            </a:pPr>
+            <a:r>
+              <a:rPr sz="2100" b="0">
+                <a:solidFill>
+                  <a:srgbClr val="238A91"/>
+                </a:solidFill>
+                <a:latin typeface="Microsoft YaHei"/>
+                <a:ea typeface="Microsoft YaHei"/>
+                <a:cs typeface="Microsoft YaHei"/>
               </a:rPr>
-              <a:t>这些轨迹在旧版已看过，本次用于回归测试；不代表老师每天提供的新轨迹。</a:t>
+              <a:t>扰动循环平均多 0.94% 缺页。快速更新也会更容易受短期波动影响。</a:t>
+            </a:r>
+          </a:p>
+        </p:txBody>
+      </p:sp>
+      <p:sp>
+        <p:nvSpPr>
+          <p:cNvPr id="17" name="算法固定后首次评测，未据此调参；构造轨迹不代表老师的隐藏测试。">
+            <a:extLst>
+              <a:ext uri="{FF2B5EF4-FFF2-40B4-BE49-F238E27FC236}">
+                <a16:creationId xmlns:a16="http://schemas.microsoft.com/office/drawing/2014/main" id="{BA936B06-38B6-466F-904D-2E49A3A99750}"/>
+              </a:ext>
+            </a:extLst>
+          </p:cNvPr>
+          <p:cNvSpPr>
+            <a:spLocks noGrp="1"/>
+          </p:cNvSpPr>
+          <p:nvPr/>
+        </p:nvSpPr>
+        <p:spPr>
+          <a:xfrm>
+            <a:off x="857250" y="6191250"/>
+            <a:ext cx="10477500" cy="333375"/>
+          </a:xfrm>
+          <a:prstGeom prst="rect">
+            <a:avLst/>
+          </a:prstGeom>
+          <a:noFill/>
+          <a:ln w="0">
+            <a:noFill/>
+          </a:ln>
+        </p:spPr>
+        <p:txBody>
+          <a:bodyPr lIns="0" tIns="0" rIns="0" bIns="0" anchor="t"/>
+          <a:lstStyle>
+            <a:defPPr>
+              <a:defRPr sz="1725" b="0">
+                <a:solidFill>
+                  <a:srgbClr val="69717A"/>
+                </a:solidFill>
+                <a:latin typeface="Microsoft YaHei"/>
+                <a:ea typeface="Microsoft YaHei"/>
+                <a:cs typeface="Microsoft YaHei"/>
+              </a:defRPr>
+            </a:defPPr>
+            <a:lvl1pPr>
+              <a:defRPr sz="1725" b="0">
+                <a:solidFill>
+                  <a:srgbClr val="69717A"/>
+                </a:solidFill>
+                <a:latin typeface="Microsoft YaHei"/>
+                <a:ea typeface="Microsoft YaHei"/>
+                <a:cs typeface="Microsoft YaHei"/>
+              </a:defRPr>
+            </a:lvl1pPr>
+            <a:lvl2pPr>
+              <a:defRPr sz="1725" b="0">
+                <a:solidFill>
+                  <a:srgbClr val="69717A"/>
+                </a:solidFill>
+                <a:latin typeface="Microsoft YaHei"/>
+                <a:ea typeface="Microsoft YaHei"/>
+                <a:cs typeface="Microsoft YaHei"/>
+              </a:defRPr>
+            </a:lvl2pPr>
+            <a:lvl3pPr>
+              <a:defRPr sz="1725" b="0">
+                <a:solidFill>
+                  <a:srgbClr val="69717A"/>
+                </a:solidFill>
+                <a:latin typeface="Microsoft YaHei"/>
+                <a:ea typeface="Microsoft YaHei"/>
+                <a:cs typeface="Microsoft YaHei"/>
+              </a:defRPr>
+            </a:lvl3pPr>
+            <a:lvl4pPr>
+              <a:defRPr sz="1725" b="0">
+                <a:solidFill>
+                  <a:srgbClr val="69717A"/>
+                </a:solidFill>
+                <a:latin typeface="Microsoft YaHei"/>
+                <a:ea typeface="Microsoft YaHei"/>
+                <a:cs typeface="Microsoft YaHei"/>
+              </a:defRPr>
+            </a:lvl4pPr>
+            <a:lvl5pPr>
+              <a:defRPr sz="1725" b="0">
+                <a:solidFill>
+                  <a:srgbClr val="69717A"/>
+                </a:solidFill>
+                <a:latin typeface="Microsoft YaHei"/>
+                <a:ea typeface="Microsoft YaHei"/>
+                <a:cs typeface="Microsoft YaHei"/>
+              </a:defRPr>
+            </a:lvl5pPr>
+            <a:lvl6pPr>
+              <a:defRPr sz="1725" b="0">
+                <a:solidFill>
+                  <a:srgbClr val="69717A"/>
+                </a:solidFill>
+                <a:latin typeface="Microsoft YaHei"/>
+                <a:ea typeface="Microsoft YaHei"/>
+                <a:cs typeface="Microsoft YaHei"/>
+              </a:defRPr>
+            </a:lvl6pPr>
+            <a:lvl7pPr>
+              <a:defRPr sz="1725" b="0">
+                <a:solidFill>
+                  <a:srgbClr val="69717A"/>
+                </a:solidFill>
+                <a:latin typeface="Microsoft YaHei"/>
+                <a:ea typeface="Microsoft YaHei"/>
+                <a:cs typeface="Microsoft YaHei"/>
+              </a:defRPr>
+            </a:lvl7pPr>
+            <a:lvl8pPr>
+              <a:defRPr sz="1725" b="0">
+                <a:solidFill>
+                  <a:srgbClr val="69717A"/>
+                </a:solidFill>
+                <a:latin typeface="Microsoft YaHei"/>
+                <a:ea typeface="Microsoft YaHei"/>
+                <a:cs typeface="Microsoft YaHei"/>
+              </a:defRPr>
+            </a:lvl8pPr>
+            <a:lvl9pPr>
+              <a:defRPr sz="1725" b="0">
+                <a:solidFill>
+                  <a:srgbClr val="69717A"/>
+                </a:solidFill>
+                <a:latin typeface="Microsoft YaHei"/>
+                <a:ea typeface="Microsoft YaHei"/>
+                <a:cs typeface="Microsoft YaHei"/>
+              </a:defRPr>
+            </a:lvl9pPr>
+          </a:lstStyle>
+          <a:p>
+            <a:pPr>
+              <a:defRPr sz="1725" b="0">
+                <a:solidFill>
+                  <a:srgbClr val="69717A"/>
+                </a:solidFill>
+                <a:latin typeface="Microsoft YaHei"/>
+                <a:ea typeface="Microsoft YaHei"/>
+                <a:cs typeface="Microsoft YaHei"/>
+              </a:defRPr>
+            </a:pPr>
+            <a:r>
+              <a:rPr sz="1725" b="0">
+                <a:solidFill>
+                  <a:srgbClr val="69717A"/>
+                </a:solidFill>
+                <a:latin typeface="Microsoft YaHei"/>
+                <a:ea typeface="Microsoft YaHei"/>
+                <a:cs typeface="Microsoft YaHei"/>
+              </a:rPr>
+              <a:t>算法固定后首次评测，未据此调参；构造轨迹不代表老师的隐藏测试。</a:t>
             </a:r>
           </a:p>
         </p:txBody>
@@ -15696,7 +16207,7 @@
           <p:cNvPr id="14" name="利用访问特征">
             <a:extLst>
               <a:ext uri="{FF2B5EF4-FFF2-40B4-BE49-F238E27FC236}">
-                <a16:creationId xmlns:a16="http://schemas.microsoft.com/office/drawing/2014/main" id="{C3CAD023-7049-4B9A-B1A3-48B9C0485D98}"/>
+                <a16:creationId xmlns:a16="http://schemas.microsoft.com/office/drawing/2014/main" id="{5E723D63-70F6-4524-A166-E97EA829AE50}"/>
               </a:ext>
             </a:extLst>
           </p:cNvPr>
@@ -15852,7 +16363,7 @@
           <p:cNvPr id="15" name="小容量避免循环淘汰。&#10;有稳定间隔时尝试预测。&#10;局部性强时保留 LRU。">
             <a:extLst>
               <a:ext uri="{FF2B5EF4-FFF2-40B4-BE49-F238E27FC236}">
-                <a16:creationId xmlns:a16="http://schemas.microsoft.com/office/drawing/2014/main" id="{397685D1-3A53-4840-8F48-79A17D90EC19}"/>
+                <a16:creationId xmlns:a16="http://schemas.microsoft.com/office/drawing/2014/main" id="{E52AA9F7-9C26-4548-ACE4-CA5590E3DC1C}"/>
               </a:ext>
             </a:extLst>
           </p:cNvPr>
@@ -16054,7 +16565,7 @@
           <p:cNvPr id="16" name="明确的代价">
             <a:extLst>
               <a:ext uri="{FF2B5EF4-FFF2-40B4-BE49-F238E27FC236}">
-                <a16:creationId xmlns:a16="http://schemas.microsoft.com/office/drawing/2014/main" id="{4FA5E18D-38D0-4175-B7AF-87550A56BED5}"/>
+                <a16:creationId xmlns:a16="http://schemas.microsoft.com/office/drawing/2014/main" id="{F20619F4-A002-4C94-8E1B-9527FF61B8B9}"/>
               </a:ext>
             </a:extLst>
           </p:cNvPr>
@@ -16210,7 +16721,7 @@
           <p:cNvPr id="17" name="额外元数据 O(F)，模拟时间 O(NF)。&#10;mm32 / 100：A">
             <a:extLst>
               <a:ext uri="{FF2B5EF4-FFF2-40B4-BE49-F238E27FC236}">
-                <a16:creationId xmlns:a16="http://schemas.microsoft.com/office/drawing/2014/main" id="{830FF3AC-711A-4E76-B881-9307DC6896A0}"/>
+                <a16:creationId xmlns:a16="http://schemas.microsoft.com/office/drawing/2014/main" id="{202DE2C5-FA5D-4879-AD08-5A46687BBE2F}"/>
               </a:ext>
             </a:extLst>
           </p:cNvPr>
@@ -16379,7 +16890,7 @@
                 <a:ea typeface="Microsoft YaHei"/>
                 <a:cs typeface="Microsoft YaHei"/>
               </a:rPr>
-              <a:t>mm32 / 100：Adaptive 64.24 ms，</a:t>
+              <a:t>mm32 / 100：Adaptive 54.42 ms，</a:t>
             </a:r>
           </a:p>
           <a:p>
@@ -16402,17 +16913,17 @@
                 <a:ea typeface="Microsoft YaHei"/>
                 <a:cs typeface="Microsoft YaHei"/>
               </a:rPr>
-              <a:t>LRU 20.61 ms。</a:t>
+              <a:t>LRU 20.79 ms。</a:t>
             </a:r>
           </a:p>
         </p:txBody>
       </p:sp>
       <p:sp>
         <p:nvSpPr>
-          <p:cNvPr id="18" name="本次 15 个配置优于最强在线基线，3 个持平，2 个略差于 Rand">
+          <p:cNvPr id="18" name="本次 16 个配置优于最强在线基线，3 个持平，1 个落后于 Rand">
             <a:extLst>
               <a:ext uri="{FF2B5EF4-FFF2-40B4-BE49-F238E27FC236}">
-                <a16:creationId xmlns:a16="http://schemas.microsoft.com/office/drawing/2014/main" id="{8A135706-1920-4DCB-B43E-2DD3CD96E2C9}"/>
+                <a16:creationId xmlns:a16="http://schemas.microsoft.com/office/drawing/2014/main" id="{FBC564BB-F644-4990-9EE9-B8901DB017B5}"/>
               </a:ext>
             </a:extLst>
           </p:cNvPr>
@@ -16558,7 +17069,7 @@
                 <a:ea typeface="Microsoft YaHei"/>
                 <a:cs typeface="Microsoft YaHei"/>
               </a:rPr>
-              <a:t>本次 15 个配置优于最强在线基线，3 个持平，2 个略差于 Random。</a:t>
+              <a:t>本次 16 个配置优于最强在线基线，3 个持平，1 个落后于 Random。</a:t>
             </a:r>
           </a:p>
         </p:txBody>
@@ -16568,7 +17079,7 @@
           <p:cNvPr id="19" name="新轨迹按同一规则顺序运行，保留 OPT 下界和全部基线，继续报告成功与">
             <a:extLst>
               <a:ext uri="{FF2B5EF4-FFF2-40B4-BE49-F238E27FC236}">
-                <a16:creationId xmlns:a16="http://schemas.microsoft.com/office/drawing/2014/main" id="{F002BCDB-30CE-4A89-B91E-D89120B846FC}"/>
+                <a16:creationId xmlns:a16="http://schemas.microsoft.com/office/drawing/2014/main" id="{F83E7A3F-3E88-4EA1-9AC9-42F8F8929C2D}"/>
               </a:ext>
             </a:extLst>
           </p:cNvPr>
@@ -17316,7 +17827,7 @@
           <p:cNvPr id="14" name="表格 13">
             <a:extLst>
               <a:ext uri="{FF2B5EF4-FFF2-40B4-BE49-F238E27FC236}">
-                <a16:creationId xmlns:a16="http://schemas.microsoft.com/office/drawing/2014/main" id="{BE1D536D-B69A-47C7-A598-11B8AD8AC871}"/>
+                <a16:creationId xmlns:a16="http://schemas.microsoft.com/office/drawing/2014/main" id="{38F50EBC-7741-45B1-9856-3CEE1A4C9D9A}"/>
               </a:ext>
             </a:extLst>
           </p:cNvPr>
@@ -17766,7 +18277,7 @@
                           <a:ea typeface="Microsoft YaHei"/>
                           <a:cs typeface="Microsoft YaHei"/>
                         </a:rPr>
-                        <a:t>V2</a:t>
+                        <a:t>V3</a:t>
                       </a:r>
                     </a:p>
                   </a:txBody>
@@ -18207,7 +18718,7 @@
                           <a:ea typeface="Microsoft YaHei"/>
                           <a:cs typeface="Microsoft YaHei"/>
                         </a:rPr>
-                        <a:t>489.17</a:t>
+                        <a:t>490.17</a:t>
                       </a:r>
                     </a:p>
                   </a:txBody>
@@ -18651,7 +19162,7 @@
                           <a:ea typeface="Microsoft YaHei"/>
                           <a:cs typeface="Microsoft YaHei"/>
                         </a:rPr>
-                        <a:t>436.73</a:t>
+                        <a:t>438.37</a:t>
                       </a:r>
                     </a:p>
                   </a:txBody>
@@ -19095,7 +19606,7 @@
                           <a:ea typeface="Microsoft YaHei"/>
                           <a:cs typeface="Microsoft YaHei"/>
                         </a:rPr>
-                        <a:t>332.80</a:t>
+                        <a:t>337.23</a:t>
                       </a:r>
                     </a:p>
                   </a:txBody>
@@ -20035,10 +20546,10 @@
       </p:graphicFrame>
       <p:sp>
         <p:nvSpPr>
-          <p:cNvPr id="15" name="Random / V2：种子 0～29 的平均值；其余为精确整数。">
+          <p:cNvPr id="15" name="Random / V3：种子 0～29 的平均值；其余为精确整数。">
             <a:extLst>
               <a:ext uri="{FF2B5EF4-FFF2-40B4-BE49-F238E27FC236}">
-                <a16:creationId xmlns:a16="http://schemas.microsoft.com/office/drawing/2014/main" id="{FC66601C-0E2B-49F3-A3B5-74A16891113B}"/>
+                <a16:creationId xmlns:a16="http://schemas.microsoft.com/office/drawing/2014/main" id="{211371B6-21C0-41A4-A888-B97EF87388A5}"/>
               </a:ext>
             </a:extLst>
           </p:cNvPr>
@@ -20184,7 +20695,7 @@
                 <a:ea typeface="Microsoft YaHei"/>
                 <a:cs typeface="Microsoft YaHei"/>
               </a:rPr>
-              <a:t>Random / V2：种子 0～29 的平均值；其余为精确整数。</a:t>
+              <a:t>Random / V3：种子 0～29 的平均值；其余为精确整数。</a:t>
             </a:r>
           </a:p>
         </p:txBody>
@@ -20194,7 +20705,7 @@
           <p:cNvPr id="16" name="原始逐次整数、标准差、最小值、最大值以及 seed=0 整数表均已保存">
             <a:extLst>
               <a:ext uri="{FF2B5EF4-FFF2-40B4-BE49-F238E27FC236}">
-                <a16:creationId xmlns:a16="http://schemas.microsoft.com/office/drawing/2014/main" id="{5D1D3914-CB75-42BA-9B17-B5918A647D6E}"/>
+                <a16:creationId xmlns:a16="http://schemas.microsoft.com/office/drawing/2014/main" id="{F1EE66E7-3D6E-45EE-8157-3DCC8342516A}"/>
               </a:ext>
             </a:extLst>
           </p:cNvPr>
@@ -20942,7 +21453,7 @@
           <p:cNvPr id="14" name="表格 13">
             <a:extLst>
               <a:ext uri="{FF2B5EF4-FFF2-40B4-BE49-F238E27FC236}">
-                <a16:creationId xmlns:a16="http://schemas.microsoft.com/office/drawing/2014/main" id="{63C32748-5292-4AC9-BE7B-E6BC85CBB783}"/>
+                <a16:creationId xmlns:a16="http://schemas.microsoft.com/office/drawing/2014/main" id="{E1A120CA-B9EA-4022-A467-87320E06A820}"/>
               </a:ext>
             </a:extLst>
           </p:cNvPr>
@@ -21392,7 +21903,7 @@
                           <a:ea typeface="Microsoft YaHei"/>
                           <a:cs typeface="Microsoft YaHei"/>
                         </a:rPr>
-                        <a:t>V2</a:t>
+                        <a:t>V3</a:t>
                       </a:r>
                     </a:p>
                   </a:txBody>
@@ -21833,7 +22344,7 @@
                           <a:ea typeface="Microsoft YaHei"/>
                           <a:cs typeface="Microsoft YaHei"/>
                         </a:rPr>
-                        <a:t>34,365.77</a:t>
+                        <a:t>34,422.93</a:t>
                       </a:r>
                     </a:p>
                   </a:txBody>
@@ -22277,7 +22788,7 @@
                           <a:ea typeface="Microsoft YaHei"/>
                           <a:cs typeface="Microsoft YaHei"/>
                         </a:rPr>
-                        <a:t>29,995.90</a:t>
+                        <a:t>29,702.90</a:t>
                       </a:r>
                     </a:p>
                   </a:txBody>
@@ -22721,7 +23232,7 @@
                           <a:ea typeface="Microsoft YaHei"/>
                           <a:cs typeface="Microsoft YaHei"/>
                         </a:rPr>
-                        <a:t>28,342.80</a:t>
+                        <a:t>28,222.87</a:t>
                       </a:r>
                     </a:p>
                   </a:txBody>
@@ -23165,7 +23676,7 @@
                           <a:ea typeface="Microsoft YaHei"/>
                           <a:cs typeface="Microsoft YaHei"/>
                         </a:rPr>
-                        <a:t>25,377.00</a:t>
+                        <a:t>23,324.00</a:t>
                       </a:r>
                     </a:p>
                   </a:txBody>
@@ -23609,7 +24120,7 @@
                           <a:ea typeface="Microsoft YaHei"/>
                           <a:cs typeface="Microsoft YaHei"/>
                         </a:rPr>
-                        <a:t>18,584.00</a:t>
+                        <a:t>17,452.00</a:t>
                       </a:r>
                     </a:p>
                   </a:txBody>
@@ -23661,10 +24172,10 @@
       </p:graphicFrame>
       <p:sp>
         <p:nvSpPr>
-          <p:cNvPr id="15" name="Random / V2：种子 0～29 的平均值；其余为精确整数。">
+          <p:cNvPr id="15" name="Random / V3：种子 0～29 的平均值；其余为精确整数。">
             <a:extLst>
               <a:ext uri="{FF2B5EF4-FFF2-40B4-BE49-F238E27FC236}">
-                <a16:creationId xmlns:a16="http://schemas.microsoft.com/office/drawing/2014/main" id="{32A6587B-59AC-4B79-AE32-FB61093DCDA8}"/>
+                <a16:creationId xmlns:a16="http://schemas.microsoft.com/office/drawing/2014/main" id="{16F03842-A6F6-4B47-BFCA-C1F7F7A46D9B}"/>
               </a:ext>
             </a:extLst>
           </p:cNvPr>
@@ -23810,7 +24321,7 @@
                 <a:ea typeface="Microsoft YaHei"/>
                 <a:cs typeface="Microsoft YaHei"/>
               </a:rPr>
-              <a:t>Random / V2：种子 0～29 的平均值；其余为精确整数。</a:t>
+              <a:t>Random / V3：种子 0～29 的平均值；其余为精确整数。</a:t>
             </a:r>
           </a:p>
         </p:txBody>
@@ -23820,7 +24331,7 @@
           <p:cNvPr id="16" name="原始逐次整数、标准差、最小值、最大值以及 seed=0 整数表均已保存">
             <a:extLst>
               <a:ext uri="{FF2B5EF4-FFF2-40B4-BE49-F238E27FC236}">
-                <a16:creationId xmlns:a16="http://schemas.microsoft.com/office/drawing/2014/main" id="{425548C7-FF10-4713-B494-19F9A4A4C703}"/>
+                <a16:creationId xmlns:a16="http://schemas.microsoft.com/office/drawing/2014/main" id="{6BC984AF-AE19-4553-882C-24F06EFE3645}"/>
               </a:ext>
             </a:extLst>
           </p:cNvPr>
@@ -24568,7 +25079,7 @@
           <p:cNvPr id="14" name="表格 13">
             <a:extLst>
               <a:ext uri="{FF2B5EF4-FFF2-40B4-BE49-F238E27FC236}">
-                <a16:creationId xmlns:a16="http://schemas.microsoft.com/office/drawing/2014/main" id="{A91103C5-B157-4E03-B441-F6CECABF3667}"/>
+                <a16:creationId xmlns:a16="http://schemas.microsoft.com/office/drawing/2014/main" id="{FCB0842E-D7EB-4FBB-BAC6-6F2BA7B85F1A}"/>
               </a:ext>
             </a:extLst>
           </p:cNvPr>
@@ -25018,7 +25529,7 @@
                           <a:ea typeface="Microsoft YaHei"/>
                           <a:cs typeface="Microsoft YaHei"/>
                         </a:rPr>
-                        <a:t>V2</a:t>
+                        <a:t>V3</a:t>
                       </a:r>
                     </a:p>
                   </a:txBody>
@@ -25903,7 +26414,7 @@
                           <a:ea typeface="Microsoft YaHei"/>
                           <a:cs typeface="Microsoft YaHei"/>
                         </a:rPr>
-                        <a:t>6,237.77</a:t>
+                        <a:t>6,234.77</a:t>
                       </a:r>
                     </a:p>
                   </a:txBody>
@@ -26347,7 +26858,7 @@
                           <a:ea typeface="Microsoft YaHei"/>
                           <a:cs typeface="Microsoft YaHei"/>
                         </a:rPr>
-                        <a:t>3,707.67</a:t>
+                        <a:t>3,679.40</a:t>
                       </a:r>
                     </a:p>
                   </a:txBody>
@@ -27235,7 +27746,7 @@
                           <a:ea typeface="Microsoft YaHei"/>
                           <a:cs typeface="Microsoft YaHei"/>
                         </a:rPr>
-                        <a:t>2,964.00</a:t>
+                        <a:t>2,714.17</a:t>
                       </a:r>
                     </a:p>
                   </a:txBody>
@@ -27287,10 +27798,10 @@
       </p:graphicFrame>
       <p:sp>
         <p:nvSpPr>
-          <p:cNvPr id="15" name="Random / V2：种子 0～29 的平均值；其余为精确整数。">
+          <p:cNvPr id="15" name="Random / V3：种子 0～29 的平均值；其余为精确整数。">
             <a:extLst>
               <a:ext uri="{FF2B5EF4-FFF2-40B4-BE49-F238E27FC236}">
-                <a16:creationId xmlns:a16="http://schemas.microsoft.com/office/drawing/2014/main" id="{F9B725ED-6C3F-48FA-90EE-15378A1EE3E6}"/>
+                <a16:creationId xmlns:a16="http://schemas.microsoft.com/office/drawing/2014/main" id="{189C31F3-C019-4539-93A9-E03C82354C15}"/>
               </a:ext>
             </a:extLst>
           </p:cNvPr>
@@ -27436,7 +27947,7 @@
                 <a:ea typeface="Microsoft YaHei"/>
                 <a:cs typeface="Microsoft YaHei"/>
               </a:rPr>
-              <a:t>Random / V2：种子 0～29 的平均值；其余为精确整数。</a:t>
+              <a:t>Random / V3：种子 0～29 的平均值；其余为精确整数。</a:t>
             </a:r>
           </a:p>
         </p:txBody>
@@ -27446,7 +27957,7 @@
           <p:cNvPr id="16" name="原始逐次整数、标准差、最小值、最大值以及 seed=0 整数表均已保存">
             <a:extLst>
               <a:ext uri="{FF2B5EF4-FFF2-40B4-BE49-F238E27FC236}">
-                <a16:creationId xmlns:a16="http://schemas.microsoft.com/office/drawing/2014/main" id="{7829603A-21D9-4385-A67F-807D8DA5E968}"/>
+                <a16:creationId xmlns:a16="http://schemas.microsoft.com/office/drawing/2014/main" id="{DAFBB75C-2D23-422A-8F0C-DD7A357B500A}"/>
               </a:ext>
             </a:extLst>
           </p:cNvPr>
@@ -28194,7 +28705,7 @@
           <p:cNvPr id="14" name="表格 13">
             <a:extLst>
               <a:ext uri="{FF2B5EF4-FFF2-40B4-BE49-F238E27FC236}">
-                <a16:creationId xmlns:a16="http://schemas.microsoft.com/office/drawing/2014/main" id="{D29A1B82-1496-4020-8098-1115232E3F01}"/>
+                <a16:creationId xmlns:a16="http://schemas.microsoft.com/office/drawing/2014/main" id="{81F4AA82-9410-443A-8D32-2D4EDE6D9FC6}"/>
               </a:ext>
             </a:extLst>
           </p:cNvPr>
@@ -28644,7 +29155,7 @@
                           <a:ea typeface="Microsoft YaHei"/>
                           <a:cs typeface="Microsoft YaHei"/>
                         </a:rPr>
-                        <a:t>V2</a:t>
+                        <a:t>V3</a:t>
                       </a:r>
                     </a:p>
                   </a:txBody>
@@ -29529,7 +30040,7 @@
                           <a:ea typeface="Microsoft YaHei"/>
                           <a:cs typeface="Microsoft YaHei"/>
                         </a:rPr>
-                        <a:t>49,259.47</a:t>
+                        <a:t>49,263.47</a:t>
                       </a:r>
                     </a:p>
                   </a:txBody>
@@ -29973,7 +30484,7 @@
                           <a:ea typeface="Microsoft YaHei"/>
                           <a:cs typeface="Microsoft YaHei"/>
                         </a:rPr>
-                        <a:t>39,837.93</a:t>
+                        <a:t>39,025.93</a:t>
                       </a:r>
                     </a:p>
                   </a:txBody>
@@ -30417,7 +30928,7 @@
                           <a:ea typeface="Microsoft YaHei"/>
                           <a:cs typeface="Microsoft YaHei"/>
                         </a:rPr>
-                        <a:t>21,633.00</a:t>
+                        <a:t>21,179.00</a:t>
                       </a:r>
                     </a:p>
                   </a:txBody>
@@ -30913,10 +31424,10 @@
       </p:graphicFrame>
       <p:sp>
         <p:nvSpPr>
-          <p:cNvPr id="15" name="Random / V2：种子 0～29 的平均值；其余为精确整数。">
+          <p:cNvPr id="15" name="Random / V3：种子 0～29 的平均值；其余为精确整数。">
             <a:extLst>
               <a:ext uri="{FF2B5EF4-FFF2-40B4-BE49-F238E27FC236}">
-                <a16:creationId xmlns:a16="http://schemas.microsoft.com/office/drawing/2014/main" id="{B3A05419-4024-4AA5-ABC6-36A59BFAB822}"/>
+                <a16:creationId xmlns:a16="http://schemas.microsoft.com/office/drawing/2014/main" id="{B1800D0C-3E58-4CEE-91CD-0CF83C2B5F0D}"/>
               </a:ext>
             </a:extLst>
           </p:cNvPr>
@@ -31062,7 +31573,7 @@
                 <a:ea typeface="Microsoft YaHei"/>
                 <a:cs typeface="Microsoft YaHei"/>
               </a:rPr>
-              <a:t>Random / V2：种子 0～29 的平均值；其余为精确整数。</a:t>
+              <a:t>Random / V3：种子 0～29 的平均值；其余为精确整数。</a:t>
             </a:r>
           </a:p>
         </p:txBody>
@@ -31072,7 +31583,7 @@
           <p:cNvPr id="16" name="原始逐次整数、标准差、最小值、最大值以及 seed=0 整数表均已保存">
             <a:extLst>
               <a:ext uri="{FF2B5EF4-FFF2-40B4-BE49-F238E27FC236}">
-                <a16:creationId xmlns:a16="http://schemas.microsoft.com/office/drawing/2014/main" id="{1AF393EE-A8C1-4033-970F-8FE46D0C320E}"/>
+                <a16:creationId xmlns:a16="http://schemas.microsoft.com/office/drawing/2014/main" id="{95D539CE-628D-4A46-A3C1-CDBE1574B186}"/>
               </a:ext>
             </a:extLst>
           </p:cNvPr>
@@ -31820,7 +32331,7 @@
           <p:cNvPr id="14" name="Demand paging：访问时才装入页面">
             <a:extLst>
               <a:ext uri="{FF2B5EF4-FFF2-40B4-BE49-F238E27FC236}">
-                <a16:creationId xmlns:a16="http://schemas.microsoft.com/office/drawing/2014/main" id="{1229D56A-C82D-4374-A0EC-332A57CA81E0}"/>
+                <a16:creationId xmlns:a16="http://schemas.microsoft.com/office/drawing/2014/main" id="{B04F8123-F387-49A4-BA06-DE40A21EB041}"/>
               </a:ext>
             </a:extLst>
           </p:cNvPr>
@@ -31976,7 +32487,7 @@
           <p:cNvPr id="15" name="命中：继续使用驻留页。&#10;缺页：使用空页框，或淘汰一个页后装入当前页。">
             <a:extLst>
               <a:ext uri="{FF2B5EF4-FFF2-40B4-BE49-F238E27FC236}">
-                <a16:creationId xmlns:a16="http://schemas.microsoft.com/office/drawing/2014/main" id="{4CFDD5D8-DD2E-4309-B86F-18321B370134}"/>
+                <a16:creationId xmlns:a16="http://schemas.microsoft.com/office/drawing/2014/main" id="{16BD3F9A-FB72-4516-9FFB-C44A574A37E4}"/>
               </a:ext>
             </a:extLst>
           </p:cNvPr>
@@ -32155,7 +32666,7 @@
           <p:cNvPr id="16" name="表格 15">
             <a:extLst>
               <a:ext uri="{FF2B5EF4-FFF2-40B4-BE49-F238E27FC236}">
-                <a16:creationId xmlns:a16="http://schemas.microsoft.com/office/drawing/2014/main" id="{42FF13C2-0096-4A8E-93E8-E7A3AA782BC4}"/>
+                <a16:creationId xmlns:a16="http://schemas.microsoft.com/office/drawing/2014/main" id="{1BB384E0-447E-4399-8946-ED3A9CA034EA}"/>
               </a:ext>
             </a:extLst>
           </p:cNvPr>
@@ -32531,7 +33042,7 @@
           <p:cNvPr id="17" name="统一虚拟地址空间，空内存启动，不预取。自设算法只使用已发生的访问。">
             <a:extLst>
               <a:ext uri="{FF2B5EF4-FFF2-40B4-BE49-F238E27FC236}">
-                <a16:creationId xmlns:a16="http://schemas.microsoft.com/office/drawing/2014/main" id="{4E3E57F9-5675-4C50-B495-4F74BF274025}"/>
+                <a16:creationId xmlns:a16="http://schemas.microsoft.com/office/drawing/2014/main" id="{15B71E4C-BF8C-46E3-A358-D32F8CB76351}"/>
               </a:ext>
             </a:extLst>
           </p:cNvPr>
@@ -33279,7 +33790,7 @@
           <p:cNvPr id="14" name="表格 13">
             <a:extLst>
               <a:ext uri="{FF2B5EF4-FFF2-40B4-BE49-F238E27FC236}">
-                <a16:creationId xmlns:a16="http://schemas.microsoft.com/office/drawing/2014/main" id="{F5AFB5B8-B135-4802-AA5F-877E8AE60837}"/>
+                <a16:creationId xmlns:a16="http://schemas.microsoft.com/office/drawing/2014/main" id="{C991E78D-C9BE-4007-8935-3F478DF6E06A}"/>
               </a:ext>
             </a:extLst>
           </p:cNvPr>
@@ -33836,7 +34347,7 @@
                           <a:ea typeface="Microsoft YaHei"/>
                           <a:cs typeface="Microsoft YaHei"/>
                         </a:rPr>
-                        <a:t>330.68</a:t>
+                        <a:t>331.99</a:t>
                       </a:r>
                     </a:p>
                   </a:txBody>
@@ -33891,7 +34402,7 @@
                           <a:ea typeface="Microsoft YaHei"/>
                           <a:cs typeface="Microsoft YaHei"/>
                         </a:rPr>
-                        <a:t>27,468.23</a:t>
+                        <a:t>27,215.35</a:t>
                       </a:r>
                     </a:p>
                   </a:txBody>
@@ -33946,7 +34457,7 @@
                           <a:ea typeface="Microsoft YaHei"/>
                           <a:cs typeface="Microsoft YaHei"/>
                         </a:rPr>
-                        <a:t>4,757.05</a:t>
+                        <a:t>4,656.49</a:t>
                       </a:r>
                     </a:p>
                   </a:txBody>
@@ -34001,7 +34512,7 @@
                           <a:ea typeface="Microsoft YaHei"/>
                           <a:cs typeface="Microsoft YaHei"/>
                         </a:rPr>
-                        <a:t>37,063.37</a:t>
+                        <a:t>36,811.01</a:t>
                       </a:r>
                     </a:p>
                   </a:txBody>
@@ -34056,7 +34567,7 @@
                           <a:ea typeface="Microsoft YaHei"/>
                           <a:cs typeface="Microsoft YaHei"/>
                         </a:rPr>
-                        <a:t>17,404.84</a:t>
+                        <a:t>17,253.71</a:t>
                       </a:r>
                     </a:p>
                   </a:txBody>
@@ -34225,7 +34736,7 @@
                           <a:ea typeface="Microsoft YaHei"/>
                           <a:cs typeface="Microsoft YaHei"/>
                         </a:rPr>
-                        <a:t>331.34</a:t>
+                        <a:t>332.75</a:t>
                       </a:r>
                     </a:p>
                   </a:txBody>
@@ -34280,7 +34791,7 @@
                           <a:ea typeface="Microsoft YaHei"/>
                           <a:cs typeface="Microsoft YaHei"/>
                         </a:rPr>
-                        <a:t>27,333.09</a:t>
+                        <a:t>26,624.94</a:t>
                       </a:r>
                     </a:p>
                   </a:txBody>
@@ -34335,7 +34846,7 @@
                           <a:ea typeface="Microsoft YaHei"/>
                           <a:cs typeface="Microsoft YaHei"/>
                         </a:rPr>
-                        <a:t>4,685.24</a:t>
+                        <a:t>4,629.02</a:t>
                       </a:r>
                     </a:p>
                   </a:txBody>
@@ -34390,7 +34901,7 @@
                           <a:ea typeface="Microsoft YaHei"/>
                           <a:cs typeface="Microsoft YaHei"/>
                         </a:rPr>
-                        <a:t>37,068.86</a:t>
+                        <a:t>36,816.46</a:t>
                       </a:r>
                     </a:p>
                   </a:txBody>
@@ -34445,7 +34956,7 @@
                           <a:ea typeface="Microsoft YaHei"/>
                           <a:cs typeface="Microsoft YaHei"/>
                         </a:rPr>
-                        <a:t>17,354.63</a:t>
+                        <a:t>17,100.79</a:t>
                       </a:r>
                     </a:p>
                   </a:txBody>
@@ -34614,7 +35125,7 @@
                           <a:ea typeface="Microsoft YaHei"/>
                           <a:cs typeface="Microsoft YaHei"/>
                         </a:rPr>
-                        <a:t>332.81</a:t>
+                        <a:t>334.27</a:t>
                       </a:r>
                     </a:p>
                   </a:txBody>
@@ -34669,7 +35180,7 @@
                           <a:ea typeface="Microsoft YaHei"/>
                           <a:cs typeface="Microsoft YaHei"/>
                         </a:rPr>
-                        <a:t>27,420.85</a:t>
+                        <a:t>26,650.15</a:t>
                       </a:r>
                     </a:p>
                   </a:txBody>
@@ -34724,7 +35235,7 @@
                           <a:ea typeface="Microsoft YaHei"/>
                           <a:cs typeface="Microsoft YaHei"/>
                         </a:rPr>
-                        <a:t>4,691.05</a:t>
+                        <a:t>4,624.05</a:t>
                       </a:r>
                     </a:p>
                   </a:txBody>
@@ -34779,7 +35290,7 @@
                           <a:ea typeface="Microsoft YaHei"/>
                           <a:cs typeface="Microsoft YaHei"/>
                         </a:rPr>
-                        <a:t>37,074.92</a:t>
+                        <a:t>36,822.52</a:t>
                       </a:r>
                     </a:p>
                   </a:txBody>
@@ -34834,7 +35345,7 @@
                           <a:ea typeface="Microsoft YaHei"/>
                           <a:cs typeface="Microsoft YaHei"/>
                         </a:rPr>
-                        <a:t>17,379.91</a:t>
+                        <a:t>17,107.75</a:t>
                       </a:r>
                     </a:p>
                   </a:txBody>
@@ -35003,7 +35514,7 @@
                           <a:ea typeface="Microsoft YaHei"/>
                           <a:cs typeface="Microsoft YaHei"/>
                         </a:rPr>
-                        <a:t>331.34</a:t>
+                        <a:t>332.75</a:t>
                       </a:r>
                     </a:p>
                   </a:txBody>
@@ -35058,7 +35569,7 @@
                           <a:ea typeface="Microsoft YaHei"/>
                           <a:cs typeface="Microsoft YaHei"/>
                         </a:rPr>
-                        <a:t>26,965.03</a:t>
+                        <a:t>27,036.49</a:t>
                       </a:r>
                     </a:p>
                   </a:txBody>
@@ -35113,7 +35624,7 @@
                           <a:ea typeface="Microsoft YaHei"/>
                           <a:cs typeface="Microsoft YaHei"/>
                         </a:rPr>
-                        <a:t>4,715.97</a:t>
+                        <a:t>4,666.00</a:t>
                       </a:r>
                     </a:p>
                   </a:txBody>
@@ -35168,7 +35679,7 @@
                           <a:ea typeface="Microsoft YaHei"/>
                           <a:cs typeface="Microsoft YaHei"/>
                         </a:rPr>
-                        <a:t>36,978.46</a:t>
+                        <a:t>36,816.86</a:t>
                       </a:r>
                     </a:p>
                   </a:txBody>
@@ -35223,7 +35734,7 @@
                           <a:ea typeface="Microsoft YaHei"/>
                           <a:cs typeface="Microsoft YaHei"/>
                         </a:rPr>
-                        <a:t>17,247.70</a:t>
+                        <a:t>17,213.03</a:t>
                       </a:r>
                     </a:p>
                   </a:txBody>
@@ -35392,7 +35903,7 @@
                           <a:ea typeface="Microsoft YaHei"/>
                           <a:cs typeface="Microsoft YaHei"/>
                         </a:rPr>
-                        <a:t>331.34</a:t>
+                        <a:t>332.75</a:t>
                       </a:r>
                     </a:p>
                   </a:txBody>
@@ -35447,7 +35958,7 @@
                           <a:ea typeface="Microsoft YaHei"/>
                           <a:cs typeface="Microsoft YaHei"/>
                         </a:rPr>
-                        <a:t>27,985.34</a:t>
+                        <a:t>27,083.63</a:t>
                       </a:r>
                     </a:p>
                   </a:txBody>
@@ -35502,7 +36013,7 @@
                           <a:ea typeface="Microsoft YaHei"/>
                           <a:cs typeface="Microsoft YaHei"/>
                         </a:rPr>
-                        <a:t>4,945.36</a:t>
+                        <a:t>4,708.77</a:t>
                       </a:r>
                     </a:p>
                   </a:txBody>
@@ -35557,7 +36068,7 @@
                           <a:ea typeface="Microsoft YaHei"/>
                           <a:cs typeface="Microsoft YaHei"/>
                         </a:rPr>
-                        <a:t>38,390.53</a:t>
+                        <a:t>36,825.46</a:t>
                       </a:r>
                     </a:p>
                   </a:txBody>
@@ -35612,7 +36123,7 @@
                           <a:ea typeface="Microsoft YaHei"/>
                           <a:cs typeface="Microsoft YaHei"/>
                         </a:rPr>
-                        <a:t>17,913.14</a:t>
+                        <a:t>17,237.65</a:t>
                       </a:r>
                     </a:p>
                   </a:txBody>
@@ -35664,10 +36175,10 @@
       </p:graphicFrame>
       <p:sp>
         <p:nvSpPr>
-          <p:cNvPr id="15" name="默认因子为 4 / 16。V2 在 F &gt; 20 时对窗口额外乘 2。">
+          <p:cNvPr id="15" name="默认因子 4 / 16；F &gt; 20 时窗口乘 2，历史因子减半。">
             <a:extLst>
               <a:ext uri="{FF2B5EF4-FFF2-40B4-BE49-F238E27FC236}">
-                <a16:creationId xmlns:a16="http://schemas.microsoft.com/office/drawing/2014/main" id="{D3FE2D9A-DADF-4CA1-AD5F-2A191BF24491}"/>
+                <a16:creationId xmlns:a16="http://schemas.microsoft.com/office/drawing/2014/main" id="{14047F21-406E-4D03-9D9D-740C24F667F7}"/>
               </a:ext>
             </a:extLst>
           </p:cNvPr>
@@ -35813,7 +36324,7 @@
                 <a:ea typeface="Microsoft YaHei"/>
                 <a:cs typeface="Microsoft YaHei"/>
               </a:rPr>
-              <a:t>默认因子为 4 / 16。V2 在 F &gt; 20 时对窗口额外乘 2。</a:t>
+              <a:t>默认因子 4 / 16；F &gt; 20 时窗口乘 2，历史因子减半。</a:t>
             </a:r>
           </a:p>
         </p:txBody>
@@ -35823,7 +36334,7 @@
           <p:cNvPr id="16" name="已知课程轨迹参与选择参数；本表是敏感性分析，不能证明对新轨迹最优。">
             <a:extLst>
               <a:ext uri="{FF2B5EF4-FFF2-40B4-BE49-F238E27FC236}">
-                <a16:creationId xmlns:a16="http://schemas.microsoft.com/office/drawing/2014/main" id="{DDB61465-CE89-4C82-8789-326A5D557E1B}"/>
+                <a16:creationId xmlns:a16="http://schemas.microsoft.com/office/drawing/2014/main" id="{091A239F-1CDD-467D-97A6-ED68CB0E6C70}"/>
               </a:ext>
             </a:extLst>
           </p:cNvPr>
@@ -36571,7 +37082,7 @@
           <p:cNvPr id="14" name="公开仓库">
             <a:extLst>
               <a:ext uri="{FF2B5EF4-FFF2-40B4-BE49-F238E27FC236}">
-                <a16:creationId xmlns:a16="http://schemas.microsoft.com/office/drawing/2014/main" id="{8F1576B8-4AFB-412E-886B-1210151F4E75}"/>
+                <a16:creationId xmlns:a16="http://schemas.microsoft.com/office/drawing/2014/main" id="{EFB353C0-4A0F-42A5-A1F4-694EB58CB9EB}"/>
               </a:ext>
             </a:extLst>
           </p:cNvPr>
@@ -36727,7 +37238,7 @@
           <p:cNvPr id="15" name="github.com/CHiSwsz/os-page-replacem">
             <a:extLst>
               <a:ext uri="{FF2B5EF4-FFF2-40B4-BE49-F238E27FC236}">
-                <a16:creationId xmlns:a16="http://schemas.microsoft.com/office/drawing/2014/main" id="{EE04638F-D969-4B8F-AE0C-69488EE7F80E}"/>
+                <a16:creationId xmlns:a16="http://schemas.microsoft.com/office/drawing/2014/main" id="{3B5B3F86-7017-4CCE-B36D-8FF1AD674D1B}"/>
               </a:ext>
             </a:extLst>
           </p:cNvPr>
@@ -36883,7 +37394,7 @@
           <p:cNvPr id="16" name="新轨迹测试">
             <a:extLst>
               <a:ext uri="{FF2B5EF4-FFF2-40B4-BE49-F238E27FC236}">
-                <a16:creationId xmlns:a16="http://schemas.microsoft.com/office/drawing/2014/main" id="{039FB720-0FD1-4B81-9827-DF795AA30835}"/>
+                <a16:creationId xmlns:a16="http://schemas.microsoft.com/office/drawing/2014/main" id="{F68A7C3F-53BD-4243-8096-AC9C0BE9C198}"/>
               </a:ext>
             </a:extLst>
           </p:cNvPr>
@@ -37039,7 +37550,7 @@
           <p:cNvPr id="17" name="./build/pager --trace new.txt --alg">
             <a:extLst>
               <a:ext uri="{FF2B5EF4-FFF2-40B4-BE49-F238E27FC236}">
-                <a16:creationId xmlns:a16="http://schemas.microsoft.com/office/drawing/2014/main" id="{79871911-4532-45F1-92B3-202B9720769C}"/>
+                <a16:creationId xmlns:a16="http://schemas.microsoft.com/office/drawing/2014/main" id="{547CF01D-5D03-4DCC-8BF1-FAC970F4EBCF}"/>
               </a:ext>
             </a:extLst>
           </p:cNvPr>
@@ -37218,7 +37729,7 @@
           <p:cNvPr id="18" name="旧版对照：--algorithm adaptive --adaptiv">
             <a:extLst>
               <a:ext uri="{FF2B5EF4-FFF2-40B4-BE49-F238E27FC236}">
-                <a16:creationId xmlns:a16="http://schemas.microsoft.com/office/drawing/2014/main" id="{CAFF68E6-D8B1-4BFB-B281-74AD54050E6C}"/>
+                <a16:creationId xmlns:a16="http://schemas.microsoft.com/office/drawing/2014/main" id="{14E2C4EF-60A8-4CD5-A46C-91B5CDF5333A}"/>
               </a:ext>
             </a:extLst>
           </p:cNvPr>
@@ -37364,7 +37875,7 @@
                 <a:ea typeface="Microsoft YaHei"/>
                 <a:cs typeface="Microsoft YaHei"/>
               </a:rPr>
-              <a:t>旧版对照：--algorithm adaptive --adaptive-version 1</a:t>
+              <a:t>旧版对照：--algorithm adaptive --adaptive-version 2</a:t>
             </a:r>
           </a:p>
           <a:p>
@@ -38012,7 +38523,7 @@
           <p:cNvPr id="14" name="表格 13">
             <a:extLst>
               <a:ext uri="{FF2B5EF4-FFF2-40B4-BE49-F238E27FC236}">
-                <a16:creationId xmlns:a16="http://schemas.microsoft.com/office/drawing/2014/main" id="{4667EFC8-68D3-4FA0-9633-0661109997C1}"/>
+                <a16:creationId xmlns:a16="http://schemas.microsoft.com/office/drawing/2014/main" id="{F76E57F7-F067-45D0-959A-BBEC6CE8590A}"/>
               </a:ext>
             </a:extLst>
           </p:cNvPr>
@@ -39174,7 +39685,7 @@
           <p:cNvPr id="15" name="共同点：重复访问的最小重用距离为 20。">
             <a:extLst>
               <a:ext uri="{FF2B5EF4-FFF2-40B4-BE49-F238E27FC236}">
-                <a16:creationId xmlns:a16="http://schemas.microsoft.com/office/drawing/2014/main" id="{783DAAB5-C082-4D57-B717-ABF828A56851}"/>
+                <a16:creationId xmlns:a16="http://schemas.microsoft.com/office/drawing/2014/main" id="{CC1BBB67-6746-427F-8F35-C48D41E6BE6D}"/>
               </a:ext>
             </a:extLst>
           </p:cNvPr>
@@ -39330,7 +39841,7 @@
           <p:cNvPr id="16" name="重用距离 = 同一页两次访问之间出现的不同页数。">
             <a:extLst>
               <a:ext uri="{FF2B5EF4-FFF2-40B4-BE49-F238E27FC236}">
-                <a16:creationId xmlns:a16="http://schemas.microsoft.com/office/drawing/2014/main" id="{7614A2D0-C0DE-4644-83A7-A832667DAFE9}"/>
+                <a16:creationId xmlns:a16="http://schemas.microsoft.com/office/drawing/2014/main" id="{56B085C2-0401-4B63-AD8B-0B3E79F79E7A}"/>
               </a:ext>
             </a:extLst>
           </p:cNvPr>
@@ -40078,7 +40589,7 @@
           <p:cNvPr id="14" name="当重用距离 ≥ F，LRU 在再次访问前已经淘汰该页。">
             <a:extLst>
               <a:ext uri="{FF2B5EF4-FFF2-40B4-BE49-F238E27FC236}">
-                <a16:creationId xmlns:a16="http://schemas.microsoft.com/office/drawing/2014/main" id="{4651EFF5-7FDA-4585-9F86-A02DCEADB916}"/>
+                <a16:creationId xmlns:a16="http://schemas.microsoft.com/office/drawing/2014/main" id="{C2668BC8-E9C1-4E4D-872C-0E326FFDA279}"/>
               </a:ext>
             </a:extLst>
           </p:cNvPr>
@@ -40234,7 +40745,7 @@
           <p:cNvPr id="15" name="Chart">
             <a:extLst>
               <a:ext uri="{FF2B5EF4-FFF2-40B4-BE49-F238E27FC236}">
-                <a16:creationId xmlns:a16="http://schemas.microsoft.com/office/drawing/2014/main" id="{BD7D81C2-37B3-4FE6-9E67-D3C26D4335D0}"/>
+                <a16:creationId xmlns:a16="http://schemas.microsoft.com/office/drawing/2014/main" id="{20FB4EF5-F3B0-4012-9600-31DA569F1FF2}"/>
               </a:ext>
             </a:extLst>
           </p:cNvPr>
@@ -40256,7 +40767,7 @@
           <p:cNvPr id="16" name="例：20 页框时，四条轨迹的 LRU 缺页率均为 100%。">
             <a:extLst>
               <a:ext uri="{FF2B5EF4-FFF2-40B4-BE49-F238E27FC236}">
-                <a16:creationId xmlns:a16="http://schemas.microsoft.com/office/drawing/2014/main" id="{BDAC7304-7633-4A2C-9618-67057BF3C88F}"/>
+                <a16:creationId xmlns:a16="http://schemas.microsoft.com/office/drawing/2014/main" id="{ACFDCE61-BDBA-471A-8D9A-DAB8936074A8}"/>
               </a:ext>
             </a:extLst>
           </p:cNvPr>
@@ -41004,7 +41515,7 @@
           <p:cNvPr id="14" name="表格 13">
             <a:extLst>
               <a:ext uri="{FF2B5EF4-FFF2-40B4-BE49-F238E27FC236}">
-                <a16:creationId xmlns:a16="http://schemas.microsoft.com/office/drawing/2014/main" id="{E7ECAD01-A297-42DF-A60D-7529B8DE1301}"/>
+                <a16:creationId xmlns:a16="http://schemas.microsoft.com/office/drawing/2014/main" id="{E5EEF0CF-BAFF-4146-83DA-B1A249CD85F8}"/>
               </a:ext>
             </a:extLst>
           </p:cNvPr>
@@ -42225,7 +42736,7 @@
           <p:cNvPr id="15" name="LFU 重载后频次归 1，并列按 LRU；Clock 新装入与命中均置">
             <a:extLst>
               <a:ext uri="{FF2B5EF4-FFF2-40B4-BE49-F238E27FC236}">
-                <a16:creationId xmlns:a16="http://schemas.microsoft.com/office/drawing/2014/main" id="{8AE10EF4-115B-4231-A80C-916DCE83F03E}"/>
+                <a16:creationId xmlns:a16="http://schemas.microsoft.com/office/drawing/2014/main" id="{49487311-3C59-49C5-85DC-4A235BE3231D}"/>
               </a:ext>
             </a:extLst>
           </p:cNvPr>
@@ -42973,7 +43484,7 @@
           <p:cNvPr id="14" name="表格 13">
             <a:extLst>
               <a:ext uri="{FF2B5EF4-FFF2-40B4-BE49-F238E27FC236}">
-                <a16:creationId xmlns:a16="http://schemas.microsoft.com/office/drawing/2014/main" id="{FDA1EFCB-9D49-4CBA-B327-CA7EC2E8F1BF}"/>
+                <a16:creationId xmlns:a16="http://schemas.microsoft.com/office/drawing/2014/main" id="{7066C9A5-FB03-407A-B672-9358F9B96845}"/>
               </a:ext>
             </a:extLst>
           </p:cNvPr>
@@ -43463,7 +43974,7 @@
           <p:cNvPr id="15" name="三个影子模拟器记录页号和缺页数，真实缓存只执行当前选中的策略。">
             <a:extLst>
               <a:ext uri="{FF2B5EF4-FFF2-40B4-BE49-F238E27FC236}">
-                <a16:creationId xmlns:a16="http://schemas.microsoft.com/office/drawing/2014/main" id="{28B65201-2938-4D60-8162-3EC38C1B3910}"/>
+                <a16:creationId xmlns:a16="http://schemas.microsoft.com/office/drawing/2014/main" id="{DF29BC50-C48F-464D-A70A-E9F75E492F2D}"/>
               </a:ext>
             </a:extLst>
           </p:cNvPr>
@@ -43619,7 +44130,7 @@
           <p:cNvPr id="16" name="F ≤ 20 从 Random 起步；F &gt; 20 从 LRU 起步，">
             <a:extLst>
               <a:ext uri="{FF2B5EF4-FFF2-40B4-BE49-F238E27FC236}">
-                <a16:creationId xmlns:a16="http://schemas.microsoft.com/office/drawing/2014/main" id="{BBD6B1E6-8F84-4D94-969C-533B01B9A027}"/>
+                <a16:creationId xmlns:a16="http://schemas.microsoft.com/office/drawing/2014/main" id="{265750EC-C283-426E-ACBD-2F0F4AF4980C}"/>
               </a:ext>
             </a:extLst>
           </p:cNvPr>
@@ -43999,7 +44510,7 @@
                 <a:ea typeface="Microsoft YaHei"/>
                 <a:cs typeface="Microsoft YaHei"/>
               </a:rPr>
-              <a:t>历史间隔预测：估计下一次复用</a:t>
+              <a:t>V3 历史间隔预测：更快适应变化</a:t>
             </a:r>
             <a:endParaRPr sz="2775"/>
           </a:p>
@@ -44364,10 +44875,10 @@
       </p:sp>
       <p:sp>
         <p:nvSpPr>
-          <p:cNvPr id="14" name="每页保留：上次访问位置、平滑间隔 g、间隔波动 v。">
+          <p:cNvPr id="14" name="每页保留上次访问位置与平滑间隔 g。Δ 是两次访问的间隔。">
             <a:extLst>
               <a:ext uri="{FF2B5EF4-FFF2-40B4-BE49-F238E27FC236}">
-                <a16:creationId xmlns:a16="http://schemas.microsoft.com/office/drawing/2014/main" id="{E89E0B6B-4870-45AF-B93C-A7FE73DE60BB}"/>
+                <a16:creationId xmlns:a16="http://schemas.microsoft.com/office/drawing/2014/main" id="{B47061C8-2C9F-4CDB-8057-8B6CE456ADBD}"/>
               </a:ext>
             </a:extLst>
           </p:cNvPr>
@@ -44379,7 +44890,7 @@
         <p:spPr>
           <a:xfrm>
             <a:off x="857250" y="1238250"/>
-            <a:ext cx="10477500" cy="476250"/>
+            <a:ext cx="10477500" cy="762000"/>
           </a:xfrm>
           <a:prstGeom prst="rect">
             <a:avLst/>
@@ -44513,17 +45024,17 @@
                 <a:ea typeface="Microsoft YaHei"/>
                 <a:cs typeface="Microsoft YaHei"/>
               </a:rPr>
-              <a:t>每页保留：上次访问位置、平滑间隔 g、间隔波动 v。</a:t>
+              <a:t>每页保留上次访问位置与平滑间隔 g。Δ 是两次访问的间隔。</a:t>
             </a:r>
           </a:p>
         </p:txBody>
       </p:sp>
       <p:sp>
         <p:nvSpPr>
-          <p:cNvPr id="15" name="Δ 表示本次与上次访问之间的间隔。">
+          <p:cNvPr id="15" name="g ← 0.5g + 0.5Δ">
             <a:extLst>
               <a:ext uri="{FF2B5EF4-FFF2-40B4-BE49-F238E27FC236}">
-                <a16:creationId xmlns:a16="http://schemas.microsoft.com/office/drawing/2014/main" id="{277D0547-CB91-4CB3-8866-58624C425691}"/>
+                <a16:creationId xmlns:a16="http://schemas.microsoft.com/office/drawing/2014/main" id="{19149945-DA86-4517-BC6E-D362EA8C7C11}"/>
               </a:ext>
             </a:extLst>
           </p:cNvPr>
@@ -44534,8 +45045,499 @@
         </p:nvSpPr>
         <p:spPr>
           <a:xfrm>
-            <a:off x="857250" y="1762125"/>
-            <a:ext cx="10477500" cy="333375"/>
+            <a:off x="1095375" y="2238375"/>
+            <a:ext cx="10001250" cy="714375"/>
+          </a:xfrm>
+          <a:prstGeom prst="rect">
+            <a:avLst/>
+          </a:prstGeom>
+          <a:noFill/>
+          <a:ln w="0">
+            <a:noFill/>
+          </a:ln>
+        </p:spPr>
+        <p:txBody>
+          <a:bodyPr lIns="0" tIns="0" rIns="0" bIns="0" anchor="t"/>
+          <a:lstStyle>
+            <a:defPPr>
+              <a:defRPr sz="3225" b="0">
+                <a:solidFill>
+                  <a:srgbClr val="6B4A82"/>
+                </a:solidFill>
+                <a:latin typeface="Consolas"/>
+                <a:ea typeface="Consolas"/>
+                <a:cs typeface="Consolas"/>
+              </a:defRPr>
+            </a:defPPr>
+            <a:lvl1pPr>
+              <a:defRPr sz="3225" b="0">
+                <a:solidFill>
+                  <a:srgbClr val="6B4A82"/>
+                </a:solidFill>
+                <a:latin typeface="Consolas"/>
+                <a:ea typeface="Consolas"/>
+                <a:cs typeface="Consolas"/>
+              </a:defRPr>
+            </a:lvl1pPr>
+            <a:lvl2pPr>
+              <a:defRPr sz="3225" b="0">
+                <a:solidFill>
+                  <a:srgbClr val="6B4A82"/>
+                </a:solidFill>
+                <a:latin typeface="Consolas"/>
+                <a:ea typeface="Consolas"/>
+                <a:cs typeface="Consolas"/>
+              </a:defRPr>
+            </a:lvl2pPr>
+            <a:lvl3pPr>
+              <a:defRPr sz="3225" b="0">
+                <a:solidFill>
+                  <a:srgbClr val="6B4A82"/>
+                </a:solidFill>
+                <a:latin typeface="Consolas"/>
+                <a:ea typeface="Consolas"/>
+                <a:cs typeface="Consolas"/>
+              </a:defRPr>
+            </a:lvl3pPr>
+            <a:lvl4pPr>
+              <a:defRPr sz="3225" b="0">
+                <a:solidFill>
+                  <a:srgbClr val="6B4A82"/>
+                </a:solidFill>
+                <a:latin typeface="Consolas"/>
+                <a:ea typeface="Consolas"/>
+                <a:cs typeface="Consolas"/>
+              </a:defRPr>
+            </a:lvl4pPr>
+            <a:lvl5pPr>
+              <a:defRPr sz="3225" b="0">
+                <a:solidFill>
+                  <a:srgbClr val="6B4A82"/>
+                </a:solidFill>
+                <a:latin typeface="Consolas"/>
+                <a:ea typeface="Consolas"/>
+                <a:cs typeface="Consolas"/>
+              </a:defRPr>
+            </a:lvl5pPr>
+            <a:lvl6pPr>
+              <a:defRPr sz="3225" b="0">
+                <a:solidFill>
+                  <a:srgbClr val="6B4A82"/>
+                </a:solidFill>
+                <a:latin typeface="Consolas"/>
+                <a:ea typeface="Consolas"/>
+                <a:cs typeface="Consolas"/>
+              </a:defRPr>
+            </a:lvl6pPr>
+            <a:lvl7pPr>
+              <a:defRPr sz="3225" b="0">
+                <a:solidFill>
+                  <a:srgbClr val="6B4A82"/>
+                </a:solidFill>
+                <a:latin typeface="Consolas"/>
+                <a:ea typeface="Consolas"/>
+                <a:cs typeface="Consolas"/>
+              </a:defRPr>
+            </a:lvl7pPr>
+            <a:lvl8pPr>
+              <a:defRPr sz="3225" b="0">
+                <a:solidFill>
+                  <a:srgbClr val="6B4A82"/>
+                </a:solidFill>
+                <a:latin typeface="Consolas"/>
+                <a:ea typeface="Consolas"/>
+                <a:cs typeface="Consolas"/>
+              </a:defRPr>
+            </a:lvl8pPr>
+            <a:lvl9pPr>
+              <a:defRPr sz="3225" b="0">
+                <a:solidFill>
+                  <a:srgbClr val="6B4A82"/>
+                </a:solidFill>
+                <a:latin typeface="Consolas"/>
+                <a:ea typeface="Consolas"/>
+                <a:cs typeface="Consolas"/>
+              </a:defRPr>
+            </a:lvl9pPr>
+          </a:lstStyle>
+          <a:p>
+            <a:pPr>
+              <a:defRPr sz="3225" b="0">
+                <a:solidFill>
+                  <a:srgbClr val="6B4A82"/>
+                </a:solidFill>
+                <a:latin typeface="Consolas"/>
+                <a:ea typeface="Consolas"/>
+                <a:cs typeface="Consolas"/>
+              </a:defRPr>
+            </a:pPr>
+            <a:r>
+              <a:rPr sz="3225" b="0">
+                <a:solidFill>
+                  <a:srgbClr val="6B4A82"/>
+                </a:solidFill>
+                <a:latin typeface="Consolas"/>
+                <a:ea typeface="Consolas"/>
+                <a:cs typeface="Consolas"/>
+              </a:rPr>
+              <a:t>g ← 0.5g + 0.5Δ</a:t>
+            </a:r>
+          </a:p>
+        </p:txBody>
+      </p:sp>
+      <p:sp>
+        <p:nvSpPr>
+          <p:cNvPr id="16" name="未到预计时刻：评分 = g − 已等待时间。&#10;已经逾期：评分 = 已等">
+            <a:extLst>
+              <a:ext uri="{FF2B5EF4-FFF2-40B4-BE49-F238E27FC236}">
+                <a16:creationId xmlns:a16="http://schemas.microsoft.com/office/drawing/2014/main" id="{513C5B49-BC89-492F-B96F-C51EA477D552}"/>
+              </a:ext>
+            </a:extLst>
+          </p:cNvPr>
+          <p:cNvSpPr>
+            <a:spLocks noGrp="1"/>
+          </p:cNvSpPr>
+          <p:nvPr/>
+        </p:nvSpPr>
+        <p:spPr>
+          <a:xfrm>
+            <a:off x="857250" y="3381375"/>
+            <a:ext cx="10477500" cy="1095375"/>
+          </a:xfrm>
+          <a:prstGeom prst="rect">
+            <a:avLst/>
+          </a:prstGeom>
+          <a:noFill/>
+          <a:ln w="0">
+            <a:noFill/>
+          </a:ln>
+        </p:spPr>
+        <p:txBody>
+          <a:bodyPr lIns="0" tIns="0" rIns="0" bIns="0" anchor="t"/>
+          <a:lstStyle>
+            <a:defPPr>
+              <a:defRPr sz="2250" b="0">
+                <a:solidFill>
+                  <a:srgbClr val="29203A"/>
+                </a:solidFill>
+                <a:latin typeface="Microsoft YaHei"/>
+                <a:ea typeface="Microsoft YaHei"/>
+                <a:cs typeface="Microsoft YaHei"/>
+              </a:defRPr>
+            </a:defPPr>
+            <a:lvl1pPr>
+              <a:defRPr sz="2250" b="0">
+                <a:solidFill>
+                  <a:srgbClr val="29203A"/>
+                </a:solidFill>
+                <a:latin typeface="Microsoft YaHei"/>
+                <a:ea typeface="Microsoft YaHei"/>
+                <a:cs typeface="Microsoft YaHei"/>
+              </a:defRPr>
+            </a:lvl1pPr>
+            <a:lvl2pPr>
+              <a:defRPr sz="2250" b="0">
+                <a:solidFill>
+                  <a:srgbClr val="29203A"/>
+                </a:solidFill>
+                <a:latin typeface="Microsoft YaHei"/>
+                <a:ea typeface="Microsoft YaHei"/>
+                <a:cs typeface="Microsoft YaHei"/>
+              </a:defRPr>
+            </a:lvl2pPr>
+            <a:lvl3pPr>
+              <a:defRPr sz="2250" b="0">
+                <a:solidFill>
+                  <a:srgbClr val="29203A"/>
+                </a:solidFill>
+                <a:latin typeface="Microsoft YaHei"/>
+                <a:ea typeface="Microsoft YaHei"/>
+                <a:cs typeface="Microsoft YaHei"/>
+              </a:defRPr>
+            </a:lvl3pPr>
+            <a:lvl4pPr>
+              <a:defRPr sz="2250" b="0">
+                <a:solidFill>
+                  <a:srgbClr val="29203A"/>
+                </a:solidFill>
+                <a:latin typeface="Microsoft YaHei"/>
+                <a:ea typeface="Microsoft YaHei"/>
+                <a:cs typeface="Microsoft YaHei"/>
+              </a:defRPr>
+            </a:lvl4pPr>
+            <a:lvl5pPr>
+              <a:defRPr sz="2250" b="0">
+                <a:solidFill>
+                  <a:srgbClr val="29203A"/>
+                </a:solidFill>
+                <a:latin typeface="Microsoft YaHei"/>
+                <a:ea typeface="Microsoft YaHei"/>
+                <a:cs typeface="Microsoft YaHei"/>
+              </a:defRPr>
+            </a:lvl5pPr>
+            <a:lvl6pPr>
+              <a:defRPr sz="2250" b="0">
+                <a:solidFill>
+                  <a:srgbClr val="29203A"/>
+                </a:solidFill>
+                <a:latin typeface="Microsoft YaHei"/>
+                <a:ea typeface="Microsoft YaHei"/>
+                <a:cs typeface="Microsoft YaHei"/>
+              </a:defRPr>
+            </a:lvl6pPr>
+            <a:lvl7pPr>
+              <a:defRPr sz="2250" b="0">
+                <a:solidFill>
+                  <a:srgbClr val="29203A"/>
+                </a:solidFill>
+                <a:latin typeface="Microsoft YaHei"/>
+                <a:ea typeface="Microsoft YaHei"/>
+                <a:cs typeface="Microsoft YaHei"/>
+              </a:defRPr>
+            </a:lvl7pPr>
+            <a:lvl8pPr>
+              <a:defRPr sz="2250" b="0">
+                <a:solidFill>
+                  <a:srgbClr val="29203A"/>
+                </a:solidFill>
+                <a:latin typeface="Microsoft YaHei"/>
+                <a:ea typeface="Microsoft YaHei"/>
+                <a:cs typeface="Microsoft YaHei"/>
+              </a:defRPr>
+            </a:lvl8pPr>
+            <a:lvl9pPr>
+              <a:defRPr sz="2250" b="0">
+                <a:solidFill>
+                  <a:srgbClr val="29203A"/>
+                </a:solidFill>
+                <a:latin typeface="Microsoft YaHei"/>
+                <a:ea typeface="Microsoft YaHei"/>
+                <a:cs typeface="Microsoft YaHei"/>
+              </a:defRPr>
+            </a:lvl9pPr>
+          </a:lstStyle>
+          <a:p>
+            <a:pPr>
+              <a:defRPr sz="2250" b="0">
+                <a:solidFill>
+                  <a:srgbClr val="29203A"/>
+                </a:solidFill>
+                <a:latin typeface="Microsoft YaHei"/>
+                <a:ea typeface="Microsoft YaHei"/>
+                <a:cs typeface="Microsoft YaHei"/>
+              </a:defRPr>
+            </a:pPr>
+            <a:r>
+              <a:rPr sz="2250" b="0">
+                <a:solidFill>
+                  <a:srgbClr val="29203A"/>
+                </a:solidFill>
+                <a:latin typeface="Microsoft YaHei"/>
+                <a:ea typeface="Microsoft YaHei"/>
+                <a:cs typeface="Microsoft YaHei"/>
+              </a:rPr>
+              <a:t>未到预计时刻：评分 = g − 已等待时间。</a:t>
+            </a:r>
+          </a:p>
+          <a:p>
+            <a:pPr>
+              <a:defRPr sz="2250" b="0">
+                <a:solidFill>
+                  <a:srgbClr val="29203A"/>
+                </a:solidFill>
+                <a:latin typeface="Microsoft YaHei"/>
+                <a:ea typeface="Microsoft YaHei"/>
+                <a:cs typeface="Microsoft YaHei"/>
+              </a:defRPr>
+            </a:pPr>
+            <a:r>
+              <a:rPr sz="2250" b="0">
+                <a:solidFill>
+                  <a:srgbClr val="29203A"/>
+                </a:solidFill>
+                <a:latin typeface="Microsoft YaHei"/>
+                <a:ea typeface="Microsoft YaHei"/>
+                <a:cs typeface="Microsoft YaHei"/>
+              </a:rPr>
+              <a:t>已经逾期：评分 = 已等待时间。淘汰评分最大者。</a:t>
+            </a:r>
+          </a:p>
+        </p:txBody>
+      </p:sp>
+      <p:sp>
+        <p:nvSpPr>
+          <p:cNvPr id="17" name="相较 V2：新样本权重从 0.25 提高到 0.5，移除间隔波动附加项">
+            <a:extLst>
+              <a:ext uri="{FF2B5EF4-FFF2-40B4-BE49-F238E27FC236}">
+                <a16:creationId xmlns:a16="http://schemas.microsoft.com/office/drawing/2014/main" id="{970CDC98-9A60-4999-83E3-F1BC9472C56F}"/>
+              </a:ext>
+            </a:extLst>
+          </p:cNvPr>
+          <p:cNvSpPr>
+            <a:spLocks noGrp="1"/>
+          </p:cNvSpPr>
+          <p:nvPr/>
+        </p:nvSpPr>
+        <p:spPr>
+          <a:xfrm>
+            <a:off x="857250" y="4857750"/>
+            <a:ext cx="10477500" cy="809625"/>
+          </a:xfrm>
+          <a:prstGeom prst="rect">
+            <a:avLst/>
+          </a:prstGeom>
+          <a:noFill/>
+          <a:ln w="0">
+            <a:noFill/>
+          </a:ln>
+        </p:spPr>
+        <p:txBody>
+          <a:bodyPr lIns="0" tIns="0" rIns="0" bIns="0" anchor="t"/>
+          <a:lstStyle>
+            <a:defPPr>
+              <a:defRPr sz="2175" b="0">
+                <a:solidFill>
+                  <a:srgbClr val="238A91"/>
+                </a:solidFill>
+                <a:latin typeface="Microsoft YaHei"/>
+                <a:ea typeface="Microsoft YaHei"/>
+                <a:cs typeface="Microsoft YaHei"/>
+              </a:defRPr>
+            </a:defPPr>
+            <a:lvl1pPr>
+              <a:defRPr sz="2175" b="0">
+                <a:solidFill>
+                  <a:srgbClr val="238A91"/>
+                </a:solidFill>
+                <a:latin typeface="Microsoft YaHei"/>
+                <a:ea typeface="Microsoft YaHei"/>
+                <a:cs typeface="Microsoft YaHei"/>
+              </a:defRPr>
+            </a:lvl1pPr>
+            <a:lvl2pPr>
+              <a:defRPr sz="2175" b="0">
+                <a:solidFill>
+                  <a:srgbClr val="238A91"/>
+                </a:solidFill>
+                <a:latin typeface="Microsoft YaHei"/>
+                <a:ea typeface="Microsoft YaHei"/>
+                <a:cs typeface="Microsoft YaHei"/>
+              </a:defRPr>
+            </a:lvl2pPr>
+            <a:lvl3pPr>
+              <a:defRPr sz="2175" b="0">
+                <a:solidFill>
+                  <a:srgbClr val="238A91"/>
+                </a:solidFill>
+                <a:latin typeface="Microsoft YaHei"/>
+                <a:ea typeface="Microsoft YaHei"/>
+                <a:cs typeface="Microsoft YaHei"/>
+              </a:defRPr>
+            </a:lvl3pPr>
+            <a:lvl4pPr>
+              <a:defRPr sz="2175" b="0">
+                <a:solidFill>
+                  <a:srgbClr val="238A91"/>
+                </a:solidFill>
+                <a:latin typeface="Microsoft YaHei"/>
+                <a:ea typeface="Microsoft YaHei"/>
+                <a:cs typeface="Microsoft YaHei"/>
+              </a:defRPr>
+            </a:lvl4pPr>
+            <a:lvl5pPr>
+              <a:defRPr sz="2175" b="0">
+                <a:solidFill>
+                  <a:srgbClr val="238A91"/>
+                </a:solidFill>
+                <a:latin typeface="Microsoft YaHei"/>
+                <a:ea typeface="Microsoft YaHei"/>
+                <a:cs typeface="Microsoft YaHei"/>
+              </a:defRPr>
+            </a:lvl5pPr>
+            <a:lvl6pPr>
+              <a:defRPr sz="2175" b="0">
+                <a:solidFill>
+                  <a:srgbClr val="238A91"/>
+                </a:solidFill>
+                <a:latin typeface="Microsoft YaHei"/>
+                <a:ea typeface="Microsoft YaHei"/>
+                <a:cs typeface="Microsoft YaHei"/>
+              </a:defRPr>
+            </a:lvl6pPr>
+            <a:lvl7pPr>
+              <a:defRPr sz="2175" b="0">
+                <a:solidFill>
+                  <a:srgbClr val="238A91"/>
+                </a:solidFill>
+                <a:latin typeface="Microsoft YaHei"/>
+                <a:ea typeface="Microsoft YaHei"/>
+                <a:cs typeface="Microsoft YaHei"/>
+              </a:defRPr>
+            </a:lvl7pPr>
+            <a:lvl8pPr>
+              <a:defRPr sz="2175" b="0">
+                <a:solidFill>
+                  <a:srgbClr val="238A91"/>
+                </a:solidFill>
+                <a:latin typeface="Microsoft YaHei"/>
+                <a:ea typeface="Microsoft YaHei"/>
+                <a:cs typeface="Microsoft YaHei"/>
+              </a:defRPr>
+            </a:lvl8pPr>
+            <a:lvl9pPr>
+              <a:defRPr sz="2175" b="0">
+                <a:solidFill>
+                  <a:srgbClr val="238A91"/>
+                </a:solidFill>
+                <a:latin typeface="Microsoft YaHei"/>
+                <a:ea typeface="Microsoft YaHei"/>
+                <a:cs typeface="Microsoft YaHei"/>
+              </a:defRPr>
+            </a:lvl9pPr>
+          </a:lstStyle>
+          <a:p>
+            <a:pPr>
+              <a:defRPr sz="2175" b="0">
+                <a:solidFill>
+                  <a:srgbClr val="238A91"/>
+                </a:solidFill>
+                <a:latin typeface="Microsoft YaHei"/>
+                <a:ea typeface="Microsoft YaHei"/>
+                <a:cs typeface="Microsoft YaHei"/>
+              </a:defRPr>
+            </a:pPr>
+            <a:r>
+              <a:rPr sz="2175" b="0">
+                <a:solidFill>
+                  <a:srgbClr val="238A91"/>
+                </a:solidFill>
+                <a:latin typeface="Microsoft YaHei"/>
+                <a:ea typeface="Microsoft YaHei"/>
+                <a:cs typeface="Microsoft YaHei"/>
+              </a:rPr>
+              <a:t>相较 V2：新样本权重从 0.25 提高到 0.5，移除间隔波动附加项。</a:t>
+            </a:r>
+          </a:p>
+        </p:txBody>
+      </p:sp>
+      <p:sp>
+        <p:nvSpPr>
+          <p:cNvPr id="18" name="例：g = 20，已等待 15，剩余评分为 5；仅出现过一次的页优先淘">
+            <a:extLst>
+              <a:ext uri="{FF2B5EF4-FFF2-40B4-BE49-F238E27FC236}">
+                <a16:creationId xmlns:a16="http://schemas.microsoft.com/office/drawing/2014/main" id="{0FB3115B-8FBD-4A06-A535-10AC395B2C20}"/>
+              </a:ext>
+            </a:extLst>
+          </p:cNvPr>
+          <p:cNvSpPr>
+            <a:spLocks noGrp="1"/>
+          </p:cNvSpPr>
+          <p:nvPr/>
+        </p:nvSpPr>
+        <p:spPr>
+          <a:xfrm>
+            <a:off x="857250" y="5953125"/>
+            <a:ext cx="10477500" cy="428625"/>
           </a:xfrm>
           <a:prstGeom prst="rect">
             <a:avLst/>
@@ -44669,521 +45671,7 @@
                 <a:ea typeface="Microsoft YaHei"/>
                 <a:cs typeface="Microsoft YaHei"/>
               </a:rPr>
-              <a:t>Δ 表示本次与上次访问之间的间隔。</a:t>
-            </a:r>
-          </a:p>
-        </p:txBody>
-      </p:sp>
-      <p:sp>
-        <p:nvSpPr>
-          <p:cNvPr id="16" name="g ← 0.75g + 0.25Δ&#10;v ← 0.75v + 0.25|">
-            <a:extLst>
-              <a:ext uri="{FF2B5EF4-FFF2-40B4-BE49-F238E27FC236}">
-                <a16:creationId xmlns:a16="http://schemas.microsoft.com/office/drawing/2014/main" id="{7EA33157-A608-4A20-9C35-06A98B937265}"/>
-              </a:ext>
-            </a:extLst>
-          </p:cNvPr>
-          <p:cNvSpPr>
-            <a:spLocks noGrp="1"/>
-          </p:cNvSpPr>
-          <p:nvPr/>
-        </p:nvSpPr>
-        <p:spPr>
-          <a:xfrm>
-            <a:off x="1095375" y="2095500"/>
-            <a:ext cx="10001250" cy="1238250"/>
-          </a:xfrm>
-          <a:prstGeom prst="rect">
-            <a:avLst/>
-          </a:prstGeom>
-          <a:noFill/>
-          <a:ln w="0">
-            <a:noFill/>
-          </a:ln>
-        </p:spPr>
-        <p:txBody>
-          <a:bodyPr lIns="0" tIns="0" rIns="0" bIns="0" anchor="t"/>
-          <a:lstStyle>
-            <a:defPPr>
-              <a:defRPr sz="2775" b="0">
-                <a:solidFill>
-                  <a:srgbClr val="6B4A82"/>
-                </a:solidFill>
-                <a:latin typeface="Consolas"/>
-                <a:ea typeface="Consolas"/>
-                <a:cs typeface="Consolas"/>
-              </a:defRPr>
-            </a:defPPr>
-            <a:lvl1pPr>
-              <a:defRPr sz="2775" b="0">
-                <a:solidFill>
-                  <a:srgbClr val="6B4A82"/>
-                </a:solidFill>
-                <a:latin typeface="Consolas"/>
-                <a:ea typeface="Consolas"/>
-                <a:cs typeface="Consolas"/>
-              </a:defRPr>
-            </a:lvl1pPr>
-            <a:lvl2pPr>
-              <a:defRPr sz="2775" b="0">
-                <a:solidFill>
-                  <a:srgbClr val="6B4A82"/>
-                </a:solidFill>
-                <a:latin typeface="Consolas"/>
-                <a:ea typeface="Consolas"/>
-                <a:cs typeface="Consolas"/>
-              </a:defRPr>
-            </a:lvl2pPr>
-            <a:lvl3pPr>
-              <a:defRPr sz="2775" b="0">
-                <a:solidFill>
-                  <a:srgbClr val="6B4A82"/>
-                </a:solidFill>
-                <a:latin typeface="Consolas"/>
-                <a:ea typeface="Consolas"/>
-                <a:cs typeface="Consolas"/>
-              </a:defRPr>
-            </a:lvl3pPr>
-            <a:lvl4pPr>
-              <a:defRPr sz="2775" b="0">
-                <a:solidFill>
-                  <a:srgbClr val="6B4A82"/>
-                </a:solidFill>
-                <a:latin typeface="Consolas"/>
-                <a:ea typeface="Consolas"/>
-                <a:cs typeface="Consolas"/>
-              </a:defRPr>
-            </a:lvl4pPr>
-            <a:lvl5pPr>
-              <a:defRPr sz="2775" b="0">
-                <a:solidFill>
-                  <a:srgbClr val="6B4A82"/>
-                </a:solidFill>
-                <a:latin typeface="Consolas"/>
-                <a:ea typeface="Consolas"/>
-                <a:cs typeface="Consolas"/>
-              </a:defRPr>
-            </a:lvl5pPr>
-            <a:lvl6pPr>
-              <a:defRPr sz="2775" b="0">
-                <a:solidFill>
-                  <a:srgbClr val="6B4A82"/>
-                </a:solidFill>
-                <a:latin typeface="Consolas"/>
-                <a:ea typeface="Consolas"/>
-                <a:cs typeface="Consolas"/>
-              </a:defRPr>
-            </a:lvl6pPr>
-            <a:lvl7pPr>
-              <a:defRPr sz="2775" b="0">
-                <a:solidFill>
-                  <a:srgbClr val="6B4A82"/>
-                </a:solidFill>
-                <a:latin typeface="Consolas"/>
-                <a:ea typeface="Consolas"/>
-                <a:cs typeface="Consolas"/>
-              </a:defRPr>
-            </a:lvl7pPr>
-            <a:lvl8pPr>
-              <a:defRPr sz="2775" b="0">
-                <a:solidFill>
-                  <a:srgbClr val="6B4A82"/>
-                </a:solidFill>
-                <a:latin typeface="Consolas"/>
-                <a:ea typeface="Consolas"/>
-                <a:cs typeface="Consolas"/>
-              </a:defRPr>
-            </a:lvl8pPr>
-            <a:lvl9pPr>
-              <a:defRPr sz="2775" b="0">
-                <a:solidFill>
-                  <a:srgbClr val="6B4A82"/>
-                </a:solidFill>
-                <a:latin typeface="Consolas"/>
-                <a:ea typeface="Consolas"/>
-                <a:cs typeface="Consolas"/>
-              </a:defRPr>
-            </a:lvl9pPr>
-          </a:lstStyle>
-          <a:p>
-            <a:pPr>
-              <a:defRPr sz="2775" b="0">
-                <a:solidFill>
-                  <a:srgbClr val="6B4A82"/>
-                </a:solidFill>
-                <a:latin typeface="Consolas"/>
-                <a:ea typeface="Consolas"/>
-                <a:cs typeface="Consolas"/>
-              </a:defRPr>
-            </a:pPr>
-            <a:r>
-              <a:rPr sz="2775" b="0">
-                <a:solidFill>
-                  <a:srgbClr val="6B4A82"/>
-                </a:solidFill>
-                <a:latin typeface="Consolas"/>
-                <a:ea typeface="Consolas"/>
-                <a:cs typeface="Consolas"/>
-              </a:rPr>
-              <a:t>g ← 0.75g + 0.25Δ</a:t>
-            </a:r>
-          </a:p>
-          <a:p>
-            <a:pPr>
-              <a:defRPr sz="2775" b="0">
-                <a:solidFill>
-                  <a:srgbClr val="6B4A82"/>
-                </a:solidFill>
-                <a:latin typeface="Consolas"/>
-                <a:ea typeface="Consolas"/>
-                <a:cs typeface="Consolas"/>
-              </a:defRPr>
-            </a:pPr>
-            <a:r>
-              <a:rPr sz="2775" b="0">
-                <a:solidFill>
-                  <a:srgbClr val="6B4A82"/>
-                </a:solidFill>
-                <a:latin typeface="Consolas"/>
-                <a:ea typeface="Consolas"/>
-                <a:cs typeface="Consolas"/>
-              </a:rPr>
-              <a:t>v ← 0.75v + 0.25|Δ − g旧|</a:t>
-            </a:r>
-          </a:p>
-        </p:txBody>
-      </p:sp>
-      <p:sp>
-        <p:nvSpPr>
-          <p:cNvPr id="17" name="参考间隔为 g + v。未到预计时刻时，评分 = 参考间隔 − 已等待">
-            <a:extLst>
-              <a:ext uri="{FF2B5EF4-FFF2-40B4-BE49-F238E27FC236}">
-                <a16:creationId xmlns:a16="http://schemas.microsoft.com/office/drawing/2014/main" id="{092B351C-9DF1-410F-B561-A2A0E165DAA3}"/>
-              </a:ext>
-            </a:extLst>
-          </p:cNvPr>
-          <p:cNvSpPr>
-            <a:spLocks noGrp="1"/>
-          </p:cNvSpPr>
-          <p:nvPr/>
-        </p:nvSpPr>
-        <p:spPr>
-          <a:xfrm>
-            <a:off x="857250" y="3714750"/>
-            <a:ext cx="10477500" cy="1095375"/>
-          </a:xfrm>
-          <a:prstGeom prst="rect">
-            <a:avLst/>
-          </a:prstGeom>
-          <a:noFill/>
-          <a:ln w="0">
-            <a:noFill/>
-          </a:ln>
-        </p:spPr>
-        <p:txBody>
-          <a:bodyPr lIns="0" tIns="0" rIns="0" bIns="0" anchor="t"/>
-          <a:lstStyle>
-            <a:defPPr>
-              <a:defRPr sz="2100" b="0">
-                <a:solidFill>
-                  <a:srgbClr val="29203A"/>
-                </a:solidFill>
-                <a:latin typeface="Microsoft YaHei"/>
-                <a:ea typeface="Microsoft YaHei"/>
-                <a:cs typeface="Microsoft YaHei"/>
-              </a:defRPr>
-            </a:defPPr>
-            <a:lvl1pPr>
-              <a:defRPr sz="2100" b="0">
-                <a:solidFill>
-                  <a:srgbClr val="29203A"/>
-                </a:solidFill>
-                <a:latin typeface="Microsoft YaHei"/>
-                <a:ea typeface="Microsoft YaHei"/>
-                <a:cs typeface="Microsoft YaHei"/>
-              </a:defRPr>
-            </a:lvl1pPr>
-            <a:lvl2pPr>
-              <a:defRPr sz="2100" b="0">
-                <a:solidFill>
-                  <a:srgbClr val="29203A"/>
-                </a:solidFill>
-                <a:latin typeface="Microsoft YaHei"/>
-                <a:ea typeface="Microsoft YaHei"/>
-                <a:cs typeface="Microsoft YaHei"/>
-              </a:defRPr>
-            </a:lvl2pPr>
-            <a:lvl3pPr>
-              <a:defRPr sz="2100" b="0">
-                <a:solidFill>
-                  <a:srgbClr val="29203A"/>
-                </a:solidFill>
-                <a:latin typeface="Microsoft YaHei"/>
-                <a:ea typeface="Microsoft YaHei"/>
-                <a:cs typeface="Microsoft YaHei"/>
-              </a:defRPr>
-            </a:lvl3pPr>
-            <a:lvl4pPr>
-              <a:defRPr sz="2100" b="0">
-                <a:solidFill>
-                  <a:srgbClr val="29203A"/>
-                </a:solidFill>
-                <a:latin typeface="Microsoft YaHei"/>
-                <a:ea typeface="Microsoft YaHei"/>
-                <a:cs typeface="Microsoft YaHei"/>
-              </a:defRPr>
-            </a:lvl4pPr>
-            <a:lvl5pPr>
-              <a:defRPr sz="2100" b="0">
-                <a:solidFill>
-                  <a:srgbClr val="29203A"/>
-                </a:solidFill>
-                <a:latin typeface="Microsoft YaHei"/>
-                <a:ea typeface="Microsoft YaHei"/>
-                <a:cs typeface="Microsoft YaHei"/>
-              </a:defRPr>
-            </a:lvl5pPr>
-            <a:lvl6pPr>
-              <a:defRPr sz="2100" b="0">
-                <a:solidFill>
-                  <a:srgbClr val="29203A"/>
-                </a:solidFill>
-                <a:latin typeface="Microsoft YaHei"/>
-                <a:ea typeface="Microsoft YaHei"/>
-                <a:cs typeface="Microsoft YaHei"/>
-              </a:defRPr>
-            </a:lvl6pPr>
-            <a:lvl7pPr>
-              <a:defRPr sz="2100" b="0">
-                <a:solidFill>
-                  <a:srgbClr val="29203A"/>
-                </a:solidFill>
-                <a:latin typeface="Microsoft YaHei"/>
-                <a:ea typeface="Microsoft YaHei"/>
-                <a:cs typeface="Microsoft YaHei"/>
-              </a:defRPr>
-            </a:lvl7pPr>
-            <a:lvl8pPr>
-              <a:defRPr sz="2100" b="0">
-                <a:solidFill>
-                  <a:srgbClr val="29203A"/>
-                </a:solidFill>
-                <a:latin typeface="Microsoft YaHei"/>
-                <a:ea typeface="Microsoft YaHei"/>
-                <a:cs typeface="Microsoft YaHei"/>
-              </a:defRPr>
-            </a:lvl8pPr>
-            <a:lvl9pPr>
-              <a:defRPr sz="2100" b="0">
-                <a:solidFill>
-                  <a:srgbClr val="29203A"/>
-                </a:solidFill>
-                <a:latin typeface="Microsoft YaHei"/>
-                <a:ea typeface="Microsoft YaHei"/>
-                <a:cs typeface="Microsoft YaHei"/>
-              </a:defRPr>
-            </a:lvl9pPr>
-          </a:lstStyle>
-          <a:p>
-            <a:pPr>
-              <a:defRPr sz="2100" b="0">
-                <a:solidFill>
-                  <a:srgbClr val="29203A"/>
-                </a:solidFill>
-                <a:latin typeface="Microsoft YaHei"/>
-                <a:ea typeface="Microsoft YaHei"/>
-                <a:cs typeface="Microsoft YaHei"/>
-              </a:defRPr>
-            </a:pPr>
-            <a:r>
-              <a:rPr sz="2100" b="0">
-                <a:solidFill>
-                  <a:srgbClr val="29203A"/>
-                </a:solidFill>
-                <a:latin typeface="Microsoft YaHei"/>
-                <a:ea typeface="Microsoft YaHei"/>
-                <a:cs typeface="Microsoft YaHei"/>
-              </a:rPr>
-              <a:t>参考间隔为 g + v。未到预计时刻时，评分 = 参考间隔 − 已等待时间。</a:t>
-            </a:r>
-          </a:p>
-          <a:p>
-            <a:pPr>
-              <a:defRPr sz="2100" b="0">
-                <a:solidFill>
-                  <a:srgbClr val="29203A"/>
-                </a:solidFill>
-                <a:latin typeface="Microsoft YaHei"/>
-                <a:ea typeface="Microsoft YaHei"/>
-                <a:cs typeface="Microsoft YaHei"/>
-              </a:defRPr>
-            </a:pPr>
-            <a:r>
-              <a:rPr sz="2100" b="0">
-                <a:solidFill>
-                  <a:srgbClr val="29203A"/>
-                </a:solidFill>
-                <a:latin typeface="Microsoft YaHei"/>
-                <a:ea typeface="Microsoft YaHei"/>
-                <a:cs typeface="Microsoft YaHei"/>
-              </a:rPr>
-              <a:t>已经逾期时，评分 = 已等待时间。淘汰评分最大者。</a:t>
-            </a:r>
-          </a:p>
-        </p:txBody>
-      </p:sp>
-      <p:sp>
-        <p:nvSpPr>
-          <p:cNvPr id="18" name="例：参考间隔为 20，已等待 15，预计剩余 5；只出现过一次的页优先">
-            <a:extLst>
-              <a:ext uri="{FF2B5EF4-FFF2-40B4-BE49-F238E27FC236}">
-                <a16:creationId xmlns:a16="http://schemas.microsoft.com/office/drawing/2014/main" id="{5066AA89-6337-4305-BA83-EB26DA0A83EA}"/>
-              </a:ext>
-            </a:extLst>
-          </p:cNvPr>
-          <p:cNvSpPr>
-            <a:spLocks noGrp="1"/>
-          </p:cNvSpPr>
-          <p:nvPr/>
-        </p:nvSpPr>
-        <p:spPr>
-          <a:xfrm>
-            <a:off x="857250" y="5286375"/>
-            <a:ext cx="10477500" cy="809625"/>
-          </a:xfrm>
-          <a:prstGeom prst="rect">
-            <a:avLst/>
-          </a:prstGeom>
-          <a:noFill/>
-          <a:ln w="0">
-            <a:noFill/>
-          </a:ln>
-        </p:spPr>
-        <p:txBody>
-          <a:bodyPr lIns="0" tIns="0" rIns="0" bIns="0" anchor="t"/>
-          <a:lstStyle>
-            <a:defPPr>
-              <a:defRPr sz="2025" b="0">
-                <a:solidFill>
-                  <a:srgbClr val="238A91"/>
-                </a:solidFill>
-                <a:latin typeface="Microsoft YaHei"/>
-                <a:ea typeface="Microsoft YaHei"/>
-                <a:cs typeface="Microsoft YaHei"/>
-              </a:defRPr>
-            </a:defPPr>
-            <a:lvl1pPr>
-              <a:defRPr sz="2025" b="0">
-                <a:solidFill>
-                  <a:srgbClr val="238A91"/>
-                </a:solidFill>
-                <a:latin typeface="Microsoft YaHei"/>
-                <a:ea typeface="Microsoft YaHei"/>
-                <a:cs typeface="Microsoft YaHei"/>
-              </a:defRPr>
-            </a:lvl1pPr>
-            <a:lvl2pPr>
-              <a:defRPr sz="2025" b="0">
-                <a:solidFill>
-                  <a:srgbClr val="238A91"/>
-                </a:solidFill>
-                <a:latin typeface="Microsoft YaHei"/>
-                <a:ea typeface="Microsoft YaHei"/>
-                <a:cs typeface="Microsoft YaHei"/>
-              </a:defRPr>
-            </a:lvl2pPr>
-            <a:lvl3pPr>
-              <a:defRPr sz="2025" b="0">
-                <a:solidFill>
-                  <a:srgbClr val="238A91"/>
-                </a:solidFill>
-                <a:latin typeface="Microsoft YaHei"/>
-                <a:ea typeface="Microsoft YaHei"/>
-                <a:cs typeface="Microsoft YaHei"/>
-              </a:defRPr>
-            </a:lvl3pPr>
-            <a:lvl4pPr>
-              <a:defRPr sz="2025" b="0">
-                <a:solidFill>
-                  <a:srgbClr val="238A91"/>
-                </a:solidFill>
-                <a:latin typeface="Microsoft YaHei"/>
-                <a:ea typeface="Microsoft YaHei"/>
-                <a:cs typeface="Microsoft YaHei"/>
-              </a:defRPr>
-            </a:lvl4pPr>
-            <a:lvl5pPr>
-              <a:defRPr sz="2025" b="0">
-                <a:solidFill>
-                  <a:srgbClr val="238A91"/>
-                </a:solidFill>
-                <a:latin typeface="Microsoft YaHei"/>
-                <a:ea typeface="Microsoft YaHei"/>
-                <a:cs typeface="Microsoft YaHei"/>
-              </a:defRPr>
-            </a:lvl5pPr>
-            <a:lvl6pPr>
-              <a:defRPr sz="2025" b="0">
-                <a:solidFill>
-                  <a:srgbClr val="238A91"/>
-                </a:solidFill>
-                <a:latin typeface="Microsoft YaHei"/>
-                <a:ea typeface="Microsoft YaHei"/>
-                <a:cs typeface="Microsoft YaHei"/>
-              </a:defRPr>
-            </a:lvl6pPr>
-            <a:lvl7pPr>
-              <a:defRPr sz="2025" b="0">
-                <a:solidFill>
-                  <a:srgbClr val="238A91"/>
-                </a:solidFill>
-                <a:latin typeface="Microsoft YaHei"/>
-                <a:ea typeface="Microsoft YaHei"/>
-                <a:cs typeface="Microsoft YaHei"/>
-              </a:defRPr>
-            </a:lvl7pPr>
-            <a:lvl8pPr>
-              <a:defRPr sz="2025" b="0">
-                <a:solidFill>
-                  <a:srgbClr val="238A91"/>
-                </a:solidFill>
-                <a:latin typeface="Microsoft YaHei"/>
-                <a:ea typeface="Microsoft YaHei"/>
-                <a:cs typeface="Microsoft YaHei"/>
-              </a:defRPr>
-            </a:lvl8pPr>
-            <a:lvl9pPr>
-              <a:defRPr sz="2025" b="0">
-                <a:solidFill>
-                  <a:srgbClr val="238A91"/>
-                </a:solidFill>
-                <a:latin typeface="Microsoft YaHei"/>
-                <a:ea typeface="Microsoft YaHei"/>
-                <a:cs typeface="Microsoft YaHei"/>
-              </a:defRPr>
-            </a:lvl9pPr>
-          </a:lstStyle>
-          <a:p>
-            <a:pPr>
-              <a:defRPr sz="2025" b="0">
-                <a:solidFill>
-                  <a:srgbClr val="238A91"/>
-                </a:solidFill>
-                <a:latin typeface="Microsoft YaHei"/>
-                <a:ea typeface="Microsoft YaHei"/>
-                <a:cs typeface="Microsoft YaHei"/>
-              </a:defRPr>
-            </a:pPr>
-            <a:r>
-              <a:rPr sz="2025" b="0">
-                <a:solidFill>
-                  <a:srgbClr val="238A91"/>
-                </a:solidFill>
-                <a:latin typeface="Microsoft YaHei"/>
-                <a:ea typeface="Microsoft YaHei"/>
-                <a:cs typeface="Microsoft YaHei"/>
-              </a:rPr>
-              <a:t>例：参考间隔为 20，已等待 15，预计剩余 5；只出现过一次的页优先淘汰。</a:t>
+              <a:t>例：g = 20，已等待 15，剩余评分为 5；仅出现过一次的页优先淘汰。</a:t>
             </a:r>
           </a:p>
         </p:txBody>
@@ -45417,7 +45905,7 @@
                 <a:ea typeface="Microsoft YaHei"/>
                 <a:cs typeface="Microsoft YaHei"/>
               </a:rPr>
-              <a:t>本轮优化：减少影子与真实状态的偏差</a:t>
+              <a:t>容量规则与影子策略比较</a:t>
             </a:r>
             <a:endParaRPr sz="2775"/>
           </a:p>
@@ -45782,10 +46270,10 @@
       </p:sp>
       <p:sp>
         <p:nvSpPr>
-          <p:cNvPr id="14" name="旧版问题：影子策略在自己的驻留集合上表现更好，切换后未必兑现。">
+          <p:cNvPr id="14" name="V3 在较大容量缩短历史，保留 V2 的窗口与影子对齐机制。">
             <a:extLst>
               <a:ext uri="{FF2B5EF4-FFF2-40B4-BE49-F238E27FC236}">
-                <a16:creationId xmlns:a16="http://schemas.microsoft.com/office/drawing/2014/main" id="{7459C22E-0276-49ED-8619-3BA917AC7AD8}"/>
+                <a16:creationId xmlns:a16="http://schemas.microsoft.com/office/drawing/2014/main" id="{CC19D7C1-9918-4A60-994E-B46D3B36A03A}"/>
               </a:ext>
             </a:extLst>
           </p:cNvPr>
@@ -45931,7 +46419,7 @@
                 <a:ea typeface="Microsoft YaHei"/>
                 <a:cs typeface="Microsoft YaHei"/>
               </a:rPr>
-              <a:t>旧版问题：影子策略在自己的驻留集合上表现更好，切换后未必兑现。</a:t>
+              <a:t>V3 在较大容量缩短历史，保留 V2 的窗口与影子对齐机制。</a:t>
             </a:r>
           </a:p>
         </p:txBody>
@@ -45941,7 +46429,7 @@
           <p:cNvPr id="15" name="表格 14">
             <a:extLst>
               <a:ext uri="{FF2B5EF4-FFF2-40B4-BE49-F238E27FC236}">
-                <a16:creationId xmlns:a16="http://schemas.microsoft.com/office/drawing/2014/main" id="{896102EC-A3E9-42D0-A1D8-67FC68B413A6}"/>
+                <a16:creationId xmlns:a16="http://schemas.microsoft.com/office/drawing/2014/main" id="{2E94BF17-D236-400C-B0CC-3B22157E8AE5}"/>
               </a:ext>
             </a:extLst>
           </p:cNvPr>
@@ -46051,7 +46539,59 @@
                           <a:ea typeface="Microsoft YaHei"/>
                           <a:cs typeface="Microsoft YaHei"/>
                         </a:rPr>
-                        <a:t>窗口 W</a:t>
+                        <a:t>历史页号上限 H</a:t>
+                      </a:r>
+                    </a:p>
+                  </a:txBody>
+                  <a:tcPr marL="114300" marR="95250" marT="114300" marB="95250" anchor="ctr">
+                    <a:lnL w="6668" cap="flat" cmpd="sng" algn="ctr">
+                      <a:solidFill>
+                        <a:srgbClr val="E8E3EF"/>
+                      </a:solidFill>
+                      <a:prstDash val="solid"/>
+                      <a:round/>
+                      <a:headEnd type="none" w="med" len="med"/>
+                      <a:tailEnd type="none" w="med" len="med"/>
+                    </a:lnL>
+                    <a:lnR w="6668">
+                      <a:solidFill>
+                        <a:srgbClr val="E8E3EF"/>
+                      </a:solidFill>
+                      <a:prstDash val="solid"/>
+                    </a:lnR>
+                    <a:lnT w="6668">
+                      <a:solidFill>
+                        <a:srgbClr val="E8E3EF"/>
+                      </a:solidFill>
+                      <a:prstDash val="solid"/>
+                    </a:lnT>
+                    <a:lnB w="6668">
+                      <a:solidFill>
+                        <a:srgbClr val="E8E3EF"/>
+                      </a:solidFill>
+                      <a:prstDash val="solid"/>
+                    </a:lnB>
+                    <a:solidFill>
+                      <a:srgbClr val="E3DFFF"/>
+                    </a:solidFill>
+                  </a:tcPr>
+                </a:tc>
+                <a:tc>
+                  <a:txBody>
+                    <a:bodyPr/>
+                    <a:lstStyle/>
+                    <a:p>
+                      <a:pPr algn="ctr"/>
+                      <a:r>
+                        <a:rPr sz="1875" b="1">
+                          <a:solidFill>
+                            <a:srgbClr val="6B4A82"/>
+                          </a:solidFill>
+                          <a:latin typeface="Microsoft YaHei"/>
+                          <a:ea typeface="Microsoft YaHei"/>
+                          <a:cs typeface="Microsoft YaHei"/>
+                        </a:rPr>
+                        <a:t>比较窗口 W</a:t>
                       </a:r>
                     </a:p>
                   </a:txBody>
@@ -46104,58 +46644,6 @@
                           <a:cs typeface="Microsoft YaHei"/>
                         </a:rPr>
                         <a:t>切换门槛</a:t>
-                      </a:r>
-                    </a:p>
-                  </a:txBody>
-                  <a:tcPr marL="114300" marR="95250" marT="114300" marB="95250" anchor="ctr">
-                    <a:lnL w="6668" cap="flat" cmpd="sng" algn="ctr">
-                      <a:solidFill>
-                        <a:srgbClr val="E8E3EF"/>
-                      </a:solidFill>
-                      <a:prstDash val="solid"/>
-                      <a:round/>
-                      <a:headEnd type="none" w="med" len="med"/>
-                      <a:tailEnd type="none" w="med" len="med"/>
-                    </a:lnL>
-                    <a:lnR w="6668">
-                      <a:solidFill>
-                        <a:srgbClr val="E8E3EF"/>
-                      </a:solidFill>
-                      <a:prstDash val="solid"/>
-                    </a:lnR>
-                    <a:lnT w="6668">
-                      <a:solidFill>
-                        <a:srgbClr val="E8E3EF"/>
-                      </a:solidFill>
-                      <a:prstDash val="solid"/>
-                    </a:lnT>
-                    <a:lnB w="6668">
-                      <a:solidFill>
-                        <a:srgbClr val="E8E3EF"/>
-                      </a:solidFill>
-                      <a:prstDash val="solid"/>
-                    </a:lnB>
-                    <a:solidFill>
-                      <a:srgbClr val="E3DFFF"/>
-                    </a:solidFill>
-                  </a:tcPr>
-                </a:tc>
-                <a:tc>
-                  <a:txBody>
-                    <a:bodyPr/>
-                    <a:lstStyle/>
-                    <a:p>
-                      <a:pPr algn="ctr"/>
-                      <a:r>
-                        <a:rPr sz="1875" b="1">
-                          <a:solidFill>
-                            <a:srgbClr val="6B4A82"/>
-                          </a:solidFill>
-                          <a:latin typeface="Microsoft YaHei"/>
-                          <a:ea typeface="Microsoft YaHei"/>
-                          <a:cs typeface="Microsoft YaHei"/>
-                        </a:rPr>
-                        <a:t>影子状态重置</a:t>
                       </a:r>
                     </a:p>
                   </a:txBody>
@@ -46266,6 +46754,61 @@
                           <a:ea typeface="Microsoft YaHei"/>
                           <a:cs typeface="Microsoft YaHei"/>
                         </a:rPr>
+                        <a:t>max(32,16F)</a:t>
+                      </a:r>
+                    </a:p>
+                  </a:txBody>
+                  <a:tcPr marL="114300" marR="95250" marT="114300" marB="95250" anchor="ctr">
+                    <a:lnL w="6668" cap="flat" cmpd="sng" algn="ctr">
+                      <a:solidFill>
+                        <a:srgbClr val="E8E3EF"/>
+                      </a:solidFill>
+                      <a:prstDash val="solid"/>
+                      <a:round/>
+                      <a:headEnd type="none" w="med" len="med"/>
+                      <a:tailEnd type="none" w="med" len="med"/>
+                    </a:lnL>
+                    <a:lnR w="6668">
+                      <a:solidFill>
+                        <a:srgbClr val="E8E3EF"/>
+                      </a:solidFill>
+                      <a:prstDash val="solid"/>
+                    </a:lnR>
+                    <a:lnT w="6668" cap="flat" cmpd="sng" algn="ctr">
+                      <a:solidFill>
+                        <a:srgbClr val="E8E3EF"/>
+                      </a:solidFill>
+                      <a:prstDash val="solid"/>
+                      <a:round/>
+                      <a:headEnd type="none" w="med" len="med"/>
+                      <a:tailEnd type="none" w="med" len="med"/>
+                    </a:lnT>
+                    <a:lnB w="6668">
+                      <a:solidFill>
+                        <a:srgbClr val="E8E3EF"/>
+                      </a:solidFill>
+                      <a:prstDash val="solid"/>
+                    </a:lnB>
+                    <a:solidFill>
+                      <a:srgbClr val="FFFFFF"/>
+                    </a:solidFill>
+                  </a:tcPr>
+                </a:tc>
+                <a:tc>
+                  <a:txBody>
+                    <a:bodyPr/>
+                    <a:lstStyle/>
+                    <a:p>
+                      <a:pPr algn="ctr"/>
+                      <a:r>
+                        <a:rPr sz="1875" b="0">
+                          <a:solidFill>
+                            <a:srgbClr val="29203A"/>
+                          </a:solidFill>
+                          <a:latin typeface="Microsoft YaHei"/>
+                          <a:ea typeface="Microsoft YaHei"/>
+                          <a:cs typeface="Microsoft YaHei"/>
+                        </a:rPr>
                         <a:t>max(32,4F)</a:t>
                       </a:r>
                     </a:p>
@@ -46322,61 +46865,6 @@
                           <a:cs typeface="Microsoft YaHei"/>
                         </a:rPr>
                         <a:t>超过 max(1,⌊W/50⌋)</a:t>
-                      </a:r>
-                    </a:p>
-                  </a:txBody>
-                  <a:tcPr marL="114300" marR="95250" marT="114300" marB="95250" anchor="ctr">
-                    <a:lnL w="6668" cap="flat" cmpd="sng" algn="ctr">
-                      <a:solidFill>
-                        <a:srgbClr val="E8E3EF"/>
-                      </a:solidFill>
-                      <a:prstDash val="solid"/>
-                      <a:round/>
-                      <a:headEnd type="none" w="med" len="med"/>
-                      <a:tailEnd type="none" w="med" len="med"/>
-                    </a:lnL>
-                    <a:lnR w="6668">
-                      <a:solidFill>
-                        <a:srgbClr val="E8E3EF"/>
-                      </a:solidFill>
-                      <a:prstDash val="solid"/>
-                    </a:lnR>
-                    <a:lnT w="6668" cap="flat" cmpd="sng" algn="ctr">
-                      <a:solidFill>
-                        <a:srgbClr val="E8E3EF"/>
-                      </a:solidFill>
-                      <a:prstDash val="solid"/>
-                      <a:round/>
-                      <a:headEnd type="none" w="med" len="med"/>
-                      <a:tailEnd type="none" w="med" len="med"/>
-                    </a:lnT>
-                    <a:lnB w="6668">
-                      <a:solidFill>
-                        <a:srgbClr val="E8E3EF"/>
-                      </a:solidFill>
-                      <a:prstDash val="solid"/>
-                    </a:lnB>
-                    <a:solidFill>
-                      <a:srgbClr val="FFFFFF"/>
-                    </a:solidFill>
-                  </a:tcPr>
-                </a:tc>
-                <a:tc>
-                  <a:txBody>
-                    <a:bodyPr/>
-                    <a:lstStyle/>
-                    <a:p>
-                      <a:pPr algn="ctr"/>
-                      <a:r>
-                        <a:rPr sz="1875" b="0">
-                          <a:solidFill>
-                            <a:srgbClr val="29203A"/>
-                          </a:solidFill>
-                          <a:latin typeface="Microsoft YaHei"/>
-                          <a:ea typeface="Microsoft YaHei"/>
-                          <a:cs typeface="Microsoft YaHei"/>
-                        </a:rPr>
-                        <a:t>沿用旧版</a:t>
                       </a:r>
                     </a:p>
                   </a:txBody>
@@ -46490,6 +46978,61 @@
                           <a:ea typeface="Microsoft YaHei"/>
                           <a:cs typeface="Microsoft YaHei"/>
                         </a:rPr>
+                        <a:t>max(32,8F)</a:t>
+                      </a:r>
+                    </a:p>
+                  </a:txBody>
+                  <a:tcPr marL="114300" marR="95250" marT="114300" marB="95250" anchor="ctr">
+                    <a:lnL w="6668" cap="flat" cmpd="sng" algn="ctr">
+                      <a:solidFill>
+                        <a:srgbClr val="E8E3EF"/>
+                      </a:solidFill>
+                      <a:prstDash val="solid"/>
+                      <a:round/>
+                      <a:headEnd type="none" w="med" len="med"/>
+                      <a:tailEnd type="none" w="med" len="med"/>
+                    </a:lnL>
+                    <a:lnR w="6668">
+                      <a:solidFill>
+                        <a:srgbClr val="E8E3EF"/>
+                      </a:solidFill>
+                      <a:prstDash val="solid"/>
+                    </a:lnR>
+                    <a:lnT w="6668" cap="flat" cmpd="sng" algn="ctr">
+                      <a:solidFill>
+                        <a:srgbClr val="E8E3EF"/>
+                      </a:solidFill>
+                      <a:prstDash val="solid"/>
+                      <a:round/>
+                      <a:headEnd type="none" w="med" len="med"/>
+                      <a:tailEnd type="none" w="med" len="med"/>
+                    </a:lnT>
+                    <a:lnB w="6668">
+                      <a:solidFill>
+                        <a:srgbClr val="E8E3EF"/>
+                      </a:solidFill>
+                      <a:prstDash val="solid"/>
+                    </a:lnB>
+                    <a:solidFill>
+                      <a:srgbClr val="FFFFFF"/>
+                    </a:solidFill>
+                  </a:tcPr>
+                </a:tc>
+                <a:tc>
+                  <a:txBody>
+                    <a:bodyPr/>
+                    <a:lstStyle/>
+                    <a:p>
+                      <a:pPr algn="ctr"/>
+                      <a:r>
+                        <a:rPr sz="1875" b="0">
+                          <a:solidFill>
+                            <a:srgbClr val="29203A"/>
+                          </a:solidFill>
+                          <a:latin typeface="Microsoft YaHei"/>
+                          <a:ea typeface="Microsoft YaHei"/>
+                          <a:cs typeface="Microsoft YaHei"/>
+                        </a:rPr>
                         <a:t>2 × max(32,4F)</a:t>
                       </a:r>
                     </a:p>
@@ -46585,61 +47128,6 @@
                     </a:solidFill>
                   </a:tcPr>
                 </a:tc>
-                <a:tc>
-                  <a:txBody>
-                    <a:bodyPr/>
-                    <a:lstStyle/>
-                    <a:p>
-                      <a:pPr algn="ctr"/>
-                      <a:r>
-                        <a:rPr sz="1875" b="0">
-                          <a:solidFill>
-                            <a:srgbClr val="29203A"/>
-                          </a:solidFill>
-                          <a:latin typeface="Microsoft YaHei"/>
-                          <a:ea typeface="Microsoft YaHei"/>
-                          <a:cs typeface="Microsoft YaHei"/>
-                        </a:rPr>
-                        <a:t>每 W 次从实际状态复制</a:t>
-                      </a:r>
-                    </a:p>
-                  </a:txBody>
-                  <a:tcPr marL="114300" marR="95250" marT="114300" marB="95250" anchor="ctr">
-                    <a:lnL w="6668" cap="flat" cmpd="sng" algn="ctr">
-                      <a:solidFill>
-                        <a:srgbClr val="E8E3EF"/>
-                      </a:solidFill>
-                      <a:prstDash val="solid"/>
-                      <a:round/>
-                      <a:headEnd type="none" w="med" len="med"/>
-                      <a:tailEnd type="none" w="med" len="med"/>
-                    </a:lnL>
-                    <a:lnR w="6668">
-                      <a:solidFill>
-                        <a:srgbClr val="E8E3EF"/>
-                      </a:solidFill>
-                      <a:prstDash val="solid"/>
-                    </a:lnR>
-                    <a:lnT w="6668" cap="flat" cmpd="sng" algn="ctr">
-                      <a:solidFill>
-                        <a:srgbClr val="E8E3EF"/>
-                      </a:solidFill>
-                      <a:prstDash val="solid"/>
-                      <a:round/>
-                      <a:headEnd type="none" w="med" len="med"/>
-                      <a:tailEnd type="none" w="med" len="med"/>
-                    </a:lnT>
-                    <a:lnB w="6668">
-                      <a:solidFill>
-                        <a:srgbClr val="E8E3EF"/>
-                      </a:solidFill>
-                      <a:prstDash val="solid"/>
-                    </a:lnB>
-                    <a:solidFill>
-                      <a:srgbClr val="FFFFFF"/>
-                    </a:solidFill>
-                  </a:tcPr>
-                </a:tc>
                 <a:extLst>
                   <a:ext uri="{0D108BD9-81ED-4DB2-BD59-A6C34878D82A}">
                     <a16:rowId xmlns:a16="http://schemas.microsoft.com/office/drawing/2014/main" val="10002"/>
@@ -46652,10 +47140,10 @@
       </p:graphicFrame>
       <p:sp>
         <p:nvSpPr>
-          <p:cNvPr id="16" name="复制的是实际缓存的页号、最近访问位置和随机数状态。">
+          <p:cNvPr id="16" name="F &gt; 20 时，每 W 次从实际缓存复制页号状态到三个影子缓存。">
             <a:extLst>
               <a:ext uri="{FF2B5EF4-FFF2-40B4-BE49-F238E27FC236}">
-                <a16:creationId xmlns:a16="http://schemas.microsoft.com/office/drawing/2014/main" id="{5BEB8791-1F67-4F89-BA54-D483B8CC3A46}"/>
+                <a16:creationId xmlns:a16="http://schemas.microsoft.com/office/drawing/2014/main" id="{EA959E60-5BBC-454A-A612-E79136C55404}"/>
               </a:ext>
             </a:extLst>
           </p:cNvPr>
@@ -46667,7 +47155,7 @@
         <p:spPr>
           <a:xfrm>
             <a:off x="857250" y="5095875"/>
-            <a:ext cx="10477500" cy="523875"/>
+            <a:ext cx="10477500" cy="619125"/>
           </a:xfrm>
           <a:prstGeom prst="rect">
             <a:avLst/>
@@ -46801,7 +47289,7 @@
                 <a:ea typeface="Microsoft YaHei"/>
                 <a:cs typeface="Microsoft YaHei"/>
               </a:rPr>
-              <a:t>复制的是实际缓存的页号、最近访问位置和随机数状态。</a:t>
+              <a:t>F &gt; 20 时，每 W 次从实际缓存复制页号状态到三个影子缓存。</a:t>
             </a:r>
           </a:p>
         </p:txBody>
@@ -46811,7 +47299,7 @@
           <p:cNvPr id="17" name="每 W/4 次比较一次，只使用已完成的访问；真实物理页框始终为 F 个">
             <a:extLst>
               <a:ext uri="{FF2B5EF4-FFF2-40B4-BE49-F238E27FC236}">
-                <a16:creationId xmlns:a16="http://schemas.microsoft.com/office/drawing/2014/main" id="{21973958-A857-4A34-B9F1-EFF9B791C106}"/>
+                <a16:creationId xmlns:a16="http://schemas.microsoft.com/office/drawing/2014/main" id="{A7EAD697-335D-4BDF-BBC8-1B87A6DC20E7}"/>
               </a:ext>
             </a:extLst>
           </p:cNvPr>
@@ -46822,8 +47310,8 @@
         </p:nvSpPr>
         <p:spPr>
           <a:xfrm>
-            <a:off x="857250" y="5762625"/>
-            <a:ext cx="10477500" cy="476250"/>
+            <a:off x="857250" y="5905500"/>
+            <a:ext cx="10477500" cy="428625"/>
           </a:xfrm>
           <a:prstGeom prst="rect">
             <a:avLst/>
@@ -47559,7 +48047,7 @@
           <p:cNvPr id="14" name="Chart">
             <a:extLst>
               <a:ext uri="{FF2B5EF4-FFF2-40B4-BE49-F238E27FC236}">
-                <a16:creationId xmlns:a16="http://schemas.microsoft.com/office/drawing/2014/main" id="{5C95B094-DFC1-4196-8281-FE023A16E19A}"/>
+                <a16:creationId xmlns:a16="http://schemas.microsoft.com/office/drawing/2014/main" id="{16EDBFCE-1298-455C-BB8E-B6E5F5B1C100}"/>
               </a:ext>
             </a:extLst>
           </p:cNvPr>
@@ -47578,10 +48066,10 @@
       </p:graphicFrame>
       <p:sp>
         <p:nvSpPr>
-          <p:cNvPr id="15" name="Adaptive V2：17,354.63，比 Random 少 25">
+          <p:cNvPr id="15" name="Adaptive V3：17,100.79，比 Random 少 26">
             <a:extLst>
               <a:ext uri="{FF2B5EF4-FFF2-40B4-BE49-F238E27FC236}">
-                <a16:creationId xmlns:a16="http://schemas.microsoft.com/office/drawing/2014/main" id="{098E60F7-CA70-479A-B748-8F918C65A73F}"/>
+                <a16:creationId xmlns:a16="http://schemas.microsoft.com/office/drawing/2014/main" id="{E8303AA1-A284-4064-A72A-126F726DC354}"/>
               </a:ext>
             </a:extLst>
           </p:cNvPr>
@@ -47727,7 +48215,7 @@
                 <a:ea typeface="Microsoft YaHei"/>
                 <a:cs typeface="Microsoft YaHei"/>
               </a:rPr>
-              <a:t>Adaptive V2：17,354.63，比 Random 少 25.62%，比 LRU 少 28.99%。</a:t>
+              <a:t>Adaptive V3：17,100.79，比 Random 少 26.70%，比 LRU 少 30.02%。</a:t>
             </a:r>
           </a:p>
         </p:txBody>
@@ -47737,7 +48225,7 @@
           <p:cNvPr id="16" name="4 条轨迹 × 5 档容量；Random / Adaptive 用种子">
             <a:extLst>
               <a:ext uri="{FF2B5EF4-FFF2-40B4-BE49-F238E27FC236}">
-                <a16:creationId xmlns:a16="http://schemas.microsoft.com/office/drawing/2014/main" id="{CD1F3673-5B44-4E8E-BFE9-5F3DA085E3FA}"/>
+                <a16:creationId xmlns:a16="http://schemas.microsoft.com/office/drawing/2014/main" id="{BD4AD8C2-A782-464F-9FE8-1E209372E754}"/>
               </a:ext>
             </a:extLst>
           </p:cNvPr>
